--- a/docs/lectures/lecture_06/06_lecture_powerpoint.pptx
+++ b/docs/lectures/lecture_06/06_lecture_powerpoint.pptx
@@ -7,6 +7,24 @@
   <p:sldIdLst>
     <p:sldId id="256" r:id="rId2"/>
     <p:sldId id="257" r:id="rId3"/>
+    <p:sldId id="258" r:id="rId4"/>
+    <p:sldId id="259" r:id="rId5"/>
+    <p:sldId id="260" r:id="rId6"/>
+    <p:sldId id="261" r:id="rId7"/>
+    <p:sldId id="262" r:id="rId8"/>
+    <p:sldId id="263" r:id="rId9"/>
+    <p:sldId id="264" r:id="rId10"/>
+    <p:sldId id="265" r:id="rId11"/>
+    <p:sldId id="266" r:id="rId12"/>
+    <p:sldId id="267" r:id="rId13"/>
+    <p:sldId id="268" r:id="rId14"/>
+    <p:sldId id="269" r:id="rId15"/>
+    <p:sldId id="270" r:id="rId16"/>
+    <p:sldId id="271" r:id="rId17"/>
+    <p:sldId id="272" r:id="rId18"/>
+    <p:sldId id="273" r:id="rId19"/>
+    <p:sldId id="274" r:id="rId20"/>
+    <p:sldId id="275" r:id="rId21"/>
   </p:sldIdLst>
   <p:sldSz cx="9144000" cy="5143500" type="screen16x9"/>
   <p:notesSz cx="6858000" cy="9144000"/>
@@ -3280,7 +3298,7 @@
             </a:pPr>
             <a:r>
               <a:rPr/>
-              <a:t>Lecture 06</a:t>
+              <a:t>Lecture 06 — Real Climate Data in R</a:t>
             </a:r>
           </a:p>
         </p:txBody>
@@ -3310,7 +3328,5836 @@
             </a:pPr>
             <a:r>
               <a:rPr/>
+              <a:t>Downloading, summarizing, and modeling Duluth weather station data</a:t>
+            </a:r>
+            <a:br/>
+            <a:br/>
+            <a:r>
+              <a:rPr/>
               <a:t>Bill Perry</a:t>
+            </a:r>
+          </a:p>
+        </p:txBody>
+      </p:sp>
+      <p:sp>
+        <p:nvSpPr>
+          <p:cNvPr id="4" name="Date Placeholder 3"/>
+          <p:cNvSpPr>
+            <a:spLocks noGrp="1"/>
+          </p:cNvSpPr>
+          <p:nvPr>
+            <p:ph idx="10" sz="half" type="dt"/>
+          </p:nvPr>
+        </p:nvSpPr>
+        <p:spPr/>
+        <p:txBody>
+          <a:bodyPr/>
+          <a:lstStyle/>
+          <a:p>
+            <a:pPr lvl="0" indent="0" marL="0">
+              <a:buNone/>
+            </a:pPr>
+            <a:r>
+              <a:rPr/>
+              <a:t>2026-06-30</a:t>
+            </a:r>
+          </a:p>
+        </p:txBody>
+      </p:sp>
+    </p:spTree>
+  </p:cSld>
+</p:sld>
+</file>
+
+<file path=ppt/slides/slide10.xml><?xml version="1.0" encoding="utf-8"?>
+<p:sld xmlns:a="http://schemas.openxmlformats.org/drawingml/2006/main" xmlns:r="http://schemas.openxmlformats.org/officeDocument/2006/relationships" xmlns:p="http://schemas.openxmlformats.org/presentationml/2006/main">
+  <p:cSld>
+    <p:spTree>
+      <p:nvGrpSpPr>
+        <p:cNvPr id="1" name=""/>
+        <p:cNvGrpSpPr/>
+        <p:nvPr/>
+      </p:nvGrpSpPr>
+      <p:grpSpPr>
+        <a:xfrm>
+          <a:off x="0" y="0"/>
+          <a:ext cx="0" cy="0"/>
+          <a:chOff x="0" y="0"/>
+          <a:chExt cx="0" cy="0"/>
+        </a:xfrm>
+      </p:grpSpPr>
+      <p:sp>
+        <p:nvSpPr>
+          <p:cNvPr id="2" name="Title 1"/>
+          <p:cNvSpPr>
+            <a:spLocks noGrp="1"/>
+          </p:cNvSpPr>
+          <p:nvPr>
+            <p:ph type="title"/>
+          </p:nvPr>
+        </p:nvSpPr>
+        <p:spPr>
+          <a:xfrm>
+            <a:off x="139485" y="78119"/>
+            <a:ext cx="8229600" cy="607682"/>
+          </a:xfrm>
+        </p:spPr>
+        <p:txBody>
+          <a:bodyPr/>
+          <a:lstStyle/>
+          <a:p>
+            <a:pPr lvl="0" indent="0" marL="0">
+              <a:buNone/>
+            </a:pPr>
+            <a:r>
+              <a:rPr/>
+              <a:t>Summarize by Year — The Story Gets Clear</a:t>
+            </a:r>
+          </a:p>
+        </p:txBody>
+      </p:sp>
+      <p:sp>
+        <p:nvSpPr>
+          <p:cNvPr id="3" name="Text Placeholder 2"/>
+          <p:cNvSpPr>
+            <a:spLocks noGrp="1"/>
+          </p:cNvSpPr>
+          <p:nvPr>
+            <p:ph idx="1" type="body"/>
+          </p:nvPr>
+        </p:nvSpPr>
+        <p:spPr/>
+        <p:txBody>
+          <a:bodyPr/>
+          <a:lstStyle/>
+          <a:p>
+            <a:pPr lvl="0" indent="0">
+              <a:buNone/>
+            </a:pPr>
+            <a:r>
+              <a:rPr>
+                <a:solidFill>
+                  <a:srgbClr val="5E5E5E"/>
+                </a:solidFill>
+                <a:latin typeface="Courier"/>
+              </a:rPr>
+              <a:t># Mean temperature per year -------------------------------</a:t>
+            </a:r>
+            <a:br/>
+            <a:r>
+              <a:rPr>
+                <a:solidFill>
+                  <a:srgbClr val="003B4F"/>
+                </a:solidFill>
+                <a:latin typeface="Courier"/>
+              </a:rPr>
+              <a:t>dlh_year_df &lt;- dlh_temp_df </a:t>
+            </a:r>
+            <a:r>
+              <a:rPr>
+                <a:solidFill>
+                  <a:srgbClr val="5E5E5E"/>
+                </a:solidFill>
+                <a:latin typeface="Courier"/>
+              </a:rPr>
+              <a:t>%&gt;%</a:t>
+            </a:r>
+            <a:br/>
+            <a:r>
+              <a:rPr>
+                <a:solidFill>
+                  <a:srgbClr val="003B4F"/>
+                </a:solidFill>
+                <a:latin typeface="Courier"/>
+              </a:rPr>
+              <a:t>  </a:t>
+            </a:r>
+            <a:r>
+              <a:rPr>
+                <a:solidFill>
+                  <a:srgbClr val="4758AB"/>
+                </a:solidFill>
+                <a:latin typeface="Courier"/>
+              </a:rPr>
+              <a:t>group_by</a:t>
+            </a:r>
+            <a:r>
+              <a:rPr>
+                <a:solidFill>
+                  <a:srgbClr val="003B4F"/>
+                </a:solidFill>
+                <a:latin typeface="Courier"/>
+              </a:rPr>
+              <a:t>(YEAR) </a:t>
+            </a:r>
+            <a:r>
+              <a:rPr>
+                <a:solidFill>
+                  <a:srgbClr val="5E5E5E"/>
+                </a:solidFill>
+                <a:latin typeface="Courier"/>
+              </a:rPr>
+              <a:t>%&gt;%</a:t>
+            </a:r>
+            <a:br/>
+            <a:r>
+              <a:rPr>
+                <a:solidFill>
+                  <a:srgbClr val="003B4F"/>
+                </a:solidFill>
+                <a:latin typeface="Courier"/>
+              </a:rPr>
+              <a:t>  </a:t>
+            </a:r>
+            <a:r>
+              <a:rPr>
+                <a:solidFill>
+                  <a:srgbClr val="4758AB"/>
+                </a:solidFill>
+                <a:latin typeface="Courier"/>
+              </a:rPr>
+              <a:t>summarize</a:t>
+            </a:r>
+            <a:r>
+              <a:rPr>
+                <a:solidFill>
+                  <a:srgbClr val="003B4F"/>
+                </a:solidFill>
+                <a:latin typeface="Courier"/>
+              </a:rPr>
+              <a:t>(</a:t>
+            </a:r>
+            <a:br/>
+            <a:r>
+              <a:rPr>
+                <a:solidFill>
+                  <a:srgbClr val="003B4F"/>
+                </a:solidFill>
+                <a:latin typeface="Courier"/>
+              </a:rPr>
+              <a:t>    </a:t>
+            </a:r>
+            <a:r>
+              <a:rPr>
+                <a:solidFill>
+                  <a:srgbClr val="657422"/>
+                </a:solidFill>
+                <a:latin typeface="Courier"/>
+              </a:rPr>
+              <a:t>YEARMODA =</a:t>
+            </a:r>
+            <a:r>
+              <a:rPr>
+                <a:solidFill>
+                  <a:srgbClr val="003B4F"/>
+                </a:solidFill>
+                <a:latin typeface="Courier"/>
+              </a:rPr>
+              <a:t> </a:t>
+            </a:r>
+            <a:r>
+              <a:rPr>
+                <a:solidFill>
+                  <a:srgbClr val="4758AB"/>
+                </a:solidFill>
+                <a:latin typeface="Courier"/>
+              </a:rPr>
+              <a:t>first</a:t>
+            </a:r>
+            <a:r>
+              <a:rPr>
+                <a:solidFill>
+                  <a:srgbClr val="003B4F"/>
+                </a:solidFill>
+                <a:latin typeface="Courier"/>
+              </a:rPr>
+              <a:t>(YEARMODA),</a:t>
+            </a:r>
+            <a:br/>
+            <a:r>
+              <a:rPr>
+                <a:solidFill>
+                  <a:srgbClr val="003B4F"/>
+                </a:solidFill>
+                <a:latin typeface="Courier"/>
+              </a:rPr>
+              <a:t>    </a:t>
+            </a:r>
+            <a:r>
+              <a:rPr>
+                <a:solidFill>
+                  <a:srgbClr val="657422"/>
+                </a:solidFill>
+                <a:latin typeface="Courier"/>
+              </a:rPr>
+              <a:t>TEMP     =</a:t>
+            </a:r>
+            <a:r>
+              <a:rPr>
+                <a:solidFill>
+                  <a:srgbClr val="003B4F"/>
+                </a:solidFill>
+                <a:latin typeface="Courier"/>
+              </a:rPr>
+              <a:t> </a:t>
+            </a:r>
+            <a:r>
+              <a:rPr>
+                <a:solidFill>
+                  <a:srgbClr val="4758AB"/>
+                </a:solidFill>
+                <a:latin typeface="Courier"/>
+              </a:rPr>
+              <a:t>mean</a:t>
+            </a:r>
+            <a:r>
+              <a:rPr>
+                <a:solidFill>
+                  <a:srgbClr val="003B4F"/>
+                </a:solidFill>
+                <a:latin typeface="Courier"/>
+              </a:rPr>
+              <a:t>(TEMP, </a:t>
+            </a:r>
+            <a:r>
+              <a:rPr>
+                <a:solidFill>
+                  <a:srgbClr val="657422"/>
+                </a:solidFill>
+                <a:latin typeface="Courier"/>
+              </a:rPr>
+              <a:t>na.rm =</a:t>
+            </a:r>
+            <a:r>
+              <a:rPr>
+                <a:solidFill>
+                  <a:srgbClr val="003B4F"/>
+                </a:solidFill>
+                <a:latin typeface="Courier"/>
+              </a:rPr>
+              <a:t> </a:t>
+            </a:r>
+            <a:r>
+              <a:rPr>
+                <a:solidFill>
+                  <a:srgbClr val="8F5902"/>
+                </a:solidFill>
+                <a:latin typeface="Courier"/>
+              </a:rPr>
+              <a:t>TRUE</a:t>
+            </a:r>
+            <a:r>
+              <a:rPr>
+                <a:solidFill>
+                  <a:srgbClr val="003B4F"/>
+                </a:solidFill>
+                <a:latin typeface="Courier"/>
+              </a:rPr>
+              <a:t>)</a:t>
+            </a:r>
+            <a:br/>
+            <a:r>
+              <a:rPr>
+                <a:solidFill>
+                  <a:srgbClr val="003B4F"/>
+                </a:solidFill>
+                <a:latin typeface="Courier"/>
+              </a:rPr>
+              <a:t>  )</a:t>
+            </a:r>
+            <a:br/>
+            <a:br/>
+            <a:r>
+              <a:rPr>
+                <a:solidFill>
+                  <a:srgbClr val="4758AB"/>
+                </a:solidFill>
+                <a:latin typeface="Courier"/>
+              </a:rPr>
+              <a:t>head</a:t>
+            </a:r>
+            <a:r>
+              <a:rPr>
+                <a:solidFill>
+                  <a:srgbClr val="003B4F"/>
+                </a:solidFill>
+                <a:latin typeface="Courier"/>
+              </a:rPr>
+              <a:t>(dlh_year_df)</a:t>
+            </a:r>
+          </a:p>
+          <a:p>
+            <a:pPr lvl="0" indent="0">
+              <a:buNone/>
+            </a:pPr>
+            <a:r>
+              <a:rPr>
+                <a:latin typeface="Courier"/>
+              </a:rPr>
+              <a:t># A tibble: 6 × 3
+   YEAR YEARMODA    TEMP
+  &lt;int&gt; &lt;date&gt;     &lt;dbl&gt;
+1  1948 1948-01-01  3.76
+2  1949 1949-01-01  4.10
+3  1950 1950-01-01  1.60
+4  1951 1951-01-01  2.41
+5  1952 1952-01-01  4.55
+6  1953 1953-01-01  4.55</a:t>
+            </a:r>
+          </a:p>
+          <a:p>
+            <a:pPr lvl="0" indent="0">
+              <a:buNone/>
+            </a:pPr>
+            <a:r>
+              <a:rPr>
+                <a:solidFill>
+                  <a:srgbClr val="003B4F"/>
+                </a:solidFill>
+                <a:latin typeface="Courier"/>
+              </a:rPr>
+              <a:t>yearly_temp_plot &lt;- dlh_year_df </a:t>
+            </a:r>
+            <a:r>
+              <a:rPr>
+                <a:solidFill>
+                  <a:srgbClr val="5E5E5E"/>
+                </a:solidFill>
+                <a:latin typeface="Courier"/>
+              </a:rPr>
+              <a:t>%&gt;%</a:t>
+            </a:r>
+            <a:br/>
+            <a:r>
+              <a:rPr>
+                <a:solidFill>
+                  <a:srgbClr val="003B4F"/>
+                </a:solidFill>
+                <a:latin typeface="Courier"/>
+              </a:rPr>
+              <a:t>  </a:t>
+            </a:r>
+            <a:r>
+              <a:rPr>
+                <a:solidFill>
+                  <a:srgbClr val="4758AB"/>
+                </a:solidFill>
+                <a:latin typeface="Courier"/>
+              </a:rPr>
+              <a:t>ggplot</a:t>
+            </a:r>
+            <a:r>
+              <a:rPr>
+                <a:solidFill>
+                  <a:srgbClr val="003B4F"/>
+                </a:solidFill>
+                <a:latin typeface="Courier"/>
+              </a:rPr>
+              <a:t>(</a:t>
+            </a:r>
+            <a:r>
+              <a:rPr>
+                <a:solidFill>
+                  <a:srgbClr val="4758AB"/>
+                </a:solidFill>
+                <a:latin typeface="Courier"/>
+              </a:rPr>
+              <a:t>aes</a:t>
+            </a:r>
+            <a:r>
+              <a:rPr>
+                <a:solidFill>
+                  <a:srgbClr val="003B4F"/>
+                </a:solidFill>
+                <a:latin typeface="Courier"/>
+              </a:rPr>
+              <a:t>(</a:t>
+            </a:r>
+            <a:r>
+              <a:rPr>
+                <a:solidFill>
+                  <a:srgbClr val="657422"/>
+                </a:solidFill>
+                <a:latin typeface="Courier"/>
+              </a:rPr>
+              <a:t>x =</a:t>
+            </a:r>
+            <a:r>
+              <a:rPr>
+                <a:solidFill>
+                  <a:srgbClr val="003B4F"/>
+                </a:solidFill>
+                <a:latin typeface="Courier"/>
+              </a:rPr>
+              <a:t> YEAR, </a:t>
+            </a:r>
+            <a:r>
+              <a:rPr>
+                <a:solidFill>
+                  <a:srgbClr val="657422"/>
+                </a:solidFill>
+                <a:latin typeface="Courier"/>
+              </a:rPr>
+              <a:t>y =</a:t>
+            </a:r>
+            <a:r>
+              <a:rPr>
+                <a:solidFill>
+                  <a:srgbClr val="003B4F"/>
+                </a:solidFill>
+                <a:latin typeface="Courier"/>
+              </a:rPr>
+              <a:t> TEMP)) </a:t>
+            </a:r>
+            <a:r>
+              <a:rPr>
+                <a:solidFill>
+                  <a:srgbClr val="5E5E5E"/>
+                </a:solidFill>
+                <a:latin typeface="Courier"/>
+              </a:rPr>
+              <a:t>+</a:t>
+            </a:r>
+            <a:br/>
+            <a:r>
+              <a:rPr>
+                <a:solidFill>
+                  <a:srgbClr val="003B4F"/>
+                </a:solidFill>
+                <a:latin typeface="Courier"/>
+              </a:rPr>
+              <a:t>  </a:t>
+            </a:r>
+            <a:r>
+              <a:rPr>
+                <a:solidFill>
+                  <a:srgbClr val="4758AB"/>
+                </a:solidFill>
+                <a:latin typeface="Courier"/>
+              </a:rPr>
+              <a:t>geom_point</a:t>
+            </a:r>
+            <a:r>
+              <a:rPr>
+                <a:solidFill>
+                  <a:srgbClr val="003B4F"/>
+                </a:solidFill>
+                <a:latin typeface="Courier"/>
+              </a:rPr>
+              <a:t>(</a:t>
+            </a:r>
+            <a:r>
+              <a:rPr>
+                <a:solidFill>
+                  <a:srgbClr val="657422"/>
+                </a:solidFill>
+                <a:latin typeface="Courier"/>
+              </a:rPr>
+              <a:t>size =</a:t>
+            </a:r>
+            <a:r>
+              <a:rPr>
+                <a:solidFill>
+                  <a:srgbClr val="003B4F"/>
+                </a:solidFill>
+                <a:latin typeface="Courier"/>
+              </a:rPr>
+              <a:t> </a:t>
+            </a:r>
+            <a:r>
+              <a:rPr>
+                <a:solidFill>
+                  <a:srgbClr val="AD0000"/>
+                </a:solidFill>
+                <a:latin typeface="Courier"/>
+              </a:rPr>
+              <a:t>2</a:t>
+            </a:r>
+            <a:r>
+              <a:rPr>
+                <a:solidFill>
+                  <a:srgbClr val="003B4F"/>
+                </a:solidFill>
+                <a:latin typeface="Courier"/>
+              </a:rPr>
+              <a:t>) </a:t>
+            </a:r>
+            <a:r>
+              <a:rPr>
+                <a:solidFill>
+                  <a:srgbClr val="5E5E5E"/>
+                </a:solidFill>
+                <a:latin typeface="Courier"/>
+              </a:rPr>
+              <a:t>+</a:t>
+            </a:r>
+            <a:br/>
+            <a:r>
+              <a:rPr>
+                <a:solidFill>
+                  <a:srgbClr val="003B4F"/>
+                </a:solidFill>
+                <a:latin typeface="Courier"/>
+              </a:rPr>
+              <a:t>  </a:t>
+            </a:r>
+            <a:r>
+              <a:rPr>
+                <a:solidFill>
+                  <a:srgbClr val="4758AB"/>
+                </a:solidFill>
+                <a:latin typeface="Courier"/>
+              </a:rPr>
+              <a:t>geom_line</a:t>
+            </a:r>
+            <a:r>
+              <a:rPr>
+                <a:solidFill>
+                  <a:srgbClr val="003B4F"/>
+                </a:solidFill>
+                <a:latin typeface="Courier"/>
+              </a:rPr>
+              <a:t>() </a:t>
+            </a:r>
+            <a:r>
+              <a:rPr>
+                <a:solidFill>
+                  <a:srgbClr val="5E5E5E"/>
+                </a:solidFill>
+                <a:latin typeface="Courier"/>
+              </a:rPr>
+              <a:t>+</a:t>
+            </a:r>
+            <a:br/>
+            <a:r>
+              <a:rPr>
+                <a:solidFill>
+                  <a:srgbClr val="003B4F"/>
+                </a:solidFill>
+                <a:latin typeface="Courier"/>
+              </a:rPr>
+              <a:t>  </a:t>
+            </a:r>
+            <a:r>
+              <a:rPr>
+                <a:solidFill>
+                  <a:srgbClr val="4758AB"/>
+                </a:solidFill>
+                <a:latin typeface="Courier"/>
+              </a:rPr>
+              <a:t>geom_smooth</a:t>
+            </a:r>
+            <a:r>
+              <a:rPr>
+                <a:solidFill>
+                  <a:srgbClr val="003B4F"/>
+                </a:solidFill>
+                <a:latin typeface="Courier"/>
+              </a:rPr>
+              <a:t>(</a:t>
+            </a:r>
+            <a:r>
+              <a:rPr>
+                <a:solidFill>
+                  <a:srgbClr val="657422"/>
+                </a:solidFill>
+                <a:latin typeface="Courier"/>
+              </a:rPr>
+              <a:t>method =</a:t>
+            </a:r>
+            <a:r>
+              <a:rPr>
+                <a:solidFill>
+                  <a:srgbClr val="003B4F"/>
+                </a:solidFill>
+                <a:latin typeface="Courier"/>
+              </a:rPr>
+              <a:t> </a:t>
+            </a:r>
+            <a:r>
+              <a:rPr>
+                <a:solidFill>
+                  <a:srgbClr val="20794D"/>
+                </a:solidFill>
+                <a:latin typeface="Courier"/>
+              </a:rPr>
+              <a:t>"lm"</a:t>
+            </a:r>
+            <a:r>
+              <a:rPr>
+                <a:solidFill>
+                  <a:srgbClr val="003B4F"/>
+                </a:solidFill>
+                <a:latin typeface="Courier"/>
+              </a:rPr>
+              <a:t>, </a:t>
+            </a:r>
+            <a:r>
+              <a:rPr>
+                <a:solidFill>
+                  <a:srgbClr val="657422"/>
+                </a:solidFill>
+                <a:latin typeface="Courier"/>
+              </a:rPr>
+              <a:t>color =</a:t>
+            </a:r>
+            <a:r>
+              <a:rPr>
+                <a:solidFill>
+                  <a:srgbClr val="003B4F"/>
+                </a:solidFill>
+                <a:latin typeface="Courier"/>
+              </a:rPr>
+              <a:t> </a:t>
+            </a:r>
+            <a:r>
+              <a:rPr>
+                <a:solidFill>
+                  <a:srgbClr val="20794D"/>
+                </a:solidFill>
+                <a:latin typeface="Courier"/>
+              </a:rPr>
+              <a:t>"firebrick"</a:t>
+            </a:r>
+            <a:r>
+              <a:rPr>
+                <a:solidFill>
+                  <a:srgbClr val="003B4F"/>
+                </a:solidFill>
+                <a:latin typeface="Courier"/>
+              </a:rPr>
+              <a:t>) </a:t>
+            </a:r>
+            <a:r>
+              <a:rPr>
+                <a:solidFill>
+                  <a:srgbClr val="5E5E5E"/>
+                </a:solidFill>
+                <a:latin typeface="Courier"/>
+              </a:rPr>
+              <a:t>+</a:t>
+            </a:r>
+            <a:br/>
+            <a:r>
+              <a:rPr>
+                <a:solidFill>
+                  <a:srgbClr val="003B4F"/>
+                </a:solidFill>
+                <a:latin typeface="Courier"/>
+              </a:rPr>
+              <a:t>  </a:t>
+            </a:r>
+            <a:r>
+              <a:rPr>
+                <a:solidFill>
+                  <a:srgbClr val="4758AB"/>
+                </a:solidFill>
+                <a:latin typeface="Courier"/>
+              </a:rPr>
+              <a:t>labs</a:t>
+            </a:r>
+            <a:r>
+              <a:rPr>
+                <a:solidFill>
+                  <a:srgbClr val="003B4F"/>
+                </a:solidFill>
+                <a:latin typeface="Courier"/>
+              </a:rPr>
+              <a:t>(</a:t>
+            </a:r>
+            <a:br/>
+            <a:r>
+              <a:rPr>
+                <a:solidFill>
+                  <a:srgbClr val="003B4F"/>
+                </a:solidFill>
+                <a:latin typeface="Courier"/>
+              </a:rPr>
+              <a:t>    </a:t>
+            </a:r>
+            <a:r>
+              <a:rPr>
+                <a:solidFill>
+                  <a:srgbClr val="657422"/>
+                </a:solidFill>
+                <a:latin typeface="Courier"/>
+              </a:rPr>
+              <a:t>title =</a:t>
+            </a:r>
+            <a:r>
+              <a:rPr>
+                <a:solidFill>
+                  <a:srgbClr val="003B4F"/>
+                </a:solidFill>
+                <a:latin typeface="Courier"/>
+              </a:rPr>
+              <a:t> </a:t>
+            </a:r>
+            <a:r>
+              <a:rPr>
+                <a:solidFill>
+                  <a:srgbClr val="20794D"/>
+                </a:solidFill>
+                <a:latin typeface="Courier"/>
+              </a:rPr>
+              <a:t>"Duluth Annual Mean Temperature, 1948–2025"</a:t>
+            </a:r>
+            <a:r>
+              <a:rPr>
+                <a:solidFill>
+                  <a:srgbClr val="003B4F"/>
+                </a:solidFill>
+                <a:latin typeface="Courier"/>
+              </a:rPr>
+              <a:t>,</a:t>
+            </a:r>
+            <a:br/>
+            <a:r>
+              <a:rPr>
+                <a:solidFill>
+                  <a:srgbClr val="003B4F"/>
+                </a:solidFill>
+                <a:latin typeface="Courier"/>
+              </a:rPr>
+              <a:t>    </a:t>
+            </a:r>
+            <a:r>
+              <a:rPr>
+                <a:solidFill>
+                  <a:srgbClr val="657422"/>
+                </a:solidFill>
+                <a:latin typeface="Courier"/>
+              </a:rPr>
+              <a:t>x     =</a:t>
+            </a:r>
+            <a:r>
+              <a:rPr>
+                <a:solidFill>
+                  <a:srgbClr val="003B4F"/>
+                </a:solidFill>
+                <a:latin typeface="Courier"/>
+              </a:rPr>
+              <a:t> </a:t>
+            </a:r>
+            <a:r>
+              <a:rPr>
+                <a:solidFill>
+                  <a:srgbClr val="20794D"/>
+                </a:solidFill>
+                <a:latin typeface="Courier"/>
+              </a:rPr>
+              <a:t>"Year"</a:t>
+            </a:r>
+            <a:r>
+              <a:rPr>
+                <a:solidFill>
+                  <a:srgbClr val="003B4F"/>
+                </a:solidFill>
+                <a:latin typeface="Courier"/>
+              </a:rPr>
+              <a:t>, </a:t>
+            </a:r>
+            <a:r>
+              <a:rPr>
+                <a:solidFill>
+                  <a:srgbClr val="657422"/>
+                </a:solidFill>
+                <a:latin typeface="Courier"/>
+              </a:rPr>
+              <a:t>y =</a:t>
+            </a:r>
+            <a:r>
+              <a:rPr>
+                <a:solidFill>
+                  <a:srgbClr val="003B4F"/>
+                </a:solidFill>
+                <a:latin typeface="Courier"/>
+              </a:rPr>
+              <a:t> </a:t>
+            </a:r>
+            <a:r>
+              <a:rPr>
+                <a:solidFill>
+                  <a:srgbClr val="20794D"/>
+                </a:solidFill>
+                <a:latin typeface="Courier"/>
+              </a:rPr>
+              <a:t>"Mean Temp (°C)"</a:t>
+            </a:r>
+            <a:br/>
+            <a:r>
+              <a:rPr>
+                <a:solidFill>
+                  <a:srgbClr val="003B4F"/>
+                </a:solidFill>
+                <a:latin typeface="Courier"/>
+              </a:rPr>
+              <a:t>  ) </a:t>
+            </a:r>
+            <a:r>
+              <a:rPr>
+                <a:solidFill>
+                  <a:srgbClr val="5E5E5E"/>
+                </a:solidFill>
+                <a:latin typeface="Courier"/>
+              </a:rPr>
+              <a:t>+</a:t>
+            </a:r>
+            <a:br/>
+            <a:r>
+              <a:rPr>
+                <a:solidFill>
+                  <a:srgbClr val="003B4F"/>
+                </a:solidFill>
+                <a:latin typeface="Courier"/>
+              </a:rPr>
+              <a:t>  </a:t>
+            </a:r>
+            <a:r>
+              <a:rPr>
+                <a:solidFill>
+                  <a:srgbClr val="4758AB"/>
+                </a:solidFill>
+                <a:latin typeface="Courier"/>
+              </a:rPr>
+              <a:t>theme_minimal</a:t>
+            </a:r>
+            <a:r>
+              <a:rPr>
+                <a:solidFill>
+                  <a:srgbClr val="003B4F"/>
+                </a:solidFill>
+                <a:latin typeface="Courier"/>
+              </a:rPr>
+              <a:t>()</a:t>
+            </a:r>
+            <a:br/>
+            <a:br/>
+            <a:r>
+              <a:rPr>
+                <a:solidFill>
+                  <a:srgbClr val="003B4F"/>
+                </a:solidFill>
+                <a:latin typeface="Courier"/>
+              </a:rPr>
+              <a:t>yearly_temp_plot</a:t>
+            </a:r>
+          </a:p>
+        </p:txBody>
+      </p:sp>
+      <p:pic>
+        <p:nvPicPr>
+          <p:cNvPr descr="06_lecture_powerpoint_files/figure-pptx/yearly-plot-06-1.png" id="0" name="Picture 1"/>
+          <p:cNvPicPr>
+            <a:picLocks noGrp="1" noChangeAspect="1"/>
+          </p:cNvPicPr>
+          <p:nvPr/>
+        </p:nvPicPr>
+        <p:blipFill>
+          <a:blip r:embed="rId2"/>
+          <a:stretch>
+            <a:fillRect/>
+          </a:stretch>
+        </p:blipFill>
+        <p:spPr bwMode="auto">
+          <a:xfrm>
+            <a:off x="127000" y="1562100"/>
+            <a:ext cx="4432300" cy="2730500"/>
+          </a:xfrm>
+          <a:prstGeom prst="rect">
+            <a:avLst/>
+          </a:prstGeom>
+          <a:noFill/>
+          <a:ln w="9525">
+            <a:noFill/>
+            <a:headEnd/>
+            <a:tailEnd/>
+          </a:ln>
+        </p:spPr>
+      </p:pic>
+      <p:sp>
+        <p:nvSpPr>
+          <p:cNvPr id="5" name="Text Placeholder 4"/>
+          <p:cNvSpPr>
+            <a:spLocks noGrp="1"/>
+          </p:cNvSpPr>
+          <p:nvPr>
+            <p:ph idx="3" sz="quarter" type="body"/>
+          </p:nvPr>
+        </p:nvSpPr>
+        <p:spPr/>
+        <p:txBody>
+          <a:bodyPr/>
+          <a:lstStyle/>
+          <a:p>
+            <a:pPr lvl="0" indent="0" marL="0">
+              <a:buNone/>
+            </a:pPr>
+            <a:r>
+              <a:rPr b="1"/>
+              <a:t>Now the trend is obvious.</a:t>
+            </a:r>
+          </a:p>
+          <a:p>
+            <a:pPr lvl="0"/>
+            <a:r>
+              <a:rPr/>
+              <a:t>The seasonal noise is completely averaged out</a:t>
+            </a:r>
+          </a:p>
+          <a:p>
+            <a:pPr lvl="0"/>
+            <a:r>
+              <a:rPr/>
+              <a:t>78 points instead of 28,000 — and the story is </a:t>
+            </a:r>
+            <a:r>
+              <a:rPr i="1"/>
+              <a:t>clearer</a:t>
+            </a:r>
+            <a:r>
+              <a:rPr/>
+              <a:t>, not weaker</a:t>
+            </a:r>
+          </a:p>
+          <a:p>
+            <a:pPr lvl="0"/>
+            <a:r>
+              <a:rPr/>
+              <a:t>The blue/red trend line is the same kind of </a:t>
+            </a:r>
+            <a:r>
+              <a:rPr>
+                <a:latin typeface="Courier"/>
+              </a:rPr>
+              <a:t>geom_smooth(method = "lm")</a:t>
+            </a:r>
+            <a:r>
+              <a:rPr/>
+              <a:t> line from Lecture 03</a:t>
+            </a:r>
+          </a:p>
+          <a:p>
+            <a:pPr lvl="0" indent="0" marL="0">
+              <a:buNone/>
+            </a:pPr>
+            <a:r>
+              <a:rPr/>
+              <a:t>This is the power of </a:t>
+            </a:r>
+            <a:r>
+              <a:rPr>
+                <a:latin typeface="Courier"/>
+              </a:rPr>
+              <a:t>group_by() %&gt;% summarize()</a:t>
+            </a:r>
+            <a:r>
+              <a:rPr/>
+              <a:t>: the right level of summary reveals the signal.</a:t>
+            </a:r>
+          </a:p>
+        </p:txBody>
+      </p:sp>
+    </p:spTree>
+  </p:cSld>
+</p:sld>
+</file>
+
+<file path=ppt/slides/slide11.xml><?xml version="1.0" encoding="utf-8"?>
+<p:sld xmlns:a="http://schemas.openxmlformats.org/drawingml/2006/main" xmlns:r="http://schemas.openxmlformats.org/officeDocument/2006/relationships" xmlns:p="http://schemas.openxmlformats.org/presentationml/2006/main">
+  <p:cSld>
+    <p:spTree>
+      <p:nvGrpSpPr>
+        <p:cNvPr id="1" name=""/>
+        <p:cNvGrpSpPr/>
+        <p:nvPr/>
+      </p:nvGrpSpPr>
+      <p:grpSpPr>
+        <a:xfrm>
+          <a:off x="0" y="0"/>
+          <a:ext cx="0" cy="0"/>
+          <a:chOff x="0" y="0"/>
+          <a:chExt cx="0" cy="0"/>
+        </a:xfrm>
+      </p:grpSpPr>
+      <p:sp>
+        <p:nvSpPr>
+          <p:cNvPr id="2" name="Title 1"/>
+          <p:cNvSpPr>
+            <a:spLocks noGrp="1"/>
+          </p:cNvSpPr>
+          <p:nvPr>
+            <p:ph type="title"/>
+          </p:nvPr>
+        </p:nvSpPr>
+        <p:spPr>
+          <a:xfrm>
+            <a:off x="0" y="0"/>
+            <a:ext cx="9144000" cy="602780"/>
+          </a:xfrm>
+          <a:solidFill>
+            <a:srgbClr val="1A1A2E"/>
+          </a:solidFill>
+        </p:spPr>
+        <p:txBody>
+          <a:bodyPr/>
+          <a:lstStyle/>
+          <a:p>
+            <a:pPr lvl="0" indent="0" marL="0">
+              <a:buNone/>
+            </a:pPr>
+            <a:r>
+              <a:rPr/>
+              <a:t>Same Data, Three Levels — Side by Side</a:t>
+            </a:r>
+          </a:p>
+        </p:txBody>
+      </p:sp>
+      <p:graphicFrame>
+        <p:nvGraphicFramePr>
+          <p:cNvPr id="6" name="Content Placeholder 5"/>
+          <p:cNvGraphicFramePr>
+            <a:graphicFrameLocks noGrp="1"/>
+          </p:cNvGraphicFramePr>
+          <p:nvPr>
+            <p:ph idx="1"/>
+          </p:nvPr>
+        </p:nvGraphicFramePr>
+        <p:xfrm>
+          <a:off x="0" y="660400"/>
+          <a:ext cx="4191000" cy="3810000"/>
+        </p:xfrm>
+        <a:graphic>
+          <a:graphicData uri="http://schemas.openxmlformats.org/drawingml/2006/table">
+            <a:tbl>
+              <a:tblPr firstRow="1" bandRow="1">
+                <a:tableStyleId>{5C22544A-7EE6-4342-B048-85BDC9FD1C3A}</a:tableStyleId>
+              </a:tblPr>
+              <a:tblGrid>
+                <a:gridCol w="1397000"/>
+                <a:gridCol w="1397000"/>
+                <a:gridCol w="1397000"/>
+              </a:tblGrid>
+              <a:tr h="0">
+                <a:tc>
+                  <a:txBody>
+                    <a:bodyPr/>
+                    <a:lstStyle/>
+                    <a:p>
+                      <a:pPr lvl="0" indent="0" marL="0">
+                        <a:buNone/>
+                      </a:pPr>
+                      <a:r>
+                        <a:rPr/>
+                        <a:t>Level</a:t>
+                      </a:r>
+                    </a:p>
+                  </a:txBody>
+                  <a:tcPr/>
+                </a:tc>
+                <a:tc>
+                  <a:txBody>
+                    <a:bodyPr/>
+                    <a:lstStyle/>
+                    <a:p>
+                      <a:pPr lvl="0" indent="0" marL="0">
+                        <a:buNone/>
+                      </a:pPr>
+                      <a:r>
+                        <a:rPr/>
+                        <a:t>What it shows</a:t>
+                      </a:r>
+                    </a:p>
+                  </a:txBody>
+                  <a:tcPr/>
+                </a:tc>
+                <a:tc>
+                  <a:txBody>
+                    <a:bodyPr/>
+                    <a:lstStyle/>
+                    <a:p>
+                      <a:pPr lvl="0" indent="0" marL="0">
+                        <a:buNone/>
+                      </a:pPr>
+                      <a:r>
+                        <a:rPr/>
+                        <a:t>What it hides</a:t>
+                      </a:r>
+                    </a:p>
+                  </a:txBody>
+                  <a:tcPr/>
+                </a:tc>
+              </a:tr>
+              <a:tr h="0">
+                <a:tc>
+                  <a:txBody>
+                    <a:bodyPr/>
+                    <a:lstStyle/>
+                    <a:p>
+                      <a:pPr lvl="0" indent="0" marL="0">
+                        <a:buNone/>
+                      </a:pPr>
+                      <a:r>
+                        <a:rPr b="1"/>
+                        <a:t>Daily</a:t>
+                      </a:r>
+                    </a:p>
+                  </a:txBody>
+                </a:tc>
+                <a:tc>
+                  <a:txBody>
+                    <a:bodyPr/>
+                    <a:lstStyle/>
+                    <a:p>
+                      <a:pPr lvl="0" indent="0" marL="0">
+                        <a:buNone/>
+                      </a:pPr>
+                      <a:r>
+                        <a:rPr/>
+                        <a:t>every weather event</a:t>
+                      </a:r>
+                    </a:p>
+                  </a:txBody>
+                </a:tc>
+                <a:tc>
+                  <a:txBody>
+                    <a:bodyPr/>
+                    <a:lstStyle/>
+                    <a:p>
+                      <a:pPr lvl="0" indent="0" marL="0">
+                        <a:buNone/>
+                      </a:pPr>
+                      <a:r>
+                        <a:rPr/>
+                        <a:t>the long-term trend</a:t>
+                      </a:r>
+                    </a:p>
+                  </a:txBody>
+                </a:tc>
+              </a:tr>
+              <a:tr h="0">
+                <a:tc>
+                  <a:txBody>
+                    <a:bodyPr/>
+                    <a:lstStyle/>
+                    <a:p>
+                      <a:pPr lvl="0" indent="0" marL="0">
+                        <a:buNone/>
+                      </a:pPr>
+                      <a:r>
+                        <a:rPr b="1"/>
+                        <a:t>Monthly</a:t>
+                      </a:r>
+                    </a:p>
+                  </a:txBody>
+                </a:tc>
+                <a:tc>
+                  <a:txBody>
+                    <a:bodyPr/>
+                    <a:lstStyle/>
+                    <a:p>
+                      <a:pPr lvl="0" indent="0" marL="0">
+                        <a:buNone/>
+                      </a:pPr>
+                      <a:r>
+                        <a:rPr/>
+                        <a:t>the seasonal cycle</a:t>
+                      </a:r>
+                    </a:p>
+                  </a:txBody>
+                </a:tc>
+                <a:tc>
+                  <a:txBody>
+                    <a:bodyPr/>
+                    <a:lstStyle/>
+                    <a:p>
+                      <a:pPr lvl="0" indent="0" marL="0">
+                        <a:buNone/>
+                      </a:pPr>
+                      <a:r>
+                        <a:rPr/>
+                        <a:t>day-to-day noise</a:t>
+                      </a:r>
+                    </a:p>
+                  </a:txBody>
+                </a:tc>
+              </a:tr>
+              <a:tr h="0">
+                <a:tc>
+                  <a:txBody>
+                    <a:bodyPr/>
+                    <a:lstStyle/>
+                    <a:p>
+                      <a:pPr lvl="0" indent="0" marL="0">
+                        <a:buNone/>
+                      </a:pPr>
+                      <a:r>
+                        <a:rPr b="1"/>
+                        <a:t>Yearly</a:t>
+                      </a:r>
+                    </a:p>
+                  </a:txBody>
+                </a:tc>
+                <a:tc>
+                  <a:txBody>
+                    <a:bodyPr/>
+                    <a:lstStyle/>
+                    <a:p>
+                      <a:pPr lvl="0" indent="0" marL="0">
+                        <a:buNone/>
+                      </a:pPr>
+                      <a:r>
+                        <a:rPr/>
+                        <a:t>the climate trend</a:t>
+                      </a:r>
+                    </a:p>
+                  </a:txBody>
+                </a:tc>
+                <a:tc>
+                  <a:txBody>
+                    <a:bodyPr/>
+                    <a:lstStyle/>
+                    <a:p>
+                      <a:pPr lvl="0" indent="0" marL="0">
+                        <a:buNone/>
+                      </a:pPr>
+                      <a:r>
+                        <a:rPr/>
+                        <a:t>season, weather events</a:t>
+                      </a:r>
+                    </a:p>
+                  </a:txBody>
+                </a:tc>
+              </a:tr>
+            </a:tbl>
+          </a:graphicData>
+        </a:graphic>
+      </p:graphicFrame>
+      <p:sp>
+        <p:nvSpPr>
+          <p:cNvPr id="4" name="Content Placeholder 3"/>
+          <p:cNvSpPr>
+            <a:spLocks noGrp="1"/>
+          </p:cNvSpPr>
+          <p:nvPr>
+            <p:ph idx="2" sz="half"/>
+          </p:nvPr>
+        </p:nvSpPr>
+        <p:spPr/>
+        <p:txBody>
+          <a:bodyPr/>
+          <a:lstStyle/>
+          <a:p>
+            <a:pPr lvl="0" indent="0" marL="1270000">
+              <a:buNone/>
+            </a:pPr>
+            <a:r>
+              <a:rPr sz="2000" b="1"/>
+              <a:t>Important</a:t>
+            </a:r>
+          </a:p>
+          <a:p>
+            <a:pPr lvl="0" indent="0" marL="1270000">
+              <a:buNone/>
+            </a:pPr>
+            <a:r>
+              <a:rPr sz="2000" b="1"/>
+              <a:t>Summarizing is not “losing information” — it’s choosing which question you’re answering.</a:t>
+            </a:r>
+          </a:p>
+          <a:p>
+            <a:pPr lvl="0" indent="0" marL="0">
+              <a:buNone/>
+            </a:pPr>
+            <a:r>
+              <a:rPr/>
+              <a:t>📖 R4DS Ch. 3.5 — </a:t>
+            </a:r>
+            <a:r>
+              <a:rPr>
+                <a:latin typeface="Courier"/>
+              </a:rPr>
+              <a:t>group_by()</a:t>
+            </a:r>
+            <a:r>
+              <a:rPr/>
+              <a:t> + </a:t>
+            </a:r>
+            <a:r>
+              <a:rPr>
+                <a:latin typeface="Courier"/>
+              </a:rPr>
+              <a:t>summarize()</a:t>
+            </a:r>
+            <a:r>
+              <a:rPr/>
+              <a:t> workflow</a:t>
+            </a:r>
+          </a:p>
+        </p:txBody>
+      </p:sp>
+    </p:spTree>
+  </p:cSld>
+</p:sld>
+</file>
+
+<file path=ppt/slides/slide12.xml><?xml version="1.0" encoding="utf-8"?>
+<p:sld xmlns:a="http://schemas.openxmlformats.org/drawingml/2006/main" xmlns:r="http://schemas.openxmlformats.org/officeDocument/2006/relationships" xmlns:p="http://schemas.openxmlformats.org/presentationml/2006/main">
+  <p:cSld>
+    <p:spTree>
+      <p:nvGrpSpPr>
+        <p:cNvPr id="1" name=""/>
+        <p:cNvGrpSpPr/>
+        <p:nvPr/>
+      </p:nvGrpSpPr>
+      <p:grpSpPr>
+        <a:xfrm>
+          <a:off x="0" y="0"/>
+          <a:ext cx="0" cy="0"/>
+          <a:chOff x="0" y="0"/>
+          <a:chExt cx="0" cy="0"/>
+        </a:xfrm>
+      </p:grpSpPr>
+      <p:sp>
+        <p:nvSpPr>
+          <p:cNvPr id="2" name="Title 1"/>
+          <p:cNvSpPr>
+            <a:spLocks noGrp="1"/>
+          </p:cNvSpPr>
+          <p:nvPr>
+            <p:ph type="title"/>
+          </p:nvPr>
+        </p:nvSpPr>
+        <p:spPr>
+          <a:xfrm>
+            <a:off x="0" y="0"/>
+            <a:ext cx="9144000" cy="602780"/>
+          </a:xfrm>
+          <a:solidFill>
+            <a:srgbClr val="1A1A2E"/>
+          </a:solidFill>
+        </p:spPr>
+        <p:txBody>
+          <a:bodyPr/>
+          <a:lstStyle/>
+          <a:p>
+            <a:pPr lvl="0" indent="0" marL="0">
+              <a:buNone/>
+            </a:pPr>
+            <a:r>
+              <a:rPr/>
+              <a:t>What Is the Rate of Change? — Reusing </a:t>
+            </a:r>
+            <a:r>
+              <a:rPr>
+                <a:latin typeface="Courier"/>
+              </a:rPr>
+              <a:t>lm()</a:t>
+            </a:r>
+          </a:p>
+        </p:txBody>
+      </p:sp>
+      <p:sp>
+        <p:nvSpPr>
+          <p:cNvPr id="3" name="Content Placeholder 2"/>
+          <p:cNvSpPr>
+            <a:spLocks noGrp="1"/>
+          </p:cNvSpPr>
+          <p:nvPr>
+            <p:ph idx="1" sz="half"/>
+          </p:nvPr>
+        </p:nvSpPr>
+        <p:spPr/>
+        <p:txBody>
+          <a:bodyPr/>
+          <a:lstStyle/>
+          <a:p>
+            <a:pPr lvl="0" indent="0">
+              <a:buNone/>
+            </a:pPr>
+            <a:r>
+              <a:rPr>
+                <a:solidFill>
+                  <a:srgbClr val="5E5E5E"/>
+                </a:solidFill>
+                <a:latin typeface="Courier"/>
+              </a:rPr>
+              <a:t># Fit a regression: TEMP predicted by YEAR ---------------</a:t>
+            </a:r>
+            <a:br/>
+            <a:r>
+              <a:rPr>
+                <a:solidFill>
+                  <a:srgbClr val="003B4F"/>
+                </a:solidFill>
+                <a:latin typeface="Courier"/>
+              </a:rPr>
+              <a:t>yearly_temp_model &lt;- </a:t>
+            </a:r>
+            <a:r>
+              <a:rPr>
+                <a:solidFill>
+                  <a:srgbClr val="4758AB"/>
+                </a:solidFill>
+                <a:latin typeface="Courier"/>
+              </a:rPr>
+              <a:t>lm</a:t>
+            </a:r>
+            <a:r>
+              <a:rPr>
+                <a:solidFill>
+                  <a:srgbClr val="003B4F"/>
+                </a:solidFill>
+                <a:latin typeface="Courier"/>
+              </a:rPr>
+              <a:t>(TEMP </a:t>
+            </a:r>
+            <a:r>
+              <a:rPr>
+                <a:solidFill>
+                  <a:srgbClr val="5E5E5E"/>
+                </a:solidFill>
+                <a:latin typeface="Courier"/>
+              </a:rPr>
+              <a:t>~</a:t>
+            </a:r>
+            <a:r>
+              <a:rPr>
+                <a:solidFill>
+                  <a:srgbClr val="003B4F"/>
+                </a:solidFill>
+                <a:latin typeface="Courier"/>
+              </a:rPr>
+              <a:t> YEAR, </a:t>
+            </a:r>
+            <a:r>
+              <a:rPr>
+                <a:solidFill>
+                  <a:srgbClr val="657422"/>
+                </a:solidFill>
+                <a:latin typeface="Courier"/>
+              </a:rPr>
+              <a:t>data =</a:t>
+            </a:r>
+            <a:r>
+              <a:rPr>
+                <a:solidFill>
+                  <a:srgbClr val="003B4F"/>
+                </a:solidFill>
+                <a:latin typeface="Courier"/>
+              </a:rPr>
+              <a:t> dlh_year_df)</a:t>
+            </a:r>
+            <a:br/>
+            <a:br/>
+            <a:r>
+              <a:rPr>
+                <a:solidFill>
+                  <a:srgbClr val="4758AB"/>
+                </a:solidFill>
+                <a:latin typeface="Courier"/>
+              </a:rPr>
+              <a:t>summary</a:t>
+            </a:r>
+            <a:r>
+              <a:rPr>
+                <a:solidFill>
+                  <a:srgbClr val="003B4F"/>
+                </a:solidFill>
+                <a:latin typeface="Courier"/>
+              </a:rPr>
+              <a:t>(yearly_temp_model)</a:t>
+            </a:r>
+          </a:p>
+          <a:p>
+            <a:pPr lvl="0" indent="0">
+              <a:buNone/>
+            </a:pPr>
+            <a:r>
+              <a:rPr>
+                <a:latin typeface="Courier"/>
+              </a:rPr>
+              <a:t>
+Call:
+lm(formula = TEMP ~ YEAR, data = dlh_year_df)
+Residuals:
+     Min       1Q   Median       3Q      Max 
+-1.99794 -0.51059  0.00688  0.49950  1.90458 
+Coefficients:
+              Estimate Std. Error t value Pr(&gt;|t|)    
+(Intercept) -49.096842   9.119103  -5.384 9.77e-07 ***
+YEAR          0.026872   0.004585   5.860 1.49e-07 ***
+---
+Signif. codes:  0 '***' 0.001 '**' 0.01 '*' 0.05 '.' 0.1 ' ' 1
+Residual standard error: 0.8774 on 68 degrees of freedom
+Multiple R-squared:  0.3356,    Adjusted R-squared:  0.3258 
+F-statistic: 34.34 on 1 and 68 DF,  p-value: 1.489e-07</a:t>
+            </a:r>
+          </a:p>
+        </p:txBody>
+      </p:sp>
+      <p:sp>
+        <p:nvSpPr>
+          <p:cNvPr id="4" name="Content Placeholder 3"/>
+          <p:cNvSpPr>
+            <a:spLocks noGrp="1"/>
+          </p:cNvSpPr>
+          <p:nvPr>
+            <p:ph idx="2" sz="half"/>
+          </p:nvPr>
+        </p:nvSpPr>
+        <p:spPr/>
+        <p:txBody>
+          <a:bodyPr/>
+          <a:lstStyle/>
+          <a:p>
+            <a:pPr lvl="0" indent="0" marL="0">
+              <a:buNone/>
+            </a:pPr>
+            <a:r>
+              <a:rPr b="1"/>
+              <a:t>This is exactly Lecture 05’s </a:t>
+            </a:r>
+            <a:r>
+              <a:rPr b="1">
+                <a:latin typeface="Courier"/>
+              </a:rPr>
+              <a:t>lm()</a:t>
+            </a:r>
+            <a:r>
+              <a:rPr b="1"/>
+              <a:t> syntax</a:t>
+            </a:r>
+            <a:r>
+              <a:rPr/>
+              <a:t> — only now:</a:t>
+            </a:r>
+          </a:p>
+          <a:p>
+            <a:pPr lvl="0"/>
+            <a:r>
+              <a:rPr>
+                <a:latin typeface="Courier"/>
+              </a:rPr>
+              <a:t>X</a:t>
+            </a:r>
+            <a:r>
+              <a:rPr/>
+              <a:t> = </a:t>
+            </a:r>
+            <a:r>
+              <a:rPr>
+                <a:latin typeface="Courier"/>
+              </a:rPr>
+              <a:t>YEAR</a:t>
+            </a:r>
+            <a:r>
+              <a:rPr/>
+              <a:t> (instead of paper mass)</a:t>
+            </a:r>
+          </a:p>
+          <a:p>
+            <a:pPr lvl="0"/>
+            <a:r>
+              <a:rPr>
+                <a:latin typeface="Courier"/>
+              </a:rPr>
+              <a:t>Y</a:t>
+            </a:r>
+            <a:r>
+              <a:rPr/>
+              <a:t> = </a:t>
+            </a:r>
+            <a:r>
+              <a:rPr>
+                <a:latin typeface="Courier"/>
+              </a:rPr>
+              <a:t>TEMP</a:t>
+            </a:r>
+            <a:r>
+              <a:rPr/>
+              <a:t> (instead of paper area)</a:t>
+            </a:r>
+          </a:p>
+          <a:p>
+            <a:pPr lvl="0"/>
+            <a:r>
+              <a:rPr/>
+              <a:t>The </a:t>
+            </a:r>
+            <a:r>
+              <a:rPr b="1"/>
+              <a:t>slope</a:t>
+            </a:r>
+            <a:r>
+              <a:rPr/>
+              <a:t> is no longer “cm² per gram” — it’s </a:t>
+            </a:r>
+            <a:r>
+              <a:rPr b="1"/>
+              <a:t>°C per year</a:t>
+            </a:r>
+          </a:p>
+          <a:p>
+            <a:pPr lvl="0" indent="0" marL="0">
+              <a:buNone/>
+            </a:pPr>
+            <a:r>
+              <a:rPr b="1"/>
+              <a:t>H₀:</a:t>
+            </a:r>
+            <a:r>
+              <a:rPr/>
+              <a:t> β = 0 (no warming trend)</a:t>
+            </a:r>
+          </a:p>
+          <a:p>
+            <a:pPr lvl="0" indent="0" marL="0">
+              <a:buNone/>
+            </a:pPr>
+            <a:r>
+              <a:rPr b="1"/>
+              <a:t>Hₐ:</a:t>
+            </a:r>
+            <a:r>
+              <a:rPr/>
+              <a:t> β ≠ 0 (temperature is changing over time)</a:t>
+            </a:r>
+          </a:p>
+        </p:txBody>
+      </p:sp>
+    </p:spTree>
+  </p:cSld>
+</p:sld>
+</file>
+
+<file path=ppt/slides/slide13.xml><?xml version="1.0" encoding="utf-8"?>
+<p:sld xmlns:a="http://schemas.openxmlformats.org/drawingml/2006/main" xmlns:r="http://schemas.openxmlformats.org/officeDocument/2006/relationships" xmlns:p="http://schemas.openxmlformats.org/presentationml/2006/main">
+  <p:cSld>
+    <p:spTree>
+      <p:nvGrpSpPr>
+        <p:cNvPr id="1" name=""/>
+        <p:cNvGrpSpPr/>
+        <p:nvPr/>
+      </p:nvGrpSpPr>
+      <p:grpSpPr>
+        <a:xfrm>
+          <a:off x="0" y="0"/>
+          <a:ext cx="0" cy="0"/>
+          <a:chOff x="0" y="0"/>
+          <a:chExt cx="0" cy="0"/>
+        </a:xfrm>
+      </p:grpSpPr>
+      <p:sp>
+        <p:nvSpPr>
+          <p:cNvPr id="2" name="Title 1"/>
+          <p:cNvSpPr>
+            <a:spLocks noGrp="1"/>
+          </p:cNvSpPr>
+          <p:nvPr>
+            <p:ph type="title"/>
+          </p:nvPr>
+        </p:nvSpPr>
+        <p:spPr>
+          <a:xfrm>
+            <a:off x="0" y="0"/>
+            <a:ext cx="9144000" cy="602780"/>
+          </a:xfrm>
+          <a:solidFill>
+            <a:srgbClr val="1A1A2E"/>
+          </a:solidFill>
+        </p:spPr>
+        <p:txBody>
+          <a:bodyPr/>
+          <a:lstStyle/>
+          <a:p>
+            <a:pPr lvl="0" indent="0" marL="0">
+              <a:buNone/>
+            </a:pPr>
+            <a:r>
+              <a:rPr/>
+              <a:t>Extracting and Interpreting the Slope</a:t>
+            </a:r>
+          </a:p>
+        </p:txBody>
+      </p:sp>
+      <p:sp>
+        <p:nvSpPr>
+          <p:cNvPr id="3" name="Content Placeholder 2"/>
+          <p:cNvSpPr>
+            <a:spLocks noGrp="1"/>
+          </p:cNvSpPr>
+          <p:nvPr>
+            <p:ph idx="1" sz="half"/>
+          </p:nvPr>
+        </p:nvSpPr>
+        <p:spPr/>
+        <p:txBody>
+          <a:bodyPr/>
+          <a:lstStyle/>
+          <a:p>
+            <a:pPr lvl="0" indent="0">
+              <a:buNone/>
+            </a:pPr>
+            <a:r>
+              <a:rPr>
+                <a:solidFill>
+                  <a:srgbClr val="5E5E5E"/>
+                </a:solidFill>
+                <a:latin typeface="Courier"/>
+              </a:rPr>
+              <a:t># Pull the slope and convert to °C per decade ------------</a:t>
+            </a:r>
+            <a:br/>
+            <a:r>
+              <a:rPr>
+                <a:solidFill>
+                  <a:srgbClr val="003B4F"/>
+                </a:solidFill>
+                <a:latin typeface="Courier"/>
+              </a:rPr>
+              <a:t>yearly_intercept &lt;- </a:t>
+            </a:r>
+            <a:r>
+              <a:rPr>
+                <a:solidFill>
+                  <a:srgbClr val="4758AB"/>
+                </a:solidFill>
+                <a:latin typeface="Courier"/>
+              </a:rPr>
+              <a:t>coef</a:t>
+            </a:r>
+            <a:r>
+              <a:rPr>
+                <a:solidFill>
+                  <a:srgbClr val="003B4F"/>
+                </a:solidFill>
+                <a:latin typeface="Courier"/>
+              </a:rPr>
+              <a:t>(yearly_temp_model)[</a:t>
+            </a:r>
+            <a:r>
+              <a:rPr>
+                <a:solidFill>
+                  <a:srgbClr val="AD0000"/>
+                </a:solidFill>
+                <a:latin typeface="Courier"/>
+              </a:rPr>
+              <a:t>1</a:t>
+            </a:r>
+            <a:r>
+              <a:rPr>
+                <a:solidFill>
+                  <a:srgbClr val="003B4F"/>
+                </a:solidFill>
+                <a:latin typeface="Courier"/>
+              </a:rPr>
+              <a:t>]</a:t>
+            </a:r>
+            <a:br/>
+            <a:r>
+              <a:rPr>
+                <a:solidFill>
+                  <a:srgbClr val="003B4F"/>
+                </a:solidFill>
+                <a:latin typeface="Courier"/>
+              </a:rPr>
+              <a:t>yearly_slope     &lt;- </a:t>
+            </a:r>
+            <a:r>
+              <a:rPr>
+                <a:solidFill>
+                  <a:srgbClr val="4758AB"/>
+                </a:solidFill>
+                <a:latin typeface="Courier"/>
+              </a:rPr>
+              <a:t>coef</a:t>
+            </a:r>
+            <a:r>
+              <a:rPr>
+                <a:solidFill>
+                  <a:srgbClr val="003B4F"/>
+                </a:solidFill>
+                <a:latin typeface="Courier"/>
+              </a:rPr>
+              <a:t>(yearly_temp_model)[</a:t>
+            </a:r>
+            <a:r>
+              <a:rPr>
+                <a:solidFill>
+                  <a:srgbClr val="AD0000"/>
+                </a:solidFill>
+                <a:latin typeface="Courier"/>
+              </a:rPr>
+              <a:t>2</a:t>
+            </a:r>
+            <a:r>
+              <a:rPr>
+                <a:solidFill>
+                  <a:srgbClr val="003B4F"/>
+                </a:solidFill>
+                <a:latin typeface="Courier"/>
+              </a:rPr>
+              <a:t>]</a:t>
+            </a:r>
+            <a:br/>
+            <a:br/>
+            <a:r>
+              <a:rPr>
+                <a:solidFill>
+                  <a:srgbClr val="4758AB"/>
+                </a:solidFill>
+                <a:latin typeface="Courier"/>
+              </a:rPr>
+              <a:t>cat</a:t>
+            </a:r>
+            <a:r>
+              <a:rPr>
+                <a:solidFill>
+                  <a:srgbClr val="003B4F"/>
+                </a:solidFill>
+                <a:latin typeface="Courier"/>
+              </a:rPr>
+              <a:t>(</a:t>
+            </a:r>
+            <a:r>
+              <a:rPr>
+                <a:solidFill>
+                  <a:srgbClr val="20794D"/>
+                </a:solidFill>
+                <a:latin typeface="Courier"/>
+              </a:rPr>
+              <a:t>"Slope (b)         ="</a:t>
+            </a:r>
+            <a:r>
+              <a:rPr>
+                <a:solidFill>
+                  <a:srgbClr val="003B4F"/>
+                </a:solidFill>
+                <a:latin typeface="Courier"/>
+              </a:rPr>
+              <a:t>, </a:t>
+            </a:r>
+            <a:r>
+              <a:rPr>
+                <a:solidFill>
+                  <a:srgbClr val="4758AB"/>
+                </a:solidFill>
+                <a:latin typeface="Courier"/>
+              </a:rPr>
+              <a:t>round</a:t>
+            </a:r>
+            <a:r>
+              <a:rPr>
+                <a:solidFill>
+                  <a:srgbClr val="003B4F"/>
+                </a:solidFill>
+                <a:latin typeface="Courier"/>
+              </a:rPr>
+              <a:t>(yearly_slope, </a:t>
+            </a:r>
+            <a:r>
+              <a:rPr>
+                <a:solidFill>
+                  <a:srgbClr val="AD0000"/>
+                </a:solidFill>
+                <a:latin typeface="Courier"/>
+              </a:rPr>
+              <a:t>4</a:t>
+            </a:r>
+            <a:r>
+              <a:rPr>
+                <a:solidFill>
+                  <a:srgbClr val="003B4F"/>
+                </a:solidFill>
+                <a:latin typeface="Courier"/>
+              </a:rPr>
+              <a:t>), </a:t>
+            </a:r>
+            <a:r>
+              <a:rPr>
+                <a:solidFill>
+                  <a:srgbClr val="20794D"/>
+                </a:solidFill>
+                <a:latin typeface="Courier"/>
+              </a:rPr>
+              <a:t>"°C/year</a:t>
+            </a:r>
+            <a:r>
+              <a:rPr>
+                <a:solidFill>
+                  <a:srgbClr val="5E5E5E"/>
+                </a:solidFill>
+                <a:latin typeface="Courier"/>
+              </a:rPr>
+              <a:t>\n</a:t>
+            </a:r>
+            <a:r>
+              <a:rPr>
+                <a:solidFill>
+                  <a:srgbClr val="20794D"/>
+                </a:solidFill>
+                <a:latin typeface="Courier"/>
+              </a:rPr>
+              <a:t>"</a:t>
+            </a:r>
+            <a:r>
+              <a:rPr>
+                <a:solidFill>
+                  <a:srgbClr val="003B4F"/>
+                </a:solidFill>
+                <a:latin typeface="Courier"/>
+              </a:rPr>
+              <a:t>)</a:t>
+            </a:r>
+          </a:p>
+          <a:p>
+            <a:pPr lvl="0" indent="0">
+              <a:buNone/>
+            </a:pPr>
+            <a:r>
+              <a:rPr>
+                <a:latin typeface="Courier"/>
+              </a:rPr>
+              <a:t>Slope (b)         = 0.0269 °C/year</a:t>
+            </a:r>
+          </a:p>
+          <a:p>
+            <a:pPr lvl="0" indent="0">
+              <a:buNone/>
+            </a:pPr>
+            <a:r>
+              <a:rPr>
+                <a:solidFill>
+                  <a:srgbClr val="4758AB"/>
+                </a:solidFill>
+                <a:latin typeface="Courier"/>
+              </a:rPr>
+              <a:t>cat</a:t>
+            </a:r>
+            <a:r>
+              <a:rPr>
+                <a:solidFill>
+                  <a:srgbClr val="003B4F"/>
+                </a:solidFill>
+                <a:latin typeface="Courier"/>
+              </a:rPr>
+              <a:t>(</a:t>
+            </a:r>
+            <a:r>
+              <a:rPr>
+                <a:solidFill>
+                  <a:srgbClr val="20794D"/>
+                </a:solidFill>
+                <a:latin typeface="Courier"/>
+              </a:rPr>
+              <a:t>"Warming rate       ="</a:t>
+            </a:r>
+            <a:r>
+              <a:rPr>
+                <a:solidFill>
+                  <a:srgbClr val="003B4F"/>
+                </a:solidFill>
+                <a:latin typeface="Courier"/>
+              </a:rPr>
+              <a:t>,</a:t>
+            </a:r>
+            <a:br/>
+            <a:r>
+              <a:rPr>
+                <a:solidFill>
+                  <a:srgbClr val="003B4F"/>
+                </a:solidFill>
+                <a:latin typeface="Courier"/>
+              </a:rPr>
+              <a:t>    </a:t>
+            </a:r>
+            <a:r>
+              <a:rPr>
+                <a:solidFill>
+                  <a:srgbClr val="4758AB"/>
+                </a:solidFill>
+                <a:latin typeface="Courier"/>
+              </a:rPr>
+              <a:t>round</a:t>
+            </a:r>
+            <a:r>
+              <a:rPr>
+                <a:solidFill>
+                  <a:srgbClr val="003B4F"/>
+                </a:solidFill>
+                <a:latin typeface="Courier"/>
+              </a:rPr>
+              <a:t>(yearly_slope </a:t>
+            </a:r>
+            <a:r>
+              <a:rPr>
+                <a:solidFill>
+                  <a:srgbClr val="5E5E5E"/>
+                </a:solidFill>
+                <a:latin typeface="Courier"/>
+              </a:rPr>
+              <a:t>*</a:t>
+            </a:r>
+            <a:r>
+              <a:rPr>
+                <a:solidFill>
+                  <a:srgbClr val="003B4F"/>
+                </a:solidFill>
+                <a:latin typeface="Courier"/>
+              </a:rPr>
+              <a:t> </a:t>
+            </a:r>
+            <a:r>
+              <a:rPr>
+                <a:solidFill>
+                  <a:srgbClr val="AD0000"/>
+                </a:solidFill>
+                <a:latin typeface="Courier"/>
+              </a:rPr>
+              <a:t>10</a:t>
+            </a:r>
+            <a:r>
+              <a:rPr>
+                <a:solidFill>
+                  <a:srgbClr val="003B4F"/>
+                </a:solidFill>
+                <a:latin typeface="Courier"/>
+              </a:rPr>
+              <a:t>, </a:t>
+            </a:r>
+            <a:r>
+              <a:rPr>
+                <a:solidFill>
+                  <a:srgbClr val="AD0000"/>
+                </a:solidFill>
+                <a:latin typeface="Courier"/>
+              </a:rPr>
+              <a:t>3</a:t>
+            </a:r>
+            <a:r>
+              <a:rPr>
+                <a:solidFill>
+                  <a:srgbClr val="003B4F"/>
+                </a:solidFill>
+                <a:latin typeface="Courier"/>
+              </a:rPr>
+              <a:t>), </a:t>
+            </a:r>
+            <a:r>
+              <a:rPr>
+                <a:solidFill>
+                  <a:srgbClr val="20794D"/>
+                </a:solidFill>
+                <a:latin typeface="Courier"/>
+              </a:rPr>
+              <a:t>"°C per decade</a:t>
+            </a:r>
+            <a:r>
+              <a:rPr>
+                <a:solidFill>
+                  <a:srgbClr val="5E5E5E"/>
+                </a:solidFill>
+                <a:latin typeface="Courier"/>
+              </a:rPr>
+              <a:t>\n</a:t>
+            </a:r>
+            <a:r>
+              <a:rPr>
+                <a:solidFill>
+                  <a:srgbClr val="20794D"/>
+                </a:solidFill>
+                <a:latin typeface="Courier"/>
+              </a:rPr>
+              <a:t>"</a:t>
+            </a:r>
+            <a:r>
+              <a:rPr>
+                <a:solidFill>
+                  <a:srgbClr val="003B4F"/>
+                </a:solidFill>
+                <a:latin typeface="Courier"/>
+              </a:rPr>
+              <a:t>)</a:t>
+            </a:r>
+          </a:p>
+          <a:p>
+            <a:pPr lvl="0" indent="0">
+              <a:buNone/>
+            </a:pPr>
+            <a:r>
+              <a:rPr>
+                <a:latin typeface="Courier"/>
+              </a:rPr>
+              <a:t>Warming rate       = 0.269 °C per decade</a:t>
+            </a:r>
+          </a:p>
+        </p:txBody>
+      </p:sp>
+      <p:sp>
+        <p:nvSpPr>
+          <p:cNvPr id="4" name="Content Placeholder 3"/>
+          <p:cNvSpPr>
+            <a:spLocks noGrp="1"/>
+          </p:cNvSpPr>
+          <p:nvPr>
+            <p:ph idx="2" sz="half"/>
+          </p:nvPr>
+        </p:nvSpPr>
+        <p:spPr/>
+        <p:txBody>
+          <a:bodyPr/>
+          <a:lstStyle/>
+          <a:p>
+            <a:pPr lvl="0" indent="0" marL="0">
+              <a:buNone/>
+            </a:pPr>
+            <a:r>
+              <a:rPr b="1"/>
+              <a:t>Why multiply by 10?</a:t>
+            </a:r>
+          </a:p>
+          <a:p>
+            <a:pPr lvl="0"/>
+            <a:r>
+              <a:rPr/>
+              <a:t>The raw slope is in °C </a:t>
+            </a:r>
+            <a:r>
+              <a:rPr b="1"/>
+              <a:t>per year</a:t>
+            </a:r>
+            <a:r>
+              <a:rPr/>
+              <a:t> — a small, hard-to-feel number</a:t>
+            </a:r>
+          </a:p>
+          <a:p>
+            <a:pPr lvl="0"/>
+            <a:r>
+              <a:rPr/>
+              <a:t>Multiplying by 10 converts to °C </a:t>
+            </a:r>
+            <a:r>
+              <a:rPr b="1"/>
+              <a:t>per decade</a:t>
+            </a:r>
+            <a:r>
+              <a:rPr/>
+              <a:t> — easier to communicate</a:t>
+            </a:r>
+          </a:p>
+          <a:p>
+            <a:pPr lvl="0"/>
+            <a:r>
+              <a:rPr/>
+              <a:t>This is the same </a:t>
+            </a:r>
+            <a:r>
+              <a:rPr>
+                <a:latin typeface="Courier"/>
+              </a:rPr>
+              <a:t>coef()</a:t>
+            </a:r>
+            <a:r>
+              <a:rPr/>
+              <a:t> extraction skill from Lecture 05</a:t>
+            </a:r>
+          </a:p>
+          <a:p>
+            <a:pPr lvl="0" indent="0" marL="1270000">
+              <a:buNone/>
+            </a:pPr>
+            <a:r>
+              <a:rPr sz="2000" i="1"/>
+              <a:t>b</a:t>
+            </a:r>
+            <a:r>
+              <a:rPr sz="2000"/>
+              <a:t> = 0.02 °C/year → 0.2 °C/decade — small year to year, but adds up over 78 years</a:t>
+            </a:r>
+          </a:p>
+        </p:txBody>
+      </p:sp>
+    </p:spTree>
+  </p:cSld>
+</p:sld>
+</file>
+
+<file path=ppt/slides/slide14.xml><?xml version="1.0" encoding="utf-8"?>
+<p:sld xmlns:a="http://schemas.openxmlformats.org/drawingml/2006/main" xmlns:r="http://schemas.openxmlformats.org/officeDocument/2006/relationships" xmlns:p="http://schemas.openxmlformats.org/presentationml/2006/main">
+  <p:cSld>
+    <p:spTree>
+      <p:nvGrpSpPr>
+        <p:cNvPr id="1" name=""/>
+        <p:cNvGrpSpPr/>
+        <p:nvPr/>
+      </p:nvGrpSpPr>
+      <p:grpSpPr>
+        <a:xfrm>
+          <a:off x="0" y="0"/>
+          <a:ext cx="0" cy="0"/>
+          <a:chOff x="0" y="0"/>
+          <a:chExt cx="0" cy="0"/>
+        </a:xfrm>
+      </p:grpSpPr>
+      <p:sp>
+        <p:nvSpPr>
+          <p:cNvPr id="2" name="Title 1"/>
+          <p:cNvSpPr>
+            <a:spLocks noGrp="1"/>
+          </p:cNvSpPr>
+          <p:nvPr>
+            <p:ph type="title"/>
+          </p:nvPr>
+        </p:nvSpPr>
+        <p:spPr>
+          <a:xfrm>
+            <a:off x="0" y="0"/>
+            <a:ext cx="9144000" cy="602780"/>
+          </a:xfrm>
+          <a:solidFill>
+            <a:srgbClr val="1A1A2E"/>
+          </a:solidFill>
+        </p:spPr>
+        <p:txBody>
+          <a:bodyPr/>
+          <a:lstStyle/>
+          <a:p>
+            <a:pPr lvl="0" indent="0" marL="0">
+              <a:buNone/>
+            </a:pPr>
+            <a:r>
+              <a:rPr/>
+              <a:t>Does the Same Pattern Hold at the Monthly Level?</a:t>
+            </a:r>
+          </a:p>
+        </p:txBody>
+      </p:sp>
+      <p:sp>
+        <p:nvSpPr>
+          <p:cNvPr id="3" name="Content Placeholder 2"/>
+          <p:cNvSpPr>
+            <a:spLocks noGrp="1"/>
+          </p:cNvSpPr>
+          <p:nvPr>
+            <p:ph idx="1" sz="half"/>
+          </p:nvPr>
+        </p:nvSpPr>
+        <p:spPr/>
+        <p:txBody>
+          <a:bodyPr/>
+          <a:lstStyle/>
+          <a:p>
+            <a:pPr lvl="0" indent="0">
+              <a:buNone/>
+            </a:pPr>
+            <a:r>
+              <a:rPr>
+                <a:solidFill>
+                  <a:srgbClr val="5E5E5E"/>
+                </a:solidFill>
+                <a:latin typeface="Courier"/>
+              </a:rPr>
+              <a:t># Fit the same model on the monthly summary ---------------</a:t>
+            </a:r>
+            <a:br/>
+            <a:r>
+              <a:rPr>
+                <a:solidFill>
+                  <a:srgbClr val="003B4F"/>
+                </a:solidFill>
+                <a:latin typeface="Courier"/>
+              </a:rPr>
+              <a:t>monthly_temp_model &lt;- </a:t>
+            </a:r>
+            <a:r>
+              <a:rPr>
+                <a:solidFill>
+                  <a:srgbClr val="4758AB"/>
+                </a:solidFill>
+                <a:latin typeface="Courier"/>
+              </a:rPr>
+              <a:t>lm</a:t>
+            </a:r>
+            <a:r>
+              <a:rPr>
+                <a:solidFill>
+                  <a:srgbClr val="003B4F"/>
+                </a:solidFill>
+                <a:latin typeface="Courier"/>
+              </a:rPr>
+              <a:t>(TEMP </a:t>
+            </a:r>
+            <a:r>
+              <a:rPr>
+                <a:solidFill>
+                  <a:srgbClr val="5E5E5E"/>
+                </a:solidFill>
+                <a:latin typeface="Courier"/>
+              </a:rPr>
+              <a:t>~</a:t>
+            </a:r>
+            <a:r>
+              <a:rPr>
+                <a:solidFill>
+                  <a:srgbClr val="003B4F"/>
+                </a:solidFill>
+                <a:latin typeface="Courier"/>
+              </a:rPr>
+              <a:t> YEARMODA, </a:t>
+            </a:r>
+            <a:r>
+              <a:rPr>
+                <a:solidFill>
+                  <a:srgbClr val="657422"/>
+                </a:solidFill>
+                <a:latin typeface="Courier"/>
+              </a:rPr>
+              <a:t>data =</a:t>
+            </a:r>
+            <a:r>
+              <a:rPr>
+                <a:solidFill>
+                  <a:srgbClr val="003B4F"/>
+                </a:solidFill>
+                <a:latin typeface="Courier"/>
+              </a:rPr>
+              <a:t> dlh_month_df)</a:t>
+            </a:r>
+            <a:br/>
+            <a:br/>
+            <a:r>
+              <a:rPr>
+                <a:solidFill>
+                  <a:srgbClr val="4758AB"/>
+                </a:solidFill>
+                <a:latin typeface="Courier"/>
+              </a:rPr>
+              <a:t>summary</a:t>
+            </a:r>
+            <a:r>
+              <a:rPr>
+                <a:solidFill>
+                  <a:srgbClr val="003B4F"/>
+                </a:solidFill>
+                <a:latin typeface="Courier"/>
+              </a:rPr>
+              <a:t>(monthly_temp_model)</a:t>
+            </a:r>
+          </a:p>
+          <a:p>
+            <a:pPr lvl="0" indent="0">
+              <a:buNone/>
+            </a:pPr>
+            <a:r>
+              <a:rPr>
+                <a:latin typeface="Courier"/>
+              </a:rPr>
+              <a:t>
+Call:
+lm(formula = TEMP ~ YEARMODA, data = dlh_month_df)
+Residuals:
+    Min      1Q  Median      3Q     Max 
+-23.285  -9.826   1.130  10.303  17.402 
+Coefficients:
+             Estimate Std. Error t value Pr(&gt;|t|)    
+(Intercept) 3.734e+00  4.954e-01   7.538 1.25e-13 ***
+YEARMODA    7.788e-05  4.588e-05   1.698   0.0899 .  
+---
+Signif. codes:  0 '***' 0.001 '**' 0.01 '*' 0.05 '.' 0.1 ' ' 1
+Residual standard error: 11.04 on 834 degrees of freedom
+Multiple R-squared:  0.003444,  Adjusted R-squared:  0.002249 
+F-statistic: 2.882 on 1 and 834 DF,  p-value: 0.08995</a:t>
+            </a:r>
+          </a:p>
+        </p:txBody>
+      </p:sp>
+      <p:sp>
+        <p:nvSpPr>
+          <p:cNvPr id="4" name="Content Placeholder 3"/>
+          <p:cNvSpPr>
+            <a:spLocks noGrp="1"/>
+          </p:cNvSpPr>
+          <p:nvPr>
+            <p:ph idx="2" sz="half"/>
+          </p:nvPr>
+        </p:nvSpPr>
+        <p:spPr/>
+        <p:txBody>
+          <a:bodyPr/>
+          <a:lstStyle/>
+          <a:p>
+            <a:pPr lvl="0" indent="0" marL="0">
+              <a:buNone/>
+            </a:pPr>
+            <a:r>
+              <a:rPr b="1"/>
+              <a:t>Compare to the yearly model:</a:t>
+            </a:r>
+          </a:p>
+          <a:p>
+            <a:pPr lvl="0"/>
+            <a:r>
+              <a:rPr/>
+              <a:t>Same overall warming direction</a:t>
+            </a:r>
+          </a:p>
+          <a:p>
+            <a:pPr lvl="0"/>
+            <a:r>
+              <a:rPr/>
+              <a:t>More residual scatter, because each point still carries some seasonal “memory”</a:t>
+            </a:r>
+          </a:p>
+          <a:p>
+            <a:pPr lvl="0"/>
+            <a:r>
+              <a:rPr/>
+              <a:t>The yearly summary gives the cleanest, most interpretable slope for a </a:t>
+            </a:r>
+            <a:r>
+              <a:rPr i="1"/>
+              <a:t>long-term</a:t>
+            </a:r>
+            <a:r>
+              <a:rPr/>
+              <a:t> trend question</a:t>
+            </a:r>
+          </a:p>
+          <a:p>
+            <a:pPr lvl="0" indent="0" marL="0">
+              <a:buNone/>
+            </a:pPr>
+            <a:r>
+              <a:rPr/>
+              <a:t>This is why we chose the </a:t>
+            </a:r>
+            <a:r>
+              <a:rPr b="1"/>
+              <a:t>yearly</a:t>
+            </a:r>
+            <a:r>
+              <a:rPr/>
+              <a:t> summary for our headline result.</a:t>
+            </a:r>
+          </a:p>
+        </p:txBody>
+      </p:sp>
+    </p:spTree>
+  </p:cSld>
+</p:sld>
+</file>
+
+<file path=ppt/slides/slide15.xml><?xml version="1.0" encoding="utf-8"?>
+<p:sld xmlns:a="http://schemas.openxmlformats.org/drawingml/2006/main" xmlns:r="http://schemas.openxmlformats.org/officeDocument/2006/relationships" xmlns:p="http://schemas.openxmlformats.org/presentationml/2006/main">
+  <p:cSld>
+    <p:spTree>
+      <p:nvGrpSpPr>
+        <p:cNvPr id="1" name=""/>
+        <p:cNvGrpSpPr/>
+        <p:nvPr/>
+      </p:nvGrpSpPr>
+      <p:grpSpPr>
+        <a:xfrm>
+          <a:off x="0" y="0"/>
+          <a:ext cx="0" cy="0"/>
+          <a:chOff x="0" y="0"/>
+          <a:chExt cx="0" cy="0"/>
+        </a:xfrm>
+      </p:grpSpPr>
+      <p:sp>
+        <p:nvSpPr>
+          <p:cNvPr id="2" name="Title 1"/>
+          <p:cNvSpPr>
+            <a:spLocks noGrp="1"/>
+          </p:cNvSpPr>
+          <p:nvPr>
+            <p:ph type="title"/>
+          </p:nvPr>
+        </p:nvSpPr>
+        <p:spPr>
+          <a:xfrm>
+            <a:off x="0" y="0"/>
+            <a:ext cx="9144000" cy="602780"/>
+          </a:xfrm>
+          <a:solidFill>
+            <a:srgbClr val="1A1A2E"/>
+          </a:solidFill>
+        </p:spPr>
+        <p:txBody>
+          <a:bodyPr/>
+          <a:lstStyle/>
+          <a:p>
+            <a:pPr lvl="0" indent="0" marL="0">
+              <a:buNone/>
+            </a:pPr>
+            <a:r>
+              <a:rPr/>
+              <a:t>A New Question — Is Every Season Warming the Same?</a:t>
+            </a:r>
+          </a:p>
+        </p:txBody>
+      </p:sp>
+      <p:sp>
+        <p:nvSpPr>
+          <p:cNvPr id="3" name="Content Placeholder 2"/>
+          <p:cNvSpPr>
+            <a:spLocks noGrp="1"/>
+          </p:cNvSpPr>
+          <p:nvPr>
+            <p:ph idx="1" sz="half"/>
+          </p:nvPr>
+        </p:nvSpPr>
+        <p:spPr/>
+        <p:txBody>
+          <a:bodyPr/>
+          <a:lstStyle/>
+          <a:p>
+            <a:pPr lvl="0" indent="0" marL="0">
+              <a:buNone/>
+            </a:pPr>
+            <a:r>
+              <a:rPr b="1"/>
+              <a:t>So far we’ve asked:</a:t>
+            </a:r>
+            <a:r>
+              <a:rPr/>
+              <a:t> is Duluth warming overall?</a:t>
+            </a:r>
+          </a:p>
+          <a:p>
+            <a:pPr lvl="0" indent="0" marL="0">
+              <a:buNone/>
+            </a:pPr>
+            <a:r>
+              <a:rPr b="1"/>
+              <a:t>New question:</a:t>
+            </a:r>
+            <a:r>
+              <a:rPr/>
+              <a:t> is </a:t>
+            </a:r>
+            <a:r>
+              <a:rPr b="1"/>
+              <a:t>winter</a:t>
+            </a:r>
+            <a:r>
+              <a:rPr/>
+              <a:t> warming at the same rate as </a:t>
+            </a:r>
+            <a:r>
+              <a:rPr b="1"/>
+              <a:t>summer</a:t>
+            </a:r>
+            <a:r>
+              <a:rPr/>
+              <a:t>?</a:t>
+            </a:r>
+          </a:p>
+          <a:p>
+            <a:pPr lvl="0" indent="0" marL="0">
+              <a:buNone/>
+            </a:pPr>
+            <a:r>
+              <a:rPr/>
+              <a:t>This matters biologically — earlier springs, shorter ice seasons, and changing growing seasons don’t depend on the </a:t>
+            </a:r>
+            <a:r>
+              <a:rPr i="1"/>
+              <a:t>annual average</a:t>
+            </a:r>
+            <a:r>
+              <a:rPr/>
+              <a:t>. They depend on which </a:t>
+            </a:r>
+            <a:r>
+              <a:rPr b="1"/>
+              <a:t>season</a:t>
+            </a:r>
+            <a:r>
+              <a:rPr/>
+              <a:t> is changing fastest.</a:t>
+            </a:r>
+          </a:p>
+          <a:p>
+            <a:pPr lvl="0" indent="0" marL="0">
+              <a:buNone/>
+            </a:pPr>
+            <a:r>
+              <a:rPr b="1"/>
+              <a:t>Plan:</a:t>
+            </a:r>
+          </a:p>
+          <a:p>
+            <a:pPr lvl="0" indent="-342900" marL="342900">
+              <a:buAutoNum type="arabicPeriod"/>
+            </a:pPr>
+            <a:r>
+              <a:rPr/>
+              <a:t>Label every day as summer or winter using </a:t>
+            </a:r>
+            <a:r>
+              <a:rPr>
+                <a:latin typeface="Courier"/>
+              </a:rPr>
+              <a:t>case_when()</a:t>
+            </a:r>
+          </a:p>
+          <a:p>
+            <a:pPr lvl="0" indent="-342900" marL="342900">
+              <a:buAutoNum type="arabicPeriod"/>
+            </a:pPr>
+            <a:r>
+              <a:rPr/>
+              <a:t>Summarize mean temperature by year </a:t>
+            </a:r>
+            <a:r>
+              <a:rPr b="1"/>
+              <a:t>within each season</a:t>
+            </a:r>
+          </a:p>
+          <a:p>
+            <a:pPr lvl="0" indent="-342900" marL="342900">
+              <a:buAutoNum type="arabicPeriod"/>
+            </a:pPr>
+            <a:r>
+              <a:rPr/>
+              <a:t>Fit a </a:t>
+            </a:r>
+            <a:r>
+              <a:rPr i="1"/>
+              <a:t>separate</a:t>
+            </a:r>
+            <a:r>
+              <a:rPr/>
+              <a:t> </a:t>
+            </a:r>
+            <a:r>
+              <a:rPr>
+                <a:latin typeface="Courier"/>
+              </a:rPr>
+              <a:t>lm()</a:t>
+            </a:r>
+            <a:r>
+              <a:rPr/>
+              <a:t> for each season</a:t>
+            </a:r>
+          </a:p>
+          <a:p>
+            <a:pPr lvl="0" indent="-342900" marL="342900">
+              <a:buAutoNum type="arabicPeriod"/>
+            </a:pPr>
+            <a:r>
+              <a:rPr/>
+              <a:t>Compare the two slopes</a:t>
+            </a:r>
+          </a:p>
+        </p:txBody>
+      </p:sp>
+      <p:sp>
+        <p:nvSpPr>
+          <p:cNvPr id="4" name="Content Placeholder 3"/>
+          <p:cNvSpPr>
+            <a:spLocks noGrp="1"/>
+          </p:cNvSpPr>
+          <p:nvPr>
+            <p:ph idx="2" sz="half"/>
+          </p:nvPr>
+        </p:nvSpPr>
+        <p:spPr/>
+        <p:txBody>
+          <a:bodyPr/>
+          <a:lstStyle/>
+          <a:p>
+            <a:pPr lvl="0" indent="0" marL="1270000">
+              <a:buNone/>
+            </a:pPr>
+            <a:r>
+              <a:rPr sz="2000" b="1"/>
+              <a:t>Tip</a:t>
+            </a:r>
+          </a:p>
+          <a:p>
+            <a:pPr lvl="0" indent="0" marL="1270000">
+              <a:buNone/>
+            </a:pPr>
+            <a:r>
+              <a:rPr sz="2000" b="1"/>
+              <a:t>🖐 Try it yourself</a:t>
+            </a:r>
+          </a:p>
+          <a:p>
+            <a:pPr lvl="0" indent="0" marL="1270000">
+              <a:buNone/>
+            </a:pPr>
+            <a:r>
+              <a:rPr sz="2000"/>
+              <a:t>Make a prediction now: which season do you think is warming faster — winter or summer? We’ll find out with real data.</a:t>
+            </a:r>
+          </a:p>
+        </p:txBody>
+      </p:sp>
+    </p:spTree>
+  </p:cSld>
+</p:sld>
+</file>
+
+<file path=ppt/slides/slide16.xml><?xml version="1.0" encoding="utf-8"?>
+<p:sld xmlns:a="http://schemas.openxmlformats.org/drawingml/2006/main" xmlns:r="http://schemas.openxmlformats.org/officeDocument/2006/relationships" xmlns:p="http://schemas.openxmlformats.org/presentationml/2006/main">
+  <p:cSld>
+    <p:spTree>
+      <p:nvGrpSpPr>
+        <p:cNvPr id="1" name=""/>
+        <p:cNvGrpSpPr/>
+        <p:nvPr/>
+      </p:nvGrpSpPr>
+      <p:grpSpPr>
+        <a:xfrm>
+          <a:off x="0" y="0"/>
+          <a:ext cx="0" cy="0"/>
+          <a:chOff x="0" y="0"/>
+          <a:chExt cx="0" cy="0"/>
+        </a:xfrm>
+      </p:grpSpPr>
+      <p:sp>
+        <p:nvSpPr>
+          <p:cNvPr id="2" name="Title 1"/>
+          <p:cNvSpPr>
+            <a:spLocks noGrp="1"/>
+          </p:cNvSpPr>
+          <p:nvPr>
+            <p:ph type="title"/>
+          </p:nvPr>
+        </p:nvSpPr>
+        <p:spPr>
+          <a:xfrm>
+            <a:off x="0" y="0"/>
+            <a:ext cx="9144000" cy="602780"/>
+          </a:xfrm>
+          <a:solidFill>
+            <a:srgbClr val="1A1A2E"/>
+          </a:solidFill>
+        </p:spPr>
+        <p:txBody>
+          <a:bodyPr/>
+          <a:lstStyle/>
+          <a:p>
+            <a:pPr lvl="0" indent="0" marL="0">
+              <a:buNone/>
+            </a:pPr>
+            <a:r>
+              <a:rPr/>
+              <a:t>Building a Season Variable with </a:t>
+            </a:r>
+            <a:r>
+              <a:rPr>
+                <a:latin typeface="Courier"/>
+              </a:rPr>
+              <a:t>case_when()</a:t>
+            </a:r>
+          </a:p>
+        </p:txBody>
+      </p:sp>
+      <p:sp>
+        <p:nvSpPr>
+          <p:cNvPr id="3" name="Content Placeholder 2"/>
+          <p:cNvSpPr>
+            <a:spLocks noGrp="1"/>
+          </p:cNvSpPr>
+          <p:nvPr>
+            <p:ph idx="1" sz="half"/>
+          </p:nvPr>
+        </p:nvSpPr>
+        <p:spPr/>
+        <p:txBody>
+          <a:bodyPr/>
+          <a:lstStyle/>
+          <a:p>
+            <a:pPr lvl="0" indent="0">
+              <a:buNone/>
+            </a:pPr>
+            <a:r>
+              <a:rPr>
+                <a:solidFill>
+                  <a:srgbClr val="5E5E5E"/>
+                </a:solidFill>
+                <a:latin typeface="Courier"/>
+              </a:rPr>
+              <a:t># Label each day as summer, winter, or shoulder season ----</a:t>
+            </a:r>
+            <a:br/>
+            <a:r>
+              <a:rPr>
+                <a:solidFill>
+                  <a:srgbClr val="003B4F"/>
+                </a:solidFill>
+                <a:latin typeface="Courier"/>
+              </a:rPr>
+              <a:t>dlh_season_df &lt;- dlh_temp_df </a:t>
+            </a:r>
+            <a:r>
+              <a:rPr>
+                <a:solidFill>
+                  <a:srgbClr val="5E5E5E"/>
+                </a:solidFill>
+                <a:latin typeface="Courier"/>
+              </a:rPr>
+              <a:t>%&gt;%</a:t>
+            </a:r>
+            <a:br/>
+            <a:r>
+              <a:rPr>
+                <a:solidFill>
+                  <a:srgbClr val="003B4F"/>
+                </a:solidFill>
+                <a:latin typeface="Courier"/>
+              </a:rPr>
+              <a:t>  </a:t>
+            </a:r>
+            <a:r>
+              <a:rPr>
+                <a:solidFill>
+                  <a:srgbClr val="4758AB"/>
+                </a:solidFill>
+                <a:latin typeface="Courier"/>
+              </a:rPr>
+              <a:t>mutate</a:t>
+            </a:r>
+            <a:r>
+              <a:rPr>
+                <a:solidFill>
+                  <a:srgbClr val="003B4F"/>
+                </a:solidFill>
+                <a:latin typeface="Courier"/>
+              </a:rPr>
+              <a:t>(</a:t>
+            </a:r>
+            <a:br/>
+            <a:r>
+              <a:rPr>
+                <a:solidFill>
+                  <a:srgbClr val="003B4F"/>
+                </a:solidFill>
+                <a:latin typeface="Courier"/>
+              </a:rPr>
+              <a:t>    </a:t>
+            </a:r>
+            <a:r>
+              <a:rPr>
+                <a:solidFill>
+                  <a:srgbClr val="657422"/>
+                </a:solidFill>
+                <a:latin typeface="Courier"/>
+              </a:rPr>
+              <a:t>season =</a:t>
+            </a:r>
+            <a:r>
+              <a:rPr>
+                <a:solidFill>
+                  <a:srgbClr val="003B4F"/>
+                </a:solidFill>
+                <a:latin typeface="Courier"/>
+              </a:rPr>
+              <a:t> </a:t>
+            </a:r>
+            <a:r>
+              <a:rPr>
+                <a:solidFill>
+                  <a:srgbClr val="4758AB"/>
+                </a:solidFill>
+                <a:latin typeface="Courier"/>
+              </a:rPr>
+              <a:t>case_when</a:t>
+            </a:r>
+            <a:r>
+              <a:rPr>
+                <a:solidFill>
+                  <a:srgbClr val="003B4F"/>
+                </a:solidFill>
+                <a:latin typeface="Courier"/>
+              </a:rPr>
+              <a:t>(</a:t>
+            </a:r>
+            <a:br/>
+            <a:r>
+              <a:rPr>
+                <a:solidFill>
+                  <a:srgbClr val="003B4F"/>
+                </a:solidFill>
+                <a:latin typeface="Courier"/>
+              </a:rPr>
+              <a:t>      MONTH </a:t>
+            </a:r>
+            <a:r>
+              <a:rPr>
+                <a:solidFill>
+                  <a:srgbClr val="5E5E5E"/>
+                </a:solidFill>
+                <a:latin typeface="Courier"/>
+              </a:rPr>
+              <a:t>%in%</a:t>
+            </a:r>
+            <a:r>
+              <a:rPr>
+                <a:solidFill>
+                  <a:srgbClr val="003B4F"/>
+                </a:solidFill>
+                <a:latin typeface="Courier"/>
+              </a:rPr>
+              <a:t> </a:t>
+            </a:r>
+            <a:r>
+              <a:rPr>
+                <a:solidFill>
+                  <a:srgbClr val="4758AB"/>
+                </a:solidFill>
+                <a:latin typeface="Courier"/>
+              </a:rPr>
+              <a:t>c</a:t>
+            </a:r>
+            <a:r>
+              <a:rPr>
+                <a:solidFill>
+                  <a:srgbClr val="003B4F"/>
+                </a:solidFill>
+                <a:latin typeface="Courier"/>
+              </a:rPr>
+              <a:t>(</a:t>
+            </a:r>
+            <a:r>
+              <a:rPr>
+                <a:solidFill>
+                  <a:srgbClr val="AD0000"/>
+                </a:solidFill>
+                <a:latin typeface="Courier"/>
+              </a:rPr>
+              <a:t>6</a:t>
+            </a:r>
+            <a:r>
+              <a:rPr>
+                <a:solidFill>
+                  <a:srgbClr val="003B4F"/>
+                </a:solidFill>
+                <a:latin typeface="Courier"/>
+              </a:rPr>
+              <a:t>, </a:t>
+            </a:r>
+            <a:r>
+              <a:rPr>
+                <a:solidFill>
+                  <a:srgbClr val="AD0000"/>
+                </a:solidFill>
+                <a:latin typeface="Courier"/>
+              </a:rPr>
+              <a:t>7</a:t>
+            </a:r>
+            <a:r>
+              <a:rPr>
+                <a:solidFill>
+                  <a:srgbClr val="003B4F"/>
+                </a:solidFill>
+                <a:latin typeface="Courier"/>
+              </a:rPr>
+              <a:t>, </a:t>
+            </a:r>
+            <a:r>
+              <a:rPr>
+                <a:solidFill>
+                  <a:srgbClr val="AD0000"/>
+                </a:solidFill>
+                <a:latin typeface="Courier"/>
+              </a:rPr>
+              <a:t>8</a:t>
+            </a:r>
+            <a:r>
+              <a:rPr>
+                <a:solidFill>
+                  <a:srgbClr val="003B4F"/>
+                </a:solidFill>
+                <a:latin typeface="Courier"/>
+              </a:rPr>
+              <a:t>)   </a:t>
+            </a:r>
+            <a:r>
+              <a:rPr>
+                <a:solidFill>
+                  <a:srgbClr val="5E5E5E"/>
+                </a:solidFill>
+                <a:latin typeface="Courier"/>
+              </a:rPr>
+              <a:t>~</a:t>
+            </a:r>
+            <a:r>
+              <a:rPr>
+                <a:solidFill>
+                  <a:srgbClr val="003B4F"/>
+                </a:solidFill>
+                <a:latin typeface="Courier"/>
+              </a:rPr>
+              <a:t> </a:t>
+            </a:r>
+            <a:r>
+              <a:rPr>
+                <a:solidFill>
+                  <a:srgbClr val="20794D"/>
+                </a:solidFill>
+                <a:latin typeface="Courier"/>
+              </a:rPr>
+              <a:t>"summer"</a:t>
+            </a:r>
+            <a:r>
+              <a:rPr>
+                <a:solidFill>
+                  <a:srgbClr val="003B4F"/>
+                </a:solidFill>
+                <a:latin typeface="Courier"/>
+              </a:rPr>
+              <a:t>,</a:t>
+            </a:r>
+            <a:br/>
+            <a:r>
+              <a:rPr>
+                <a:solidFill>
+                  <a:srgbClr val="003B4F"/>
+                </a:solidFill>
+                <a:latin typeface="Courier"/>
+              </a:rPr>
+              <a:t>      MONTH </a:t>
+            </a:r>
+            <a:r>
+              <a:rPr>
+                <a:solidFill>
+                  <a:srgbClr val="5E5E5E"/>
+                </a:solidFill>
+                <a:latin typeface="Courier"/>
+              </a:rPr>
+              <a:t>%in%</a:t>
+            </a:r>
+            <a:r>
+              <a:rPr>
+                <a:solidFill>
+                  <a:srgbClr val="003B4F"/>
+                </a:solidFill>
+                <a:latin typeface="Courier"/>
+              </a:rPr>
+              <a:t> </a:t>
+            </a:r>
+            <a:r>
+              <a:rPr>
+                <a:solidFill>
+                  <a:srgbClr val="4758AB"/>
+                </a:solidFill>
+                <a:latin typeface="Courier"/>
+              </a:rPr>
+              <a:t>c</a:t>
+            </a:r>
+            <a:r>
+              <a:rPr>
+                <a:solidFill>
+                  <a:srgbClr val="003B4F"/>
+                </a:solidFill>
+                <a:latin typeface="Courier"/>
+              </a:rPr>
+              <a:t>(</a:t>
+            </a:r>
+            <a:r>
+              <a:rPr>
+                <a:solidFill>
+                  <a:srgbClr val="AD0000"/>
+                </a:solidFill>
+                <a:latin typeface="Courier"/>
+              </a:rPr>
+              <a:t>12</a:t>
+            </a:r>
+            <a:r>
+              <a:rPr>
+                <a:solidFill>
+                  <a:srgbClr val="003B4F"/>
+                </a:solidFill>
+                <a:latin typeface="Courier"/>
+              </a:rPr>
+              <a:t>, </a:t>
+            </a:r>
+            <a:r>
+              <a:rPr>
+                <a:solidFill>
+                  <a:srgbClr val="AD0000"/>
+                </a:solidFill>
+                <a:latin typeface="Courier"/>
+              </a:rPr>
+              <a:t>1</a:t>
+            </a:r>
+            <a:r>
+              <a:rPr>
+                <a:solidFill>
+                  <a:srgbClr val="003B4F"/>
+                </a:solidFill>
+                <a:latin typeface="Courier"/>
+              </a:rPr>
+              <a:t>, </a:t>
+            </a:r>
+            <a:r>
+              <a:rPr>
+                <a:solidFill>
+                  <a:srgbClr val="AD0000"/>
+                </a:solidFill>
+                <a:latin typeface="Courier"/>
+              </a:rPr>
+              <a:t>2</a:t>
+            </a:r>
+            <a:r>
+              <a:rPr>
+                <a:solidFill>
+                  <a:srgbClr val="003B4F"/>
+                </a:solidFill>
+                <a:latin typeface="Courier"/>
+              </a:rPr>
+              <a:t>)  </a:t>
+            </a:r>
+            <a:r>
+              <a:rPr>
+                <a:solidFill>
+                  <a:srgbClr val="5E5E5E"/>
+                </a:solidFill>
+                <a:latin typeface="Courier"/>
+              </a:rPr>
+              <a:t>~</a:t>
+            </a:r>
+            <a:r>
+              <a:rPr>
+                <a:solidFill>
+                  <a:srgbClr val="003B4F"/>
+                </a:solidFill>
+                <a:latin typeface="Courier"/>
+              </a:rPr>
+              <a:t> </a:t>
+            </a:r>
+            <a:r>
+              <a:rPr>
+                <a:solidFill>
+                  <a:srgbClr val="20794D"/>
+                </a:solidFill>
+                <a:latin typeface="Courier"/>
+              </a:rPr>
+              <a:t>"winter"</a:t>
+            </a:r>
+            <a:r>
+              <a:rPr>
+                <a:solidFill>
+                  <a:srgbClr val="003B4F"/>
+                </a:solidFill>
+                <a:latin typeface="Courier"/>
+              </a:rPr>
+              <a:t>,</a:t>
+            </a:r>
+            <a:br/>
+            <a:r>
+              <a:rPr>
+                <a:solidFill>
+                  <a:srgbClr val="003B4F"/>
+                </a:solidFill>
+                <a:latin typeface="Courier"/>
+              </a:rPr>
+              <a:t>      </a:t>
+            </a:r>
+            <a:r>
+              <a:rPr>
+                <a:solidFill>
+                  <a:srgbClr val="8F5902"/>
+                </a:solidFill>
+                <a:latin typeface="Courier"/>
+              </a:rPr>
+              <a:t>TRUE</a:t>
+            </a:r>
+            <a:r>
+              <a:rPr>
+                <a:solidFill>
+                  <a:srgbClr val="003B4F"/>
+                </a:solidFill>
+                <a:latin typeface="Courier"/>
+              </a:rPr>
+              <a:t>                     </a:t>
+            </a:r>
+            <a:r>
+              <a:rPr>
+                <a:solidFill>
+                  <a:srgbClr val="5E5E5E"/>
+                </a:solidFill>
+                <a:latin typeface="Courier"/>
+              </a:rPr>
+              <a:t>~</a:t>
+            </a:r>
+            <a:r>
+              <a:rPr>
+                <a:solidFill>
+                  <a:srgbClr val="003B4F"/>
+                </a:solidFill>
+                <a:latin typeface="Courier"/>
+              </a:rPr>
+              <a:t> </a:t>
+            </a:r>
+            <a:r>
+              <a:rPr>
+                <a:solidFill>
+                  <a:srgbClr val="20794D"/>
+                </a:solidFill>
+                <a:latin typeface="Courier"/>
+              </a:rPr>
+              <a:t>"shoulder"</a:t>
+            </a:r>
+            <a:br/>
+            <a:r>
+              <a:rPr>
+                <a:solidFill>
+                  <a:srgbClr val="003B4F"/>
+                </a:solidFill>
+                <a:latin typeface="Courier"/>
+              </a:rPr>
+              <a:t>    )</a:t>
+            </a:r>
+            <a:br/>
+            <a:r>
+              <a:rPr>
+                <a:solidFill>
+                  <a:srgbClr val="003B4F"/>
+                </a:solidFill>
+                <a:latin typeface="Courier"/>
+              </a:rPr>
+              <a:t>  )</a:t>
+            </a:r>
+            <a:br/>
+            <a:br/>
+            <a:r>
+              <a:rPr>
+                <a:solidFill>
+                  <a:srgbClr val="5E5E5E"/>
+                </a:solidFill>
+                <a:latin typeface="Courier"/>
+              </a:rPr>
+              <a:t># Quick check - did it work? -------------------------------</a:t>
+            </a:r>
+            <a:br/>
+            <a:r>
+              <a:rPr>
+                <a:solidFill>
+                  <a:srgbClr val="003B4F"/>
+                </a:solidFill>
+                <a:latin typeface="Courier"/>
+              </a:rPr>
+              <a:t>dlh_season_df </a:t>
+            </a:r>
+            <a:r>
+              <a:rPr>
+                <a:solidFill>
+                  <a:srgbClr val="5E5E5E"/>
+                </a:solidFill>
+                <a:latin typeface="Courier"/>
+              </a:rPr>
+              <a:t>%&gt;%</a:t>
+            </a:r>
+            <a:br/>
+            <a:r>
+              <a:rPr>
+                <a:solidFill>
+                  <a:srgbClr val="003B4F"/>
+                </a:solidFill>
+                <a:latin typeface="Courier"/>
+              </a:rPr>
+              <a:t>  </a:t>
+            </a:r>
+            <a:r>
+              <a:rPr>
+                <a:solidFill>
+                  <a:srgbClr val="4758AB"/>
+                </a:solidFill>
+                <a:latin typeface="Courier"/>
+              </a:rPr>
+              <a:t>count</a:t>
+            </a:r>
+            <a:r>
+              <a:rPr>
+                <a:solidFill>
+                  <a:srgbClr val="003B4F"/>
+                </a:solidFill>
+                <a:latin typeface="Courier"/>
+              </a:rPr>
+              <a:t>(season)</a:t>
+            </a:r>
+          </a:p>
+          <a:p>
+            <a:pPr lvl="0" indent="0">
+              <a:buNone/>
+            </a:pPr>
+            <a:r>
+              <a:rPr>
+                <a:latin typeface="Courier"/>
+              </a:rPr>
+              <a:t>     season     n
+     &lt;char&gt; &lt;int&gt;
+1: shoulder 12718
+2:   summer  6436
+3:   winter  6287</a:t>
+            </a:r>
+          </a:p>
+        </p:txBody>
+      </p:sp>
+      <p:sp>
+        <p:nvSpPr>
+          <p:cNvPr id="4" name="Content Placeholder 3"/>
+          <p:cNvSpPr>
+            <a:spLocks noGrp="1"/>
+          </p:cNvSpPr>
+          <p:nvPr>
+            <p:ph idx="2" sz="half"/>
+          </p:nvPr>
+        </p:nvSpPr>
+        <p:spPr/>
+        <p:txBody>
+          <a:bodyPr/>
+          <a:lstStyle/>
+          <a:p>
+            <a:pPr lvl="0" indent="0" marL="0">
+              <a:buNone/>
+            </a:pPr>
+            <a:r>
+              <a:rPr b="1"/>
+              <a:t>Reading </a:t>
+            </a:r>
+            <a:r>
+              <a:rPr b="1">
+                <a:latin typeface="Courier"/>
+              </a:rPr>
+              <a:t>case_when()</a:t>
+            </a:r>
+            <a:r>
+              <a:rPr b="1"/>
+              <a:t>:</a:t>
+            </a:r>
+          </a:p>
+          <a:p>
+            <a:pPr lvl="0"/>
+            <a:r>
+              <a:rPr/>
+              <a:t>Each line is read top to bottom: </a:t>
+            </a:r>
+            <a:r>
+              <a:rPr i="1"/>
+              <a:t>condition</a:t>
+            </a:r>
+            <a:r>
+              <a:rPr/>
+              <a:t> </a:t>
+            </a:r>
+            <a:r>
+              <a:rPr>
+                <a:latin typeface="Courier"/>
+              </a:rPr>
+              <a:t>~</a:t>
+            </a:r>
+            <a:r>
+              <a:rPr/>
+              <a:t> </a:t>
+            </a:r>
+            <a:r>
+              <a:rPr i="1"/>
+              <a:t>result</a:t>
+            </a:r>
+          </a:p>
+          <a:p>
+            <a:pPr lvl="0"/>
+            <a:r>
+              <a:rPr>
+                <a:latin typeface="Courier"/>
+              </a:rPr>
+              <a:t>MONTH %in% c(6, 7, 8)</a:t>
+            </a:r>
+            <a:r>
+              <a:rPr/>
+              <a:t> — “is MONTH one of 6, 7, or 8?”</a:t>
+            </a:r>
+          </a:p>
+          <a:p>
+            <a:pPr lvl="0"/>
+            <a:r>
+              <a:rPr>
+                <a:latin typeface="Courier"/>
+              </a:rPr>
+              <a:t>TRUE ~ "shoulder"</a:t>
+            </a:r>
+            <a:r>
+              <a:rPr/>
+              <a:t> — the catch-all for everything not matched above (spring/fall)</a:t>
+            </a:r>
+          </a:p>
+          <a:p>
+            <a:pPr lvl="0" indent="0" marL="0">
+              <a:buNone/>
+            </a:pPr>
+            <a:r>
+              <a:rPr/>
+              <a:t>This is a new, more powerful cousin of the </a:t>
+            </a:r>
+            <a:r>
+              <a:rPr>
+                <a:latin typeface="Courier"/>
+              </a:rPr>
+              <a:t>ifelse()</a:t>
+            </a:r>
+            <a:r>
+              <a:rPr/>
+              <a:t> you’ve used before — </a:t>
+            </a:r>
+            <a:r>
+              <a:rPr>
+                <a:latin typeface="Courier"/>
+              </a:rPr>
+              <a:t>case_when()</a:t>
+            </a:r>
+            <a:r>
+              <a:rPr/>
+              <a:t> handles </a:t>
+            </a:r>
+            <a:r>
+              <a:rPr b="1"/>
+              <a:t>many</a:t>
+            </a:r>
+            <a:r>
+              <a:rPr/>
+              <a:t> conditions cleanly.</a:t>
+            </a:r>
+          </a:p>
+          <a:p>
+            <a:pPr lvl="0" indent="0" marL="0">
+              <a:buNone/>
+            </a:pPr>
+            <a:r>
+              <a:rPr/>
+              <a:t>📖 R4DS Ch. 3.4 — </a:t>
+            </a:r>
+            <a:r>
+              <a:rPr>
+                <a:latin typeface="Courier"/>
+              </a:rPr>
+              <a:t>case_when()</a:t>
+            </a:r>
+            <a:r>
+              <a:rPr/>
+              <a:t> for multi-way </a:t>
+            </a:r>
+            <a:r>
+              <a:rPr>
+                <a:latin typeface="Courier"/>
+              </a:rPr>
+              <a:t>mutate()</a:t>
+            </a:r>
+          </a:p>
+        </p:txBody>
+      </p:sp>
+    </p:spTree>
+  </p:cSld>
+</p:sld>
+</file>
+
+<file path=ppt/slides/slide17.xml><?xml version="1.0" encoding="utf-8"?>
+<p:sld xmlns:a="http://schemas.openxmlformats.org/drawingml/2006/main" xmlns:r="http://schemas.openxmlformats.org/officeDocument/2006/relationships" xmlns:p="http://schemas.openxmlformats.org/presentationml/2006/main">
+  <p:cSld>
+    <p:spTree>
+      <p:nvGrpSpPr>
+        <p:cNvPr id="1" name=""/>
+        <p:cNvGrpSpPr/>
+        <p:nvPr/>
+      </p:nvGrpSpPr>
+      <p:grpSpPr>
+        <a:xfrm>
+          <a:off x="0" y="0"/>
+          <a:ext cx="0" cy="0"/>
+          <a:chOff x="0" y="0"/>
+          <a:chExt cx="0" cy="0"/>
+        </a:xfrm>
+      </p:grpSpPr>
+      <p:sp>
+        <p:nvSpPr>
+          <p:cNvPr id="2" name="Title 1"/>
+          <p:cNvSpPr>
+            <a:spLocks noGrp="1"/>
+          </p:cNvSpPr>
+          <p:nvPr>
+            <p:ph type="title"/>
+          </p:nvPr>
+        </p:nvSpPr>
+        <p:spPr>
+          <a:xfrm>
+            <a:off x="0" y="0"/>
+            <a:ext cx="9144000" cy="602780"/>
+          </a:xfrm>
+          <a:solidFill>
+            <a:srgbClr val="1A1A2E"/>
+          </a:solidFill>
+        </p:spPr>
+        <p:txBody>
+          <a:bodyPr/>
+          <a:lstStyle/>
+          <a:p>
+            <a:pPr lvl="0" indent="0" marL="0">
+              <a:buNone/>
+            </a:pPr>
+            <a:r>
+              <a:rPr/>
+              <a:t>Summarize Each Season by Year</a:t>
+            </a:r>
+          </a:p>
+        </p:txBody>
+      </p:sp>
+      <p:sp>
+        <p:nvSpPr>
+          <p:cNvPr id="3" name="Content Placeholder 2"/>
+          <p:cNvSpPr>
+            <a:spLocks noGrp="1"/>
+          </p:cNvSpPr>
+          <p:nvPr>
+            <p:ph idx="1" sz="half"/>
+          </p:nvPr>
+        </p:nvSpPr>
+        <p:spPr/>
+        <p:txBody>
+          <a:bodyPr/>
+          <a:lstStyle/>
+          <a:p>
+            <a:pPr lvl="0" indent="0">
+              <a:buNone/>
+            </a:pPr>
+            <a:r>
+              <a:rPr>
+                <a:solidFill>
+                  <a:srgbClr val="5E5E5E"/>
+                </a:solidFill>
+                <a:latin typeface="Courier"/>
+              </a:rPr>
+              <a:t># Keep only summer and winter, then summarize by year -----</a:t>
+            </a:r>
+            <a:br/>
+            <a:r>
+              <a:rPr>
+                <a:solidFill>
+                  <a:srgbClr val="003B4F"/>
+                </a:solidFill>
+                <a:latin typeface="Courier"/>
+              </a:rPr>
+              <a:t>season_year_df &lt;- dlh_season_df </a:t>
+            </a:r>
+            <a:r>
+              <a:rPr>
+                <a:solidFill>
+                  <a:srgbClr val="5E5E5E"/>
+                </a:solidFill>
+                <a:latin typeface="Courier"/>
+              </a:rPr>
+              <a:t>%&gt;%</a:t>
+            </a:r>
+            <a:br/>
+            <a:r>
+              <a:rPr>
+                <a:solidFill>
+                  <a:srgbClr val="003B4F"/>
+                </a:solidFill>
+                <a:latin typeface="Courier"/>
+              </a:rPr>
+              <a:t>  </a:t>
+            </a:r>
+            <a:r>
+              <a:rPr>
+                <a:solidFill>
+                  <a:srgbClr val="4758AB"/>
+                </a:solidFill>
+                <a:latin typeface="Courier"/>
+              </a:rPr>
+              <a:t>filter</a:t>
+            </a:r>
+            <a:r>
+              <a:rPr>
+                <a:solidFill>
+                  <a:srgbClr val="003B4F"/>
+                </a:solidFill>
+                <a:latin typeface="Courier"/>
+              </a:rPr>
+              <a:t>(season </a:t>
+            </a:r>
+            <a:r>
+              <a:rPr>
+                <a:solidFill>
+                  <a:srgbClr val="5E5E5E"/>
+                </a:solidFill>
+                <a:latin typeface="Courier"/>
+              </a:rPr>
+              <a:t>%in%</a:t>
+            </a:r>
+            <a:r>
+              <a:rPr>
+                <a:solidFill>
+                  <a:srgbClr val="003B4F"/>
+                </a:solidFill>
+                <a:latin typeface="Courier"/>
+              </a:rPr>
+              <a:t> </a:t>
+            </a:r>
+            <a:r>
+              <a:rPr>
+                <a:solidFill>
+                  <a:srgbClr val="4758AB"/>
+                </a:solidFill>
+                <a:latin typeface="Courier"/>
+              </a:rPr>
+              <a:t>c</a:t>
+            </a:r>
+            <a:r>
+              <a:rPr>
+                <a:solidFill>
+                  <a:srgbClr val="003B4F"/>
+                </a:solidFill>
+                <a:latin typeface="Courier"/>
+              </a:rPr>
+              <a:t>(</a:t>
+            </a:r>
+            <a:r>
+              <a:rPr>
+                <a:solidFill>
+                  <a:srgbClr val="20794D"/>
+                </a:solidFill>
+                <a:latin typeface="Courier"/>
+              </a:rPr>
+              <a:t>"summer"</a:t>
+            </a:r>
+            <a:r>
+              <a:rPr>
+                <a:solidFill>
+                  <a:srgbClr val="003B4F"/>
+                </a:solidFill>
+                <a:latin typeface="Courier"/>
+              </a:rPr>
+              <a:t>, </a:t>
+            </a:r>
+            <a:r>
+              <a:rPr>
+                <a:solidFill>
+                  <a:srgbClr val="20794D"/>
+                </a:solidFill>
+                <a:latin typeface="Courier"/>
+              </a:rPr>
+              <a:t>"winter"</a:t>
+            </a:r>
+            <a:r>
+              <a:rPr>
+                <a:solidFill>
+                  <a:srgbClr val="003B4F"/>
+                </a:solidFill>
+                <a:latin typeface="Courier"/>
+              </a:rPr>
+              <a:t>)) </a:t>
+            </a:r>
+            <a:r>
+              <a:rPr>
+                <a:solidFill>
+                  <a:srgbClr val="5E5E5E"/>
+                </a:solidFill>
+                <a:latin typeface="Courier"/>
+              </a:rPr>
+              <a:t>%&gt;%</a:t>
+            </a:r>
+            <a:br/>
+            <a:r>
+              <a:rPr>
+                <a:solidFill>
+                  <a:srgbClr val="003B4F"/>
+                </a:solidFill>
+                <a:latin typeface="Courier"/>
+              </a:rPr>
+              <a:t>  </a:t>
+            </a:r>
+            <a:r>
+              <a:rPr>
+                <a:solidFill>
+                  <a:srgbClr val="4758AB"/>
+                </a:solidFill>
+                <a:latin typeface="Courier"/>
+              </a:rPr>
+              <a:t>group_by</a:t>
+            </a:r>
+            <a:r>
+              <a:rPr>
+                <a:solidFill>
+                  <a:srgbClr val="003B4F"/>
+                </a:solidFill>
+                <a:latin typeface="Courier"/>
+              </a:rPr>
+              <a:t>(YEAR, season) </a:t>
+            </a:r>
+            <a:r>
+              <a:rPr>
+                <a:solidFill>
+                  <a:srgbClr val="5E5E5E"/>
+                </a:solidFill>
+                <a:latin typeface="Courier"/>
+              </a:rPr>
+              <a:t>%&gt;%</a:t>
+            </a:r>
+            <a:br/>
+            <a:r>
+              <a:rPr>
+                <a:solidFill>
+                  <a:srgbClr val="003B4F"/>
+                </a:solidFill>
+                <a:latin typeface="Courier"/>
+              </a:rPr>
+              <a:t>  </a:t>
+            </a:r>
+            <a:r>
+              <a:rPr>
+                <a:solidFill>
+                  <a:srgbClr val="4758AB"/>
+                </a:solidFill>
+                <a:latin typeface="Courier"/>
+              </a:rPr>
+              <a:t>summarize</a:t>
+            </a:r>
+            <a:r>
+              <a:rPr>
+                <a:solidFill>
+                  <a:srgbClr val="003B4F"/>
+                </a:solidFill>
+                <a:latin typeface="Courier"/>
+              </a:rPr>
+              <a:t>(</a:t>
+            </a:r>
+            <a:br/>
+            <a:r>
+              <a:rPr>
+                <a:solidFill>
+                  <a:srgbClr val="003B4F"/>
+                </a:solidFill>
+                <a:latin typeface="Courier"/>
+              </a:rPr>
+              <a:t>    </a:t>
+            </a:r>
+            <a:r>
+              <a:rPr>
+                <a:solidFill>
+                  <a:srgbClr val="657422"/>
+                </a:solidFill>
+                <a:latin typeface="Courier"/>
+              </a:rPr>
+              <a:t>TEMP =</a:t>
+            </a:r>
+            <a:r>
+              <a:rPr>
+                <a:solidFill>
+                  <a:srgbClr val="003B4F"/>
+                </a:solidFill>
+                <a:latin typeface="Courier"/>
+              </a:rPr>
+              <a:t> </a:t>
+            </a:r>
+            <a:r>
+              <a:rPr>
+                <a:solidFill>
+                  <a:srgbClr val="4758AB"/>
+                </a:solidFill>
+                <a:latin typeface="Courier"/>
+              </a:rPr>
+              <a:t>mean</a:t>
+            </a:r>
+            <a:r>
+              <a:rPr>
+                <a:solidFill>
+                  <a:srgbClr val="003B4F"/>
+                </a:solidFill>
+                <a:latin typeface="Courier"/>
+              </a:rPr>
+              <a:t>(TEMP, </a:t>
+            </a:r>
+            <a:r>
+              <a:rPr>
+                <a:solidFill>
+                  <a:srgbClr val="657422"/>
+                </a:solidFill>
+                <a:latin typeface="Courier"/>
+              </a:rPr>
+              <a:t>na.rm =</a:t>
+            </a:r>
+            <a:r>
+              <a:rPr>
+                <a:solidFill>
+                  <a:srgbClr val="003B4F"/>
+                </a:solidFill>
+                <a:latin typeface="Courier"/>
+              </a:rPr>
+              <a:t> </a:t>
+            </a:r>
+            <a:r>
+              <a:rPr>
+                <a:solidFill>
+                  <a:srgbClr val="8F5902"/>
+                </a:solidFill>
+                <a:latin typeface="Courier"/>
+              </a:rPr>
+              <a:t>TRUE</a:t>
+            </a:r>
+            <a:r>
+              <a:rPr>
+                <a:solidFill>
+                  <a:srgbClr val="003B4F"/>
+                </a:solidFill>
+                <a:latin typeface="Courier"/>
+              </a:rPr>
+              <a:t>)</a:t>
+            </a:r>
+            <a:br/>
+            <a:r>
+              <a:rPr>
+                <a:solidFill>
+                  <a:srgbClr val="003B4F"/>
+                </a:solidFill>
+                <a:latin typeface="Courier"/>
+              </a:rPr>
+              <a:t>  )</a:t>
+            </a:r>
+            <a:br/>
+            <a:br/>
+            <a:r>
+              <a:rPr>
+                <a:solidFill>
+                  <a:srgbClr val="4758AB"/>
+                </a:solidFill>
+                <a:latin typeface="Courier"/>
+              </a:rPr>
+              <a:t>head</a:t>
+            </a:r>
+            <a:r>
+              <a:rPr>
+                <a:solidFill>
+                  <a:srgbClr val="003B4F"/>
+                </a:solidFill>
+                <a:latin typeface="Courier"/>
+              </a:rPr>
+              <a:t>(season_year_df)</a:t>
+            </a:r>
+          </a:p>
+          <a:p>
+            <a:pPr lvl="0" indent="0">
+              <a:buNone/>
+            </a:pPr>
+            <a:r>
+              <a:rPr>
+                <a:latin typeface="Courier"/>
+              </a:rPr>
+              <a:t># A tibble: 6 × 3
+# Groups:   YEAR [3]
+   YEAR season  TEMP
+  &lt;int&gt; &lt;chr&gt;  &lt;dbl&gt;
+1  1948 summer  17.4
+2  1948 winter -12.6
+3  1949 summer  18.4
+4  1949 winter -11.4
+5  1950 summer  15.3
+6  1950 winter -13.6</a:t>
+            </a:r>
+          </a:p>
+        </p:txBody>
+      </p:sp>
+      <p:sp>
+        <p:nvSpPr>
+          <p:cNvPr id="4" name="Content Placeholder 3"/>
+          <p:cNvSpPr>
+            <a:spLocks noGrp="1"/>
+          </p:cNvSpPr>
+          <p:nvPr>
+            <p:ph idx="2" sz="half"/>
+          </p:nvPr>
+        </p:nvSpPr>
+        <p:spPr/>
+        <p:txBody>
+          <a:bodyPr/>
+          <a:lstStyle/>
+          <a:p>
+            <a:pPr lvl="0" indent="0" marL="0">
+              <a:buNone/>
+            </a:pPr>
+            <a:r>
+              <a:rPr b="1"/>
+              <a:t>What changed:</a:t>
+            </a:r>
+          </a:p>
+          <a:p>
+            <a:pPr lvl="0"/>
+            <a:r>
+              <a:rPr>
+                <a:latin typeface="Courier"/>
+              </a:rPr>
+              <a:t>filter()</a:t>
+            </a:r>
+            <a:r>
+              <a:rPr/>
+              <a:t> drops shoulder-season days — we only want the two extremes</a:t>
+            </a:r>
+          </a:p>
+          <a:p>
+            <a:pPr lvl="0"/>
+            <a:r>
+              <a:rPr>
+                <a:latin typeface="Courier"/>
+              </a:rPr>
+              <a:t>group_by(YEAR, season)</a:t>
+            </a:r>
+            <a:r>
+              <a:rPr/>
+              <a:t> — grouping by </a:t>
+            </a:r>
+            <a:r>
+              <a:rPr b="1"/>
+              <a:t>two</a:t>
+            </a:r>
+            <a:r>
+              <a:rPr/>
+              <a:t> variables gives us one mean temperature per year </a:t>
+            </a:r>
+            <a:r>
+              <a:rPr b="1"/>
+              <a:t>per season</a:t>
+            </a:r>
+          </a:p>
+          <a:p>
+            <a:pPr lvl="0" indent="0" marL="0">
+              <a:buNone/>
+            </a:pPr>
+            <a:r>
+              <a:rPr/>
+              <a:t>This produces a tidy long-format data frame — perfect for both plotting and modeling.</a:t>
+            </a:r>
+          </a:p>
+        </p:txBody>
+      </p:sp>
+    </p:spTree>
+  </p:cSld>
+</p:sld>
+</file>
+
+<file path=ppt/slides/slide18.xml><?xml version="1.0" encoding="utf-8"?>
+<p:sld xmlns:a="http://schemas.openxmlformats.org/drawingml/2006/main" xmlns:r="http://schemas.openxmlformats.org/officeDocument/2006/relationships" xmlns:p="http://schemas.openxmlformats.org/presentationml/2006/main">
+  <p:cSld>
+    <p:spTree>
+      <p:nvGrpSpPr>
+        <p:cNvPr id="1" name=""/>
+        <p:cNvGrpSpPr/>
+        <p:nvPr/>
+      </p:nvGrpSpPr>
+      <p:grpSpPr>
+        <a:xfrm>
+          <a:off x="0" y="0"/>
+          <a:ext cx="0" cy="0"/>
+          <a:chOff x="0" y="0"/>
+          <a:chExt cx="0" cy="0"/>
+        </a:xfrm>
+      </p:grpSpPr>
+      <p:sp>
+        <p:nvSpPr>
+          <p:cNvPr id="2" name="Title 1"/>
+          <p:cNvSpPr>
+            <a:spLocks noGrp="1"/>
+          </p:cNvSpPr>
+          <p:nvPr>
+            <p:ph type="title"/>
+          </p:nvPr>
+        </p:nvSpPr>
+        <p:spPr>
+          <a:xfrm>
+            <a:off x="139485" y="78119"/>
+            <a:ext cx="8229600" cy="607682"/>
+          </a:xfrm>
+        </p:spPr>
+        <p:txBody>
+          <a:bodyPr/>
+          <a:lstStyle/>
+          <a:p>
+            <a:pPr lvl="0" indent="0" marL="0">
+              <a:buNone/>
+            </a:pPr>
+            <a:r>
+              <a:rPr/>
+              <a:t>Plot Both Seasons Together</a:t>
+            </a:r>
+          </a:p>
+        </p:txBody>
+      </p:sp>
+      <p:sp>
+        <p:nvSpPr>
+          <p:cNvPr id="3" name="Text Placeholder 2"/>
+          <p:cNvSpPr>
+            <a:spLocks noGrp="1"/>
+          </p:cNvSpPr>
+          <p:nvPr>
+            <p:ph idx="1" type="body"/>
+          </p:nvPr>
+        </p:nvSpPr>
+        <p:spPr/>
+        <p:txBody>
+          <a:bodyPr/>
+          <a:lstStyle/>
+          <a:p>
+            <a:pPr lvl="0" indent="0">
+              <a:buNone/>
+            </a:pPr>
+            <a:r>
+              <a:rPr>
+                <a:solidFill>
+                  <a:srgbClr val="5E5E5E"/>
+                </a:solidFill>
+                <a:latin typeface="Courier"/>
+              </a:rPr>
+              <a:t># Plot both seasons with separate trend lines --------------</a:t>
+            </a:r>
+            <a:br/>
+            <a:r>
+              <a:rPr>
+                <a:solidFill>
+                  <a:srgbClr val="003B4F"/>
+                </a:solidFill>
+                <a:latin typeface="Courier"/>
+              </a:rPr>
+              <a:t>season_temp_plot &lt;- season_year_df </a:t>
+            </a:r>
+            <a:r>
+              <a:rPr>
+                <a:solidFill>
+                  <a:srgbClr val="5E5E5E"/>
+                </a:solidFill>
+                <a:latin typeface="Courier"/>
+              </a:rPr>
+              <a:t>%&gt;%</a:t>
+            </a:r>
+            <a:br/>
+            <a:r>
+              <a:rPr>
+                <a:solidFill>
+                  <a:srgbClr val="003B4F"/>
+                </a:solidFill>
+                <a:latin typeface="Courier"/>
+              </a:rPr>
+              <a:t>  </a:t>
+            </a:r>
+            <a:r>
+              <a:rPr>
+                <a:solidFill>
+                  <a:srgbClr val="4758AB"/>
+                </a:solidFill>
+                <a:latin typeface="Courier"/>
+              </a:rPr>
+              <a:t>ggplot</a:t>
+            </a:r>
+            <a:r>
+              <a:rPr>
+                <a:solidFill>
+                  <a:srgbClr val="003B4F"/>
+                </a:solidFill>
+                <a:latin typeface="Courier"/>
+              </a:rPr>
+              <a:t>(</a:t>
+            </a:r>
+            <a:r>
+              <a:rPr>
+                <a:solidFill>
+                  <a:srgbClr val="4758AB"/>
+                </a:solidFill>
+                <a:latin typeface="Courier"/>
+              </a:rPr>
+              <a:t>aes</a:t>
+            </a:r>
+            <a:r>
+              <a:rPr>
+                <a:solidFill>
+                  <a:srgbClr val="003B4F"/>
+                </a:solidFill>
+                <a:latin typeface="Courier"/>
+              </a:rPr>
+              <a:t>(</a:t>
+            </a:r>
+            <a:r>
+              <a:rPr>
+                <a:solidFill>
+                  <a:srgbClr val="657422"/>
+                </a:solidFill>
+                <a:latin typeface="Courier"/>
+              </a:rPr>
+              <a:t>x =</a:t>
+            </a:r>
+            <a:r>
+              <a:rPr>
+                <a:solidFill>
+                  <a:srgbClr val="003B4F"/>
+                </a:solidFill>
+                <a:latin typeface="Courier"/>
+              </a:rPr>
+              <a:t> YEAR, </a:t>
+            </a:r>
+            <a:r>
+              <a:rPr>
+                <a:solidFill>
+                  <a:srgbClr val="657422"/>
+                </a:solidFill>
+                <a:latin typeface="Courier"/>
+              </a:rPr>
+              <a:t>y =</a:t>
+            </a:r>
+            <a:r>
+              <a:rPr>
+                <a:solidFill>
+                  <a:srgbClr val="003B4F"/>
+                </a:solidFill>
+                <a:latin typeface="Courier"/>
+              </a:rPr>
+              <a:t> TEMP, </a:t>
+            </a:r>
+            <a:r>
+              <a:rPr>
+                <a:solidFill>
+                  <a:srgbClr val="657422"/>
+                </a:solidFill>
+                <a:latin typeface="Courier"/>
+              </a:rPr>
+              <a:t>color =</a:t>
+            </a:r>
+            <a:r>
+              <a:rPr>
+                <a:solidFill>
+                  <a:srgbClr val="003B4F"/>
+                </a:solidFill>
+                <a:latin typeface="Courier"/>
+              </a:rPr>
+              <a:t> season)) </a:t>
+            </a:r>
+            <a:r>
+              <a:rPr>
+                <a:solidFill>
+                  <a:srgbClr val="5E5E5E"/>
+                </a:solidFill>
+                <a:latin typeface="Courier"/>
+              </a:rPr>
+              <a:t>+</a:t>
+            </a:r>
+            <a:br/>
+            <a:r>
+              <a:rPr>
+                <a:solidFill>
+                  <a:srgbClr val="003B4F"/>
+                </a:solidFill>
+                <a:latin typeface="Courier"/>
+              </a:rPr>
+              <a:t>  </a:t>
+            </a:r>
+            <a:r>
+              <a:rPr>
+                <a:solidFill>
+                  <a:srgbClr val="4758AB"/>
+                </a:solidFill>
+                <a:latin typeface="Courier"/>
+              </a:rPr>
+              <a:t>geom_point</a:t>
+            </a:r>
+            <a:r>
+              <a:rPr>
+                <a:solidFill>
+                  <a:srgbClr val="003B4F"/>
+                </a:solidFill>
+                <a:latin typeface="Courier"/>
+              </a:rPr>
+              <a:t>(</a:t>
+            </a:r>
+            <a:r>
+              <a:rPr>
+                <a:solidFill>
+                  <a:srgbClr val="657422"/>
+                </a:solidFill>
+                <a:latin typeface="Courier"/>
+              </a:rPr>
+              <a:t>size =</a:t>
+            </a:r>
+            <a:r>
+              <a:rPr>
+                <a:solidFill>
+                  <a:srgbClr val="003B4F"/>
+                </a:solidFill>
+                <a:latin typeface="Courier"/>
+              </a:rPr>
+              <a:t> </a:t>
+            </a:r>
+            <a:r>
+              <a:rPr>
+                <a:solidFill>
+                  <a:srgbClr val="AD0000"/>
+                </a:solidFill>
+                <a:latin typeface="Courier"/>
+              </a:rPr>
+              <a:t>1.8</a:t>
+            </a:r>
+            <a:r>
+              <a:rPr>
+                <a:solidFill>
+                  <a:srgbClr val="003B4F"/>
+                </a:solidFill>
+                <a:latin typeface="Courier"/>
+              </a:rPr>
+              <a:t>, </a:t>
+            </a:r>
+            <a:r>
+              <a:rPr>
+                <a:solidFill>
+                  <a:srgbClr val="657422"/>
+                </a:solidFill>
+                <a:latin typeface="Courier"/>
+              </a:rPr>
+              <a:t>alpha =</a:t>
+            </a:r>
+            <a:r>
+              <a:rPr>
+                <a:solidFill>
+                  <a:srgbClr val="003B4F"/>
+                </a:solidFill>
+                <a:latin typeface="Courier"/>
+              </a:rPr>
+              <a:t> </a:t>
+            </a:r>
+            <a:r>
+              <a:rPr>
+                <a:solidFill>
+                  <a:srgbClr val="AD0000"/>
+                </a:solidFill>
+                <a:latin typeface="Courier"/>
+              </a:rPr>
+              <a:t>0.7</a:t>
+            </a:r>
+            <a:r>
+              <a:rPr>
+                <a:solidFill>
+                  <a:srgbClr val="003B4F"/>
+                </a:solidFill>
+                <a:latin typeface="Courier"/>
+              </a:rPr>
+              <a:t>) </a:t>
+            </a:r>
+            <a:r>
+              <a:rPr>
+                <a:solidFill>
+                  <a:srgbClr val="5E5E5E"/>
+                </a:solidFill>
+                <a:latin typeface="Courier"/>
+              </a:rPr>
+              <a:t>+</a:t>
+            </a:r>
+            <a:br/>
+            <a:r>
+              <a:rPr>
+                <a:solidFill>
+                  <a:srgbClr val="003B4F"/>
+                </a:solidFill>
+                <a:latin typeface="Courier"/>
+              </a:rPr>
+              <a:t>  </a:t>
+            </a:r>
+            <a:r>
+              <a:rPr>
+                <a:solidFill>
+                  <a:srgbClr val="4758AB"/>
+                </a:solidFill>
+                <a:latin typeface="Courier"/>
+              </a:rPr>
+              <a:t>geom_smooth</a:t>
+            </a:r>
+            <a:r>
+              <a:rPr>
+                <a:solidFill>
+                  <a:srgbClr val="003B4F"/>
+                </a:solidFill>
+                <a:latin typeface="Courier"/>
+              </a:rPr>
+              <a:t>(</a:t>
+            </a:r>
+            <a:r>
+              <a:rPr>
+                <a:solidFill>
+                  <a:srgbClr val="657422"/>
+                </a:solidFill>
+                <a:latin typeface="Courier"/>
+              </a:rPr>
+              <a:t>method =</a:t>
+            </a:r>
+            <a:r>
+              <a:rPr>
+                <a:solidFill>
+                  <a:srgbClr val="003B4F"/>
+                </a:solidFill>
+                <a:latin typeface="Courier"/>
+              </a:rPr>
+              <a:t> </a:t>
+            </a:r>
+            <a:r>
+              <a:rPr>
+                <a:solidFill>
+                  <a:srgbClr val="20794D"/>
+                </a:solidFill>
+                <a:latin typeface="Courier"/>
+              </a:rPr>
+              <a:t>"lm"</a:t>
+            </a:r>
+            <a:r>
+              <a:rPr>
+                <a:solidFill>
+                  <a:srgbClr val="003B4F"/>
+                </a:solidFill>
+                <a:latin typeface="Courier"/>
+              </a:rPr>
+              <a:t>, </a:t>
+            </a:r>
+            <a:r>
+              <a:rPr>
+                <a:solidFill>
+                  <a:srgbClr val="657422"/>
+                </a:solidFill>
+                <a:latin typeface="Courier"/>
+              </a:rPr>
+              <a:t>se =</a:t>
+            </a:r>
+            <a:r>
+              <a:rPr>
+                <a:solidFill>
+                  <a:srgbClr val="003B4F"/>
+                </a:solidFill>
+                <a:latin typeface="Courier"/>
+              </a:rPr>
+              <a:t> </a:t>
+            </a:r>
+            <a:r>
+              <a:rPr>
+                <a:solidFill>
+                  <a:srgbClr val="8F5902"/>
+                </a:solidFill>
+                <a:latin typeface="Courier"/>
+              </a:rPr>
+              <a:t>TRUE</a:t>
+            </a:r>
+            <a:r>
+              <a:rPr>
+                <a:solidFill>
+                  <a:srgbClr val="003B4F"/>
+                </a:solidFill>
+                <a:latin typeface="Courier"/>
+              </a:rPr>
+              <a:t>) </a:t>
+            </a:r>
+            <a:r>
+              <a:rPr>
+                <a:solidFill>
+                  <a:srgbClr val="5E5E5E"/>
+                </a:solidFill>
+                <a:latin typeface="Courier"/>
+              </a:rPr>
+              <a:t>+</a:t>
+            </a:r>
+            <a:br/>
+            <a:r>
+              <a:rPr>
+                <a:solidFill>
+                  <a:srgbClr val="003B4F"/>
+                </a:solidFill>
+                <a:latin typeface="Courier"/>
+              </a:rPr>
+              <a:t>  </a:t>
+            </a:r>
+            <a:r>
+              <a:rPr>
+                <a:solidFill>
+                  <a:srgbClr val="4758AB"/>
+                </a:solidFill>
+                <a:latin typeface="Courier"/>
+              </a:rPr>
+              <a:t>scale_color_manual</a:t>
+            </a:r>
+            <a:r>
+              <a:rPr>
+                <a:solidFill>
+                  <a:srgbClr val="003B4F"/>
+                </a:solidFill>
+                <a:latin typeface="Courier"/>
+              </a:rPr>
+              <a:t>(</a:t>
+            </a:r>
+            <a:r>
+              <a:rPr>
+                <a:solidFill>
+                  <a:srgbClr val="657422"/>
+                </a:solidFill>
+                <a:latin typeface="Courier"/>
+              </a:rPr>
+              <a:t>values =</a:t>
+            </a:r>
+            <a:r>
+              <a:rPr>
+                <a:solidFill>
+                  <a:srgbClr val="003B4F"/>
+                </a:solidFill>
+                <a:latin typeface="Courier"/>
+              </a:rPr>
+              <a:t> </a:t>
+            </a:r>
+            <a:r>
+              <a:rPr>
+                <a:solidFill>
+                  <a:srgbClr val="4758AB"/>
+                </a:solidFill>
+                <a:latin typeface="Courier"/>
+              </a:rPr>
+              <a:t>c</a:t>
+            </a:r>
+            <a:r>
+              <a:rPr>
+                <a:solidFill>
+                  <a:srgbClr val="003B4F"/>
+                </a:solidFill>
+                <a:latin typeface="Courier"/>
+              </a:rPr>
+              <a:t>(</a:t>
+            </a:r>
+            <a:br/>
+            <a:r>
+              <a:rPr>
+                <a:solidFill>
+                  <a:srgbClr val="003B4F"/>
+                </a:solidFill>
+                <a:latin typeface="Courier"/>
+              </a:rPr>
+              <a:t>    </a:t>
+            </a:r>
+            <a:r>
+              <a:rPr>
+                <a:solidFill>
+                  <a:srgbClr val="20794D"/>
+                </a:solidFill>
+                <a:latin typeface="Courier"/>
+              </a:rPr>
+              <a:t>"summer"</a:t>
+            </a:r>
+            <a:r>
+              <a:rPr>
+                <a:solidFill>
+                  <a:srgbClr val="003B4F"/>
+                </a:solidFill>
+                <a:latin typeface="Courier"/>
+              </a:rPr>
+              <a:t> = </a:t>
+            </a:r>
+            <a:r>
+              <a:rPr>
+                <a:solidFill>
+                  <a:srgbClr val="20794D"/>
+                </a:solidFill>
+                <a:latin typeface="Courier"/>
+              </a:rPr>
+              <a:t>"firebrick"</a:t>
+            </a:r>
+            <a:r>
+              <a:rPr>
+                <a:solidFill>
+                  <a:srgbClr val="003B4F"/>
+                </a:solidFill>
+                <a:latin typeface="Courier"/>
+              </a:rPr>
+              <a:t>,</a:t>
+            </a:r>
+            <a:br/>
+            <a:r>
+              <a:rPr>
+                <a:solidFill>
+                  <a:srgbClr val="003B4F"/>
+                </a:solidFill>
+                <a:latin typeface="Courier"/>
+              </a:rPr>
+              <a:t>    </a:t>
+            </a:r>
+            <a:r>
+              <a:rPr>
+                <a:solidFill>
+                  <a:srgbClr val="20794D"/>
+                </a:solidFill>
+                <a:latin typeface="Courier"/>
+              </a:rPr>
+              <a:t>"winter"</a:t>
+            </a:r>
+            <a:r>
+              <a:rPr>
+                <a:solidFill>
+                  <a:srgbClr val="003B4F"/>
+                </a:solidFill>
+                <a:latin typeface="Courier"/>
+              </a:rPr>
+              <a:t> = </a:t>
+            </a:r>
+            <a:r>
+              <a:rPr>
+                <a:solidFill>
+                  <a:srgbClr val="20794D"/>
+                </a:solidFill>
+                <a:latin typeface="Courier"/>
+              </a:rPr>
+              <a:t>"steelblue"</a:t>
+            </a:r>
+            <a:br/>
+            <a:r>
+              <a:rPr>
+                <a:solidFill>
+                  <a:srgbClr val="003B4F"/>
+                </a:solidFill>
+                <a:latin typeface="Courier"/>
+              </a:rPr>
+              <a:t>  )) </a:t>
+            </a:r>
+            <a:r>
+              <a:rPr>
+                <a:solidFill>
+                  <a:srgbClr val="5E5E5E"/>
+                </a:solidFill>
+                <a:latin typeface="Courier"/>
+              </a:rPr>
+              <a:t>+</a:t>
+            </a:r>
+            <a:br/>
+            <a:r>
+              <a:rPr>
+                <a:solidFill>
+                  <a:srgbClr val="003B4F"/>
+                </a:solidFill>
+                <a:latin typeface="Courier"/>
+              </a:rPr>
+              <a:t>  </a:t>
+            </a:r>
+            <a:r>
+              <a:rPr>
+                <a:solidFill>
+                  <a:srgbClr val="4758AB"/>
+                </a:solidFill>
+                <a:latin typeface="Courier"/>
+              </a:rPr>
+              <a:t>labs</a:t>
+            </a:r>
+            <a:r>
+              <a:rPr>
+                <a:solidFill>
+                  <a:srgbClr val="003B4F"/>
+                </a:solidFill>
+                <a:latin typeface="Courier"/>
+              </a:rPr>
+              <a:t>(</a:t>
+            </a:r>
+            <a:br/>
+            <a:r>
+              <a:rPr>
+                <a:solidFill>
+                  <a:srgbClr val="003B4F"/>
+                </a:solidFill>
+                <a:latin typeface="Courier"/>
+              </a:rPr>
+              <a:t>    </a:t>
+            </a:r>
+            <a:r>
+              <a:rPr>
+                <a:solidFill>
+                  <a:srgbClr val="657422"/>
+                </a:solidFill>
+                <a:latin typeface="Courier"/>
+              </a:rPr>
+              <a:t>title =</a:t>
+            </a:r>
+            <a:r>
+              <a:rPr>
+                <a:solidFill>
+                  <a:srgbClr val="003B4F"/>
+                </a:solidFill>
+                <a:latin typeface="Courier"/>
+              </a:rPr>
+              <a:t> </a:t>
+            </a:r>
+            <a:r>
+              <a:rPr>
+                <a:solidFill>
+                  <a:srgbClr val="20794D"/>
+                </a:solidFill>
+                <a:latin typeface="Courier"/>
+              </a:rPr>
+              <a:t>"Duluth Summer vs. Winter Temperature Trends"</a:t>
+            </a:r>
+            <a:r>
+              <a:rPr>
+                <a:solidFill>
+                  <a:srgbClr val="003B4F"/>
+                </a:solidFill>
+                <a:latin typeface="Courier"/>
+              </a:rPr>
+              <a:t>,</a:t>
+            </a:r>
+            <a:br/>
+            <a:r>
+              <a:rPr>
+                <a:solidFill>
+                  <a:srgbClr val="003B4F"/>
+                </a:solidFill>
+                <a:latin typeface="Courier"/>
+              </a:rPr>
+              <a:t>    </a:t>
+            </a:r>
+            <a:r>
+              <a:rPr>
+                <a:solidFill>
+                  <a:srgbClr val="657422"/>
+                </a:solidFill>
+                <a:latin typeface="Courier"/>
+              </a:rPr>
+              <a:t>x     =</a:t>
+            </a:r>
+            <a:r>
+              <a:rPr>
+                <a:solidFill>
+                  <a:srgbClr val="003B4F"/>
+                </a:solidFill>
+                <a:latin typeface="Courier"/>
+              </a:rPr>
+              <a:t> </a:t>
+            </a:r>
+            <a:r>
+              <a:rPr>
+                <a:solidFill>
+                  <a:srgbClr val="20794D"/>
+                </a:solidFill>
+                <a:latin typeface="Courier"/>
+              </a:rPr>
+              <a:t>"Year"</a:t>
+            </a:r>
+            <a:r>
+              <a:rPr>
+                <a:solidFill>
+                  <a:srgbClr val="003B4F"/>
+                </a:solidFill>
+                <a:latin typeface="Courier"/>
+              </a:rPr>
+              <a:t>, </a:t>
+            </a:r>
+            <a:r>
+              <a:rPr>
+                <a:solidFill>
+                  <a:srgbClr val="657422"/>
+                </a:solidFill>
+                <a:latin typeface="Courier"/>
+              </a:rPr>
+              <a:t>y =</a:t>
+            </a:r>
+            <a:r>
+              <a:rPr>
+                <a:solidFill>
+                  <a:srgbClr val="003B4F"/>
+                </a:solidFill>
+                <a:latin typeface="Courier"/>
+              </a:rPr>
+              <a:t> </a:t>
+            </a:r>
+            <a:r>
+              <a:rPr>
+                <a:solidFill>
+                  <a:srgbClr val="20794D"/>
+                </a:solidFill>
+                <a:latin typeface="Courier"/>
+              </a:rPr>
+              <a:t>"Mean Temp (°C)"</a:t>
+            </a:r>
+            <a:r>
+              <a:rPr>
+                <a:solidFill>
+                  <a:srgbClr val="003B4F"/>
+                </a:solidFill>
+                <a:latin typeface="Courier"/>
+              </a:rPr>
+              <a:t>,</a:t>
+            </a:r>
+            <a:br/>
+            <a:r>
+              <a:rPr>
+                <a:solidFill>
+                  <a:srgbClr val="003B4F"/>
+                </a:solidFill>
+                <a:latin typeface="Courier"/>
+              </a:rPr>
+              <a:t>    </a:t>
+            </a:r>
+            <a:r>
+              <a:rPr>
+                <a:solidFill>
+                  <a:srgbClr val="657422"/>
+                </a:solidFill>
+                <a:latin typeface="Courier"/>
+              </a:rPr>
+              <a:t>color =</a:t>
+            </a:r>
+            <a:r>
+              <a:rPr>
+                <a:solidFill>
+                  <a:srgbClr val="003B4F"/>
+                </a:solidFill>
+                <a:latin typeface="Courier"/>
+              </a:rPr>
+              <a:t> </a:t>
+            </a:r>
+            <a:r>
+              <a:rPr>
+                <a:solidFill>
+                  <a:srgbClr val="20794D"/>
+                </a:solidFill>
+                <a:latin typeface="Courier"/>
+              </a:rPr>
+              <a:t>"Season"</a:t>
+            </a:r>
+            <a:br/>
+            <a:r>
+              <a:rPr>
+                <a:solidFill>
+                  <a:srgbClr val="003B4F"/>
+                </a:solidFill>
+                <a:latin typeface="Courier"/>
+              </a:rPr>
+              <a:t>  ) </a:t>
+            </a:r>
+            <a:r>
+              <a:rPr>
+                <a:solidFill>
+                  <a:srgbClr val="5E5E5E"/>
+                </a:solidFill>
+                <a:latin typeface="Courier"/>
+              </a:rPr>
+              <a:t>+</a:t>
+            </a:r>
+            <a:br/>
+            <a:r>
+              <a:rPr>
+                <a:solidFill>
+                  <a:srgbClr val="003B4F"/>
+                </a:solidFill>
+                <a:latin typeface="Courier"/>
+              </a:rPr>
+              <a:t>  </a:t>
+            </a:r>
+            <a:r>
+              <a:rPr>
+                <a:solidFill>
+                  <a:srgbClr val="4758AB"/>
+                </a:solidFill>
+                <a:latin typeface="Courier"/>
+              </a:rPr>
+              <a:t>theme_minimal</a:t>
+            </a:r>
+            <a:r>
+              <a:rPr>
+                <a:solidFill>
+                  <a:srgbClr val="003B4F"/>
+                </a:solidFill>
+                <a:latin typeface="Courier"/>
+              </a:rPr>
+              <a:t>()</a:t>
+            </a:r>
+            <a:br/>
+            <a:br/>
+            <a:r>
+              <a:rPr>
+                <a:solidFill>
+                  <a:srgbClr val="003B4F"/>
+                </a:solidFill>
+                <a:latin typeface="Courier"/>
+              </a:rPr>
+              <a:t>season_temp_plot</a:t>
+            </a:r>
+          </a:p>
+        </p:txBody>
+      </p:sp>
+      <p:pic>
+        <p:nvPicPr>
+          <p:cNvPr descr="06_lecture_powerpoint_files/figure-pptx/season-plot-06-1.png" id="0" name="Picture 1"/>
+          <p:cNvPicPr>
+            <a:picLocks noGrp="1" noChangeAspect="1"/>
+          </p:cNvPicPr>
+          <p:nvPr/>
+        </p:nvPicPr>
+        <p:blipFill>
+          <a:blip r:embed="rId2"/>
+          <a:stretch>
+            <a:fillRect/>
+          </a:stretch>
+        </p:blipFill>
+        <p:spPr bwMode="auto">
+          <a:xfrm>
+            <a:off x="127000" y="1562100"/>
+            <a:ext cx="4432300" cy="2730500"/>
+          </a:xfrm>
+          <a:prstGeom prst="rect">
+            <a:avLst/>
+          </a:prstGeom>
+          <a:noFill/>
+          <a:ln w="9525">
+            <a:noFill/>
+            <a:headEnd/>
+            <a:tailEnd/>
+          </a:ln>
+        </p:spPr>
+      </p:pic>
+      <p:sp>
+        <p:nvSpPr>
+          <p:cNvPr id="5" name="Text Placeholder 4"/>
+          <p:cNvSpPr>
+            <a:spLocks noGrp="1"/>
+          </p:cNvSpPr>
+          <p:nvPr>
+            <p:ph idx="3" sz="quarter" type="body"/>
+          </p:nvPr>
+        </p:nvSpPr>
+        <p:spPr/>
+        <p:txBody>
+          <a:bodyPr/>
+          <a:lstStyle/>
+          <a:p>
+            <a:pPr lvl="0" indent="0" marL="0">
+              <a:buNone/>
+            </a:pPr>
+            <a:r>
+              <a:rPr b="1"/>
+              <a:t>What to look for:</a:t>
+            </a:r>
+          </a:p>
+          <a:p>
+            <a:pPr lvl="0"/>
+            <a:r>
+              <a:rPr/>
+              <a:t>Two clearly separated bands — winter is much colder than summer, as expected</a:t>
+            </a:r>
+          </a:p>
+          <a:p>
+            <a:pPr lvl="0"/>
+            <a:r>
+              <a:rPr/>
+              <a:t>Compare the </a:t>
+            </a:r>
+            <a:r>
+              <a:rPr b="1"/>
+              <a:t>steepness</a:t>
+            </a:r>
+            <a:r>
+              <a:rPr/>
+              <a:t> of each trend line, not just the starting height</a:t>
+            </a:r>
+          </a:p>
+          <a:p>
+            <a:pPr lvl="0"/>
+            <a:r>
+              <a:rPr/>
+              <a:t>A steeper slope means a faster rate of warming for that season</a:t>
+            </a:r>
+          </a:p>
+        </p:txBody>
+      </p:sp>
+    </p:spTree>
+  </p:cSld>
+</p:sld>
+</file>
+
+<file path=ppt/slides/slide19.xml><?xml version="1.0" encoding="utf-8"?>
+<p:sld xmlns:a="http://schemas.openxmlformats.org/drawingml/2006/main" xmlns:r="http://schemas.openxmlformats.org/officeDocument/2006/relationships" xmlns:p="http://schemas.openxmlformats.org/presentationml/2006/main">
+  <p:cSld>
+    <p:spTree>
+      <p:nvGrpSpPr>
+        <p:cNvPr id="1" name=""/>
+        <p:cNvGrpSpPr/>
+        <p:nvPr/>
+      </p:nvGrpSpPr>
+      <p:grpSpPr>
+        <a:xfrm>
+          <a:off x="0" y="0"/>
+          <a:ext cx="0" cy="0"/>
+          <a:chOff x="0" y="0"/>
+          <a:chExt cx="0" cy="0"/>
+        </a:xfrm>
+      </p:grpSpPr>
+      <p:sp>
+        <p:nvSpPr>
+          <p:cNvPr id="2" name="Title 1"/>
+          <p:cNvSpPr>
+            <a:spLocks noGrp="1"/>
+          </p:cNvSpPr>
+          <p:nvPr>
+            <p:ph type="title"/>
+          </p:nvPr>
+        </p:nvSpPr>
+        <p:spPr>
+          <a:xfrm>
+            <a:off x="0" y="0"/>
+            <a:ext cx="9144000" cy="602780"/>
+          </a:xfrm>
+          <a:solidFill>
+            <a:srgbClr val="1A1A2E"/>
+          </a:solidFill>
+        </p:spPr>
+        <p:txBody>
+          <a:bodyPr/>
+          <a:lstStyle/>
+          <a:p>
+            <a:pPr lvl="0" indent="0" marL="0">
+              <a:buNone/>
+            </a:pPr>
+            <a:r>
+              <a:rPr/>
+              <a:t>Fit a Separate Model for Each Season</a:t>
+            </a:r>
+          </a:p>
+        </p:txBody>
+      </p:sp>
+      <p:sp>
+        <p:nvSpPr>
+          <p:cNvPr id="3" name="Content Placeholder 2"/>
+          <p:cNvSpPr>
+            <a:spLocks noGrp="1"/>
+          </p:cNvSpPr>
+          <p:nvPr>
+            <p:ph idx="1" sz="half"/>
+          </p:nvPr>
+        </p:nvSpPr>
+        <p:spPr/>
+        <p:txBody>
+          <a:bodyPr/>
+          <a:lstStyle/>
+          <a:p>
+            <a:pPr lvl="0" indent="0">
+              <a:buNone/>
+            </a:pPr>
+            <a:r>
+              <a:rPr>
+                <a:solidFill>
+                  <a:srgbClr val="5E5E5E"/>
+                </a:solidFill>
+                <a:latin typeface="Courier"/>
+              </a:rPr>
+              <a:t># Summer-only model -----------------------------------------</a:t>
+            </a:r>
+            <a:br/>
+            <a:r>
+              <a:rPr>
+                <a:solidFill>
+                  <a:srgbClr val="003B4F"/>
+                </a:solidFill>
+                <a:latin typeface="Courier"/>
+              </a:rPr>
+              <a:t>summer_df &lt;- season_year_df </a:t>
+            </a:r>
+            <a:r>
+              <a:rPr>
+                <a:solidFill>
+                  <a:srgbClr val="5E5E5E"/>
+                </a:solidFill>
+                <a:latin typeface="Courier"/>
+              </a:rPr>
+              <a:t>%&gt;%</a:t>
+            </a:r>
+            <a:r>
+              <a:rPr>
+                <a:solidFill>
+                  <a:srgbClr val="003B4F"/>
+                </a:solidFill>
+                <a:latin typeface="Courier"/>
+              </a:rPr>
+              <a:t> </a:t>
+            </a:r>
+            <a:r>
+              <a:rPr>
+                <a:solidFill>
+                  <a:srgbClr val="4758AB"/>
+                </a:solidFill>
+                <a:latin typeface="Courier"/>
+              </a:rPr>
+              <a:t>filter</a:t>
+            </a:r>
+            <a:r>
+              <a:rPr>
+                <a:solidFill>
+                  <a:srgbClr val="003B4F"/>
+                </a:solidFill>
+                <a:latin typeface="Courier"/>
+              </a:rPr>
+              <a:t>(season </a:t>
+            </a:r>
+            <a:r>
+              <a:rPr>
+                <a:solidFill>
+                  <a:srgbClr val="5E5E5E"/>
+                </a:solidFill>
+                <a:latin typeface="Courier"/>
+              </a:rPr>
+              <a:t>==</a:t>
+            </a:r>
+            <a:r>
+              <a:rPr>
+                <a:solidFill>
+                  <a:srgbClr val="003B4F"/>
+                </a:solidFill>
+                <a:latin typeface="Courier"/>
+              </a:rPr>
+              <a:t> </a:t>
+            </a:r>
+            <a:r>
+              <a:rPr>
+                <a:solidFill>
+                  <a:srgbClr val="20794D"/>
+                </a:solidFill>
+                <a:latin typeface="Courier"/>
+              </a:rPr>
+              <a:t>"summer"</a:t>
+            </a:r>
+            <a:r>
+              <a:rPr>
+                <a:solidFill>
+                  <a:srgbClr val="003B4F"/>
+                </a:solidFill>
+                <a:latin typeface="Courier"/>
+              </a:rPr>
+              <a:t>)</a:t>
+            </a:r>
+            <a:br/>
+            <a:r>
+              <a:rPr>
+                <a:solidFill>
+                  <a:srgbClr val="003B4F"/>
+                </a:solidFill>
+                <a:latin typeface="Courier"/>
+              </a:rPr>
+              <a:t>summer_model &lt;- </a:t>
+            </a:r>
+            <a:r>
+              <a:rPr>
+                <a:solidFill>
+                  <a:srgbClr val="4758AB"/>
+                </a:solidFill>
+                <a:latin typeface="Courier"/>
+              </a:rPr>
+              <a:t>lm</a:t>
+            </a:r>
+            <a:r>
+              <a:rPr>
+                <a:solidFill>
+                  <a:srgbClr val="003B4F"/>
+                </a:solidFill>
+                <a:latin typeface="Courier"/>
+              </a:rPr>
+              <a:t>(TEMP </a:t>
+            </a:r>
+            <a:r>
+              <a:rPr>
+                <a:solidFill>
+                  <a:srgbClr val="5E5E5E"/>
+                </a:solidFill>
+                <a:latin typeface="Courier"/>
+              </a:rPr>
+              <a:t>~</a:t>
+            </a:r>
+            <a:r>
+              <a:rPr>
+                <a:solidFill>
+                  <a:srgbClr val="003B4F"/>
+                </a:solidFill>
+                <a:latin typeface="Courier"/>
+              </a:rPr>
+              <a:t> YEAR, </a:t>
+            </a:r>
+            <a:r>
+              <a:rPr>
+                <a:solidFill>
+                  <a:srgbClr val="657422"/>
+                </a:solidFill>
+                <a:latin typeface="Courier"/>
+              </a:rPr>
+              <a:t>data =</a:t>
+            </a:r>
+            <a:r>
+              <a:rPr>
+                <a:solidFill>
+                  <a:srgbClr val="003B4F"/>
+                </a:solidFill>
+                <a:latin typeface="Courier"/>
+              </a:rPr>
+              <a:t> summer_df)</a:t>
+            </a:r>
+            <a:br/>
+            <a:r>
+              <a:rPr>
+                <a:solidFill>
+                  <a:srgbClr val="003B4F"/>
+                </a:solidFill>
+                <a:latin typeface="Courier"/>
+              </a:rPr>
+              <a:t>summer_slope &lt;- </a:t>
+            </a:r>
+            <a:r>
+              <a:rPr>
+                <a:solidFill>
+                  <a:srgbClr val="4758AB"/>
+                </a:solidFill>
+                <a:latin typeface="Courier"/>
+              </a:rPr>
+              <a:t>coef</a:t>
+            </a:r>
+            <a:r>
+              <a:rPr>
+                <a:solidFill>
+                  <a:srgbClr val="003B4F"/>
+                </a:solidFill>
+                <a:latin typeface="Courier"/>
+              </a:rPr>
+              <a:t>(summer_model)[</a:t>
+            </a:r>
+            <a:r>
+              <a:rPr>
+                <a:solidFill>
+                  <a:srgbClr val="AD0000"/>
+                </a:solidFill>
+                <a:latin typeface="Courier"/>
+              </a:rPr>
+              <a:t>2</a:t>
+            </a:r>
+            <a:r>
+              <a:rPr>
+                <a:solidFill>
+                  <a:srgbClr val="003B4F"/>
+                </a:solidFill>
+                <a:latin typeface="Courier"/>
+              </a:rPr>
+              <a:t>]</a:t>
+            </a:r>
+          </a:p>
+          <a:p>
+            <a:pPr lvl="0" indent="0">
+              <a:buNone/>
+            </a:pPr>
+            <a:r>
+              <a:rPr>
+                <a:solidFill>
+                  <a:srgbClr val="5E5E5E"/>
+                </a:solidFill>
+                <a:latin typeface="Courier"/>
+              </a:rPr>
+              <a:t># Winter-only model -----------------------------------------</a:t>
+            </a:r>
+            <a:br/>
+            <a:r>
+              <a:rPr>
+                <a:solidFill>
+                  <a:srgbClr val="003B4F"/>
+                </a:solidFill>
+                <a:latin typeface="Courier"/>
+              </a:rPr>
+              <a:t>winter_df &lt;- season_year_df </a:t>
+            </a:r>
+            <a:r>
+              <a:rPr>
+                <a:solidFill>
+                  <a:srgbClr val="5E5E5E"/>
+                </a:solidFill>
+                <a:latin typeface="Courier"/>
+              </a:rPr>
+              <a:t>%&gt;%</a:t>
+            </a:r>
+            <a:r>
+              <a:rPr>
+                <a:solidFill>
+                  <a:srgbClr val="003B4F"/>
+                </a:solidFill>
+                <a:latin typeface="Courier"/>
+              </a:rPr>
+              <a:t> </a:t>
+            </a:r>
+            <a:r>
+              <a:rPr>
+                <a:solidFill>
+                  <a:srgbClr val="4758AB"/>
+                </a:solidFill>
+                <a:latin typeface="Courier"/>
+              </a:rPr>
+              <a:t>filter</a:t>
+            </a:r>
+            <a:r>
+              <a:rPr>
+                <a:solidFill>
+                  <a:srgbClr val="003B4F"/>
+                </a:solidFill>
+                <a:latin typeface="Courier"/>
+              </a:rPr>
+              <a:t>(season </a:t>
+            </a:r>
+            <a:r>
+              <a:rPr>
+                <a:solidFill>
+                  <a:srgbClr val="5E5E5E"/>
+                </a:solidFill>
+                <a:latin typeface="Courier"/>
+              </a:rPr>
+              <a:t>==</a:t>
+            </a:r>
+            <a:r>
+              <a:rPr>
+                <a:solidFill>
+                  <a:srgbClr val="003B4F"/>
+                </a:solidFill>
+                <a:latin typeface="Courier"/>
+              </a:rPr>
+              <a:t> </a:t>
+            </a:r>
+            <a:r>
+              <a:rPr>
+                <a:solidFill>
+                  <a:srgbClr val="20794D"/>
+                </a:solidFill>
+                <a:latin typeface="Courier"/>
+              </a:rPr>
+              <a:t>"winter"</a:t>
+            </a:r>
+            <a:r>
+              <a:rPr>
+                <a:solidFill>
+                  <a:srgbClr val="003B4F"/>
+                </a:solidFill>
+                <a:latin typeface="Courier"/>
+              </a:rPr>
+              <a:t>)</a:t>
+            </a:r>
+            <a:br/>
+            <a:r>
+              <a:rPr>
+                <a:solidFill>
+                  <a:srgbClr val="003B4F"/>
+                </a:solidFill>
+                <a:latin typeface="Courier"/>
+              </a:rPr>
+              <a:t>winter_model &lt;- </a:t>
+            </a:r>
+            <a:r>
+              <a:rPr>
+                <a:solidFill>
+                  <a:srgbClr val="4758AB"/>
+                </a:solidFill>
+                <a:latin typeface="Courier"/>
+              </a:rPr>
+              <a:t>lm</a:t>
+            </a:r>
+            <a:r>
+              <a:rPr>
+                <a:solidFill>
+                  <a:srgbClr val="003B4F"/>
+                </a:solidFill>
+                <a:latin typeface="Courier"/>
+              </a:rPr>
+              <a:t>(TEMP </a:t>
+            </a:r>
+            <a:r>
+              <a:rPr>
+                <a:solidFill>
+                  <a:srgbClr val="5E5E5E"/>
+                </a:solidFill>
+                <a:latin typeface="Courier"/>
+              </a:rPr>
+              <a:t>~</a:t>
+            </a:r>
+            <a:r>
+              <a:rPr>
+                <a:solidFill>
+                  <a:srgbClr val="003B4F"/>
+                </a:solidFill>
+                <a:latin typeface="Courier"/>
+              </a:rPr>
+              <a:t> YEAR, </a:t>
+            </a:r>
+            <a:r>
+              <a:rPr>
+                <a:solidFill>
+                  <a:srgbClr val="657422"/>
+                </a:solidFill>
+                <a:latin typeface="Courier"/>
+              </a:rPr>
+              <a:t>data =</a:t>
+            </a:r>
+            <a:r>
+              <a:rPr>
+                <a:solidFill>
+                  <a:srgbClr val="003B4F"/>
+                </a:solidFill>
+                <a:latin typeface="Courier"/>
+              </a:rPr>
+              <a:t> winter_df)</a:t>
+            </a:r>
+            <a:br/>
+            <a:r>
+              <a:rPr>
+                <a:solidFill>
+                  <a:srgbClr val="003B4F"/>
+                </a:solidFill>
+                <a:latin typeface="Courier"/>
+              </a:rPr>
+              <a:t>winter_slope &lt;- </a:t>
+            </a:r>
+            <a:r>
+              <a:rPr>
+                <a:solidFill>
+                  <a:srgbClr val="4758AB"/>
+                </a:solidFill>
+                <a:latin typeface="Courier"/>
+              </a:rPr>
+              <a:t>coef</a:t>
+            </a:r>
+            <a:r>
+              <a:rPr>
+                <a:solidFill>
+                  <a:srgbClr val="003B4F"/>
+                </a:solidFill>
+                <a:latin typeface="Courier"/>
+              </a:rPr>
+              <a:t>(winter_model)[</a:t>
+            </a:r>
+            <a:r>
+              <a:rPr>
+                <a:solidFill>
+                  <a:srgbClr val="AD0000"/>
+                </a:solidFill>
+                <a:latin typeface="Courier"/>
+              </a:rPr>
+              <a:t>2</a:t>
+            </a:r>
+            <a:r>
+              <a:rPr>
+                <a:solidFill>
+                  <a:srgbClr val="003B4F"/>
+                </a:solidFill>
+                <a:latin typeface="Courier"/>
+              </a:rPr>
+              <a:t>]</a:t>
+            </a:r>
+          </a:p>
+          <a:p>
+            <a:pPr lvl="0" indent="0">
+              <a:buNone/>
+            </a:pPr>
+            <a:r>
+              <a:rPr>
+                <a:solidFill>
+                  <a:srgbClr val="4758AB"/>
+                </a:solidFill>
+                <a:latin typeface="Courier"/>
+              </a:rPr>
+              <a:t>cat</a:t>
+            </a:r>
+            <a:r>
+              <a:rPr>
+                <a:solidFill>
+                  <a:srgbClr val="003B4F"/>
+                </a:solidFill>
+                <a:latin typeface="Courier"/>
+              </a:rPr>
+              <a:t>(</a:t>
+            </a:r>
+            <a:r>
+              <a:rPr>
+                <a:solidFill>
+                  <a:srgbClr val="20794D"/>
+                </a:solidFill>
+                <a:latin typeface="Courier"/>
+              </a:rPr>
+              <a:t>"Summer warming rate:"</a:t>
+            </a:r>
+            <a:r>
+              <a:rPr>
+                <a:solidFill>
+                  <a:srgbClr val="003B4F"/>
+                </a:solidFill>
+                <a:latin typeface="Courier"/>
+              </a:rPr>
+              <a:t>,</a:t>
+            </a:r>
+            <a:br/>
+            <a:r>
+              <a:rPr>
+                <a:solidFill>
+                  <a:srgbClr val="003B4F"/>
+                </a:solidFill>
+                <a:latin typeface="Courier"/>
+              </a:rPr>
+              <a:t>    </a:t>
+            </a:r>
+            <a:r>
+              <a:rPr>
+                <a:solidFill>
+                  <a:srgbClr val="4758AB"/>
+                </a:solidFill>
+                <a:latin typeface="Courier"/>
+              </a:rPr>
+              <a:t>round</a:t>
+            </a:r>
+            <a:r>
+              <a:rPr>
+                <a:solidFill>
+                  <a:srgbClr val="003B4F"/>
+                </a:solidFill>
+                <a:latin typeface="Courier"/>
+              </a:rPr>
+              <a:t>(summer_slope </a:t>
+            </a:r>
+            <a:r>
+              <a:rPr>
+                <a:solidFill>
+                  <a:srgbClr val="5E5E5E"/>
+                </a:solidFill>
+                <a:latin typeface="Courier"/>
+              </a:rPr>
+              <a:t>*</a:t>
+            </a:r>
+            <a:r>
+              <a:rPr>
+                <a:solidFill>
+                  <a:srgbClr val="003B4F"/>
+                </a:solidFill>
+                <a:latin typeface="Courier"/>
+              </a:rPr>
+              <a:t> </a:t>
+            </a:r>
+            <a:r>
+              <a:rPr>
+                <a:solidFill>
+                  <a:srgbClr val="AD0000"/>
+                </a:solidFill>
+                <a:latin typeface="Courier"/>
+              </a:rPr>
+              <a:t>10</a:t>
+            </a:r>
+            <a:r>
+              <a:rPr>
+                <a:solidFill>
+                  <a:srgbClr val="003B4F"/>
+                </a:solidFill>
+                <a:latin typeface="Courier"/>
+              </a:rPr>
+              <a:t>, </a:t>
+            </a:r>
+            <a:r>
+              <a:rPr>
+                <a:solidFill>
+                  <a:srgbClr val="AD0000"/>
+                </a:solidFill>
+                <a:latin typeface="Courier"/>
+              </a:rPr>
+              <a:t>3</a:t>
+            </a:r>
+            <a:r>
+              <a:rPr>
+                <a:solidFill>
+                  <a:srgbClr val="003B4F"/>
+                </a:solidFill>
+                <a:latin typeface="Courier"/>
+              </a:rPr>
+              <a:t>), </a:t>
+            </a:r>
+            <a:r>
+              <a:rPr>
+                <a:solidFill>
+                  <a:srgbClr val="20794D"/>
+                </a:solidFill>
+                <a:latin typeface="Courier"/>
+              </a:rPr>
+              <a:t>"°C/decade</a:t>
+            </a:r>
+            <a:r>
+              <a:rPr>
+                <a:solidFill>
+                  <a:srgbClr val="5E5E5E"/>
+                </a:solidFill>
+                <a:latin typeface="Courier"/>
+              </a:rPr>
+              <a:t>\n</a:t>
+            </a:r>
+            <a:r>
+              <a:rPr>
+                <a:solidFill>
+                  <a:srgbClr val="20794D"/>
+                </a:solidFill>
+                <a:latin typeface="Courier"/>
+              </a:rPr>
+              <a:t>"</a:t>
+            </a:r>
+            <a:r>
+              <a:rPr>
+                <a:solidFill>
+                  <a:srgbClr val="003B4F"/>
+                </a:solidFill>
+                <a:latin typeface="Courier"/>
+              </a:rPr>
+              <a:t>)</a:t>
+            </a:r>
+          </a:p>
+          <a:p>
+            <a:pPr lvl="0" indent="0">
+              <a:buNone/>
+            </a:pPr>
+            <a:r>
+              <a:rPr>
+                <a:latin typeface="Courier"/>
+              </a:rPr>
+              <a:t>Summer warming rate: 0.211 °C/decade</a:t>
+            </a:r>
+          </a:p>
+          <a:p>
+            <a:pPr lvl="0" indent="0">
+              <a:buNone/>
+            </a:pPr>
+            <a:r>
+              <a:rPr>
+                <a:solidFill>
+                  <a:srgbClr val="4758AB"/>
+                </a:solidFill>
+                <a:latin typeface="Courier"/>
+              </a:rPr>
+              <a:t>cat</a:t>
+            </a:r>
+            <a:r>
+              <a:rPr>
+                <a:solidFill>
+                  <a:srgbClr val="003B4F"/>
+                </a:solidFill>
+                <a:latin typeface="Courier"/>
+              </a:rPr>
+              <a:t>(</a:t>
+            </a:r>
+            <a:r>
+              <a:rPr>
+                <a:solidFill>
+                  <a:srgbClr val="20794D"/>
+                </a:solidFill>
+                <a:latin typeface="Courier"/>
+              </a:rPr>
+              <a:t>"Winter warming rate:"</a:t>
+            </a:r>
+            <a:r>
+              <a:rPr>
+                <a:solidFill>
+                  <a:srgbClr val="003B4F"/>
+                </a:solidFill>
+                <a:latin typeface="Courier"/>
+              </a:rPr>
+              <a:t>,</a:t>
+            </a:r>
+            <a:br/>
+            <a:r>
+              <a:rPr>
+                <a:solidFill>
+                  <a:srgbClr val="003B4F"/>
+                </a:solidFill>
+                <a:latin typeface="Courier"/>
+              </a:rPr>
+              <a:t>    </a:t>
+            </a:r>
+            <a:r>
+              <a:rPr>
+                <a:solidFill>
+                  <a:srgbClr val="4758AB"/>
+                </a:solidFill>
+                <a:latin typeface="Courier"/>
+              </a:rPr>
+              <a:t>round</a:t>
+            </a:r>
+            <a:r>
+              <a:rPr>
+                <a:solidFill>
+                  <a:srgbClr val="003B4F"/>
+                </a:solidFill>
+                <a:latin typeface="Courier"/>
+              </a:rPr>
+              <a:t>(winter_slope </a:t>
+            </a:r>
+            <a:r>
+              <a:rPr>
+                <a:solidFill>
+                  <a:srgbClr val="5E5E5E"/>
+                </a:solidFill>
+                <a:latin typeface="Courier"/>
+              </a:rPr>
+              <a:t>*</a:t>
+            </a:r>
+            <a:r>
+              <a:rPr>
+                <a:solidFill>
+                  <a:srgbClr val="003B4F"/>
+                </a:solidFill>
+                <a:latin typeface="Courier"/>
+              </a:rPr>
+              <a:t> </a:t>
+            </a:r>
+            <a:r>
+              <a:rPr>
+                <a:solidFill>
+                  <a:srgbClr val="AD0000"/>
+                </a:solidFill>
+                <a:latin typeface="Courier"/>
+              </a:rPr>
+              <a:t>10</a:t>
+            </a:r>
+            <a:r>
+              <a:rPr>
+                <a:solidFill>
+                  <a:srgbClr val="003B4F"/>
+                </a:solidFill>
+                <a:latin typeface="Courier"/>
+              </a:rPr>
+              <a:t>, </a:t>
+            </a:r>
+            <a:r>
+              <a:rPr>
+                <a:solidFill>
+                  <a:srgbClr val="AD0000"/>
+                </a:solidFill>
+                <a:latin typeface="Courier"/>
+              </a:rPr>
+              <a:t>3</a:t>
+            </a:r>
+            <a:r>
+              <a:rPr>
+                <a:solidFill>
+                  <a:srgbClr val="003B4F"/>
+                </a:solidFill>
+                <a:latin typeface="Courier"/>
+              </a:rPr>
+              <a:t>), </a:t>
+            </a:r>
+            <a:r>
+              <a:rPr>
+                <a:solidFill>
+                  <a:srgbClr val="20794D"/>
+                </a:solidFill>
+                <a:latin typeface="Courier"/>
+              </a:rPr>
+              <a:t>"°C/decade</a:t>
+            </a:r>
+            <a:r>
+              <a:rPr>
+                <a:solidFill>
+                  <a:srgbClr val="5E5E5E"/>
+                </a:solidFill>
+                <a:latin typeface="Courier"/>
+              </a:rPr>
+              <a:t>\n</a:t>
+            </a:r>
+            <a:r>
+              <a:rPr>
+                <a:solidFill>
+                  <a:srgbClr val="20794D"/>
+                </a:solidFill>
+                <a:latin typeface="Courier"/>
+              </a:rPr>
+              <a:t>"</a:t>
+            </a:r>
+            <a:r>
+              <a:rPr>
+                <a:solidFill>
+                  <a:srgbClr val="003B4F"/>
+                </a:solidFill>
+                <a:latin typeface="Courier"/>
+              </a:rPr>
+              <a:t>)</a:t>
+            </a:r>
+          </a:p>
+          <a:p>
+            <a:pPr lvl="0" indent="0">
+              <a:buNone/>
+            </a:pPr>
+            <a:r>
+              <a:rPr>
+                <a:latin typeface="Courier"/>
+              </a:rPr>
+              <a:t>Winter warming rate: 0.342 °C/decade</a:t>
+            </a:r>
+          </a:p>
+        </p:txBody>
+      </p:sp>
+      <p:sp>
+        <p:nvSpPr>
+          <p:cNvPr id="4" name="Content Placeholder 3"/>
+          <p:cNvSpPr>
+            <a:spLocks noGrp="1"/>
+          </p:cNvSpPr>
+          <p:nvPr>
+            <p:ph idx="2" sz="half"/>
+          </p:nvPr>
+        </p:nvSpPr>
+        <p:spPr/>
+        <p:txBody>
+          <a:bodyPr/>
+          <a:lstStyle/>
+          <a:p>
+            <a:pPr lvl="0" indent="0" marL="0">
+              <a:buNone/>
+            </a:pPr>
+            <a:r>
+              <a:rPr b="1"/>
+              <a:t>Why fit two separate models</a:t>
+            </a:r>
+            <a:r>
+              <a:rPr/>
+              <a:t> instead of one model with </a:t>
+            </a:r>
+            <a:r>
+              <a:rPr>
+                <a:latin typeface="Courier"/>
+              </a:rPr>
+              <a:t>season</a:t>
+            </a:r>
+            <a:r>
+              <a:rPr/>
+              <a:t> as a predictor?</a:t>
+            </a:r>
+          </a:p>
+          <a:p>
+            <a:pPr lvl="0"/>
+            <a:r>
+              <a:rPr/>
+              <a:t>Two simple models are easier to interpret at this stage</a:t>
+            </a:r>
+          </a:p>
+          <a:p>
+            <a:pPr lvl="0"/>
+            <a:r>
+              <a:rPr/>
+              <a:t>Each gives us a clean, separate slope (°C/decade) to directly compare</a:t>
+            </a:r>
+          </a:p>
+          <a:p>
+            <a:pPr lvl="0" indent="0" marL="0">
+              <a:buNone/>
+            </a:pPr>
+            <a:r>
+              <a:rPr b="1"/>
+              <a:t>Spoiler from the climate science literature:</a:t>
+            </a:r>
+            <a:r>
+              <a:rPr/>
+              <a:t> in most northern locations, </a:t>
+            </a:r>
+            <a:r>
+              <a:rPr b="1"/>
+              <a:t>winter warms faster than summer</a:t>
+            </a:r>
+            <a:r>
+              <a:rPr/>
+              <a:t> — fewer extreme-cold days, shorter ice seasons. Does Duluth’s data agree?</a:t>
             </a:r>
           </a:p>
         </p:txBody>
@@ -3350,7 +9197,7 @@
         <p:spPr>
           <a:xfrm>
             <a:off x="0" y="0"/>
-            <a:ext cx="9144000" cy="1021556"/>
+            <a:ext cx="9144000" cy="582780"/>
           </a:xfrm>
         </p:spPr>
         <p:txBody>
@@ -3362,7 +9209,4005 @@
             </a:pPr>
             <a:r>
               <a:rPr/>
-              <a:t>Lecture 5: Review</a:t>
+              <a:t>Where we left off (Lecture 05)</a:t>
+            </a:r>
+          </a:p>
+        </p:txBody>
+      </p:sp>
+      <p:sp>
+        <p:nvSpPr>
+          <p:cNvPr id="3" name="Content Placeholder 2"/>
+          <p:cNvSpPr>
+            <a:spLocks noGrp="1"/>
+          </p:cNvSpPr>
+          <p:nvPr>
+            <p:ph idx="1"/>
+          </p:nvPr>
+        </p:nvSpPr>
+        <p:spPr/>
+        <p:txBody>
+          <a:bodyPr/>
+          <a:lstStyle/>
+          <a:p>
+            <a:pPr lvl="0"/>
+            <a:r>
+              <a:rPr b="1"/>
+              <a:t>Linear regression</a:t>
+            </a:r>
+            <a:r>
+              <a:rPr/>
+              <a:t> — fit a calibration curve (area ~ mass) with </a:t>
+            </a:r>
+            <a:r>
+              <a:rPr>
+                <a:latin typeface="Courier"/>
+              </a:rPr>
+              <a:t>lm()</a:t>
+            </a:r>
+          </a:p>
+          <a:p>
+            <a:pPr lvl="0"/>
+            <a:r>
+              <a:rPr b="1"/>
+              <a:t>Reading </a:t>
+            </a:r>
+            <a:r>
+              <a:rPr b="1">
+                <a:latin typeface="Courier"/>
+              </a:rPr>
+              <a:t>summary()</a:t>
+            </a:r>
+            <a:r>
+              <a:rPr/>
+              <a:t> — slope </a:t>
+            </a:r>
+            <a:r>
+              <a:rPr i="1"/>
+              <a:t>b</a:t>
+            </a:r>
+            <a:r>
+              <a:rPr/>
+              <a:t>, intercept </a:t>
+            </a:r>
+            <a:r>
+              <a:rPr i="1"/>
+              <a:t>a</a:t>
+            </a:r>
+            <a:r>
+              <a:rPr/>
+              <a:t>, R², p-value for the slope</a:t>
+            </a:r>
+          </a:p>
+          <a:p>
+            <a:pPr lvl="0"/>
+            <a:r>
+              <a:rPr b="1"/>
+              <a:t>Least squares</a:t>
+            </a:r>
+            <a:r>
+              <a:rPr/>
+              <a:t> — the line that minimizes the sum of squared residuals</a:t>
+            </a:r>
+          </a:p>
+          <a:p>
+            <a:pPr lvl="0"/>
+            <a:r>
+              <a:rPr b="1"/>
+              <a:t>Assumption checks</a:t>
+            </a:r>
+            <a:r>
+              <a:rPr/>
+              <a:t> — residual vs. fitted plot, QQ plot, Shapiro-Wilk on </a:t>
+            </a:r>
+            <a:r>
+              <a:rPr b="1"/>
+              <a:t>residuals</a:t>
+            </a:r>
+          </a:p>
+          <a:p>
+            <a:pPr lvl="0"/>
+            <a:r>
+              <a:rPr b="1">
+                <a:latin typeface="Courier"/>
+              </a:rPr>
+              <a:t>predict()</a:t>
+            </a:r>
+            <a:r>
+              <a:rPr/>
+              <a:t> — confidence intervals (mean Y) vs. prediction intervals (one new Y)</a:t>
+            </a:r>
+          </a:p>
+          <a:p>
+            <a:pPr lvl="0"/>
+            <a:r>
+              <a:rPr b="1"/>
+              <a:t>Applied it</a:t>
+            </a:r>
+            <a:r>
+              <a:rPr/>
+              <a:t> — converted paper tracing mass into predicted leaf area (cm²)</a:t>
+            </a:r>
+          </a:p>
+          <a:p>
+            <a:pPr lvl="0" indent="0" marL="1270000">
+              <a:buNone/>
+            </a:pPr>
+            <a:r>
+              <a:rPr sz="2000" b="1"/>
+              <a:t>Note</a:t>
+            </a:r>
+          </a:p>
+          <a:p>
+            <a:pPr lvl="0" indent="0" marL="1270000">
+              <a:buNone/>
+            </a:pPr>
+            <a:r>
+              <a:rPr sz="2000" b="1"/>
+              <a:t>✅ Transition</a:t>
+            </a:r>
+          </a:p>
+          <a:p>
+            <a:pPr lvl="0" indent="0" marL="1270000">
+              <a:buNone/>
+            </a:pPr>
+            <a:r>
+              <a:rPr sz="2000"/>
+              <a:t>So far every regression we have run used a dataset you were handed. Today we </a:t>
+            </a:r>
+            <a:r>
+              <a:rPr sz="2000" b="1"/>
+              <a:t>download real data from inside R</a:t>
+            </a:r>
+            <a:r>
+              <a:rPr sz="2000"/>
+              <a:t> for the first time — long-term weather records for Duluth, MN — and use that same regression toolkit to ask a much bigger question: </a:t>
+            </a:r>
+            <a:r>
+              <a:rPr sz="2000" i="1"/>
+              <a:t>is it getting warmer?</a:t>
+            </a:r>
+          </a:p>
+        </p:txBody>
+      </p:sp>
+    </p:spTree>
+  </p:cSld>
+</p:sld>
+</file>
+
+<file path=ppt/slides/slide20.xml><?xml version="1.0" encoding="utf-8"?>
+<p:sld xmlns:a="http://schemas.openxmlformats.org/drawingml/2006/main" xmlns:r="http://schemas.openxmlformats.org/officeDocument/2006/relationships" xmlns:p="http://schemas.openxmlformats.org/presentationml/2006/main">
+  <p:cSld>
+    <p:spTree>
+      <p:nvGrpSpPr>
+        <p:cNvPr id="1" name=""/>
+        <p:cNvGrpSpPr/>
+        <p:nvPr/>
+      </p:nvGrpSpPr>
+      <p:grpSpPr>
+        <a:xfrm>
+          <a:off x="0" y="0"/>
+          <a:ext cx="0" cy="0"/>
+          <a:chOff x="0" y="0"/>
+          <a:chExt cx="0" cy="0"/>
+        </a:xfrm>
+      </p:grpSpPr>
+      <p:sp>
+        <p:nvSpPr>
+          <p:cNvPr id="2" name="Title 1"/>
+          <p:cNvSpPr>
+            <a:spLocks noGrp="1"/>
+          </p:cNvSpPr>
+          <p:nvPr>
+            <p:ph type="title"/>
+          </p:nvPr>
+        </p:nvSpPr>
+        <p:spPr>
+          <a:xfrm>
+            <a:off x="0" y="0"/>
+            <a:ext cx="9144000" cy="602780"/>
+          </a:xfrm>
+          <a:solidFill>
+            <a:srgbClr val="1A1A2E"/>
+          </a:solidFill>
+        </p:spPr>
+        <p:txBody>
+          <a:bodyPr/>
+          <a:lstStyle/>
+          <a:p>
+            <a:pPr lvl="0" indent="0" marL="0">
+              <a:buNone/>
+            </a:pPr>
+            <a:r>
+              <a:rPr/>
+              <a:t>What We Learned Today</a:t>
+            </a:r>
+          </a:p>
+        </p:txBody>
+      </p:sp>
+      <p:sp>
+        <p:nvSpPr>
+          <p:cNvPr id="3" name="Content Placeholder 2"/>
+          <p:cNvSpPr>
+            <a:spLocks noGrp="1"/>
+          </p:cNvSpPr>
+          <p:nvPr>
+            <p:ph idx="1" sz="half"/>
+          </p:nvPr>
+        </p:nvSpPr>
+        <p:spPr/>
+        <p:txBody>
+          <a:bodyPr/>
+          <a:lstStyle/>
+          <a:p>
+            <a:pPr lvl="0" indent="0" marL="0">
+              <a:buNone/>
+            </a:pPr>
+            <a:r>
+              <a:rPr b="1"/>
+              <a:t>Concepts:</a:t>
+            </a:r>
+          </a:p>
+          <a:p>
+            <a:pPr lvl="0"/>
+            <a:r>
+              <a:rPr/>
+              <a:t>Real climate data can be downloaded </a:t>
+            </a:r>
+            <a:r>
+              <a:rPr b="1"/>
+              <a:t>directly into R</a:t>
+            </a:r>
+            <a:r>
+              <a:rPr/>
+              <a:t> with </a:t>
+            </a:r>
+            <a:r>
+              <a:rPr>
+                <a:latin typeface="Courier"/>
+              </a:rPr>
+              <a:t>GSODR</a:t>
+            </a:r>
+          </a:p>
+          <a:p>
+            <a:pPr lvl="0"/>
+            <a:r>
+              <a:rPr/>
+              <a:t>Raw daily data hides long-term trends inside seasonal/day-to-day noise</a:t>
+            </a:r>
+          </a:p>
+          <a:p>
+            <a:pPr lvl="0"/>
+            <a:r>
+              <a:rPr>
+                <a:latin typeface="Courier"/>
+              </a:rPr>
+              <a:t>group_by() %&gt;% summarize()</a:t>
+            </a:r>
+            <a:r>
+              <a:rPr/>
+              <a:t> at different time scales reveals different stories</a:t>
+            </a:r>
+          </a:p>
+          <a:p>
+            <a:pPr lvl="0"/>
+            <a:r>
+              <a:rPr/>
+              <a:t>The same </a:t>
+            </a:r>
+            <a:r>
+              <a:rPr>
+                <a:latin typeface="Courier"/>
+              </a:rPr>
+              <a:t>lm()</a:t>
+            </a:r>
+            <a:r>
+              <a:rPr/>
+              <a:t> workflow from Lecture 05 works on </a:t>
+            </a:r>
+            <a:r>
+              <a:rPr i="1"/>
+              <a:t>any</a:t>
+            </a:r>
+            <a:r>
+              <a:rPr/>
+              <a:t> X ~ Y relationship — including time</a:t>
+            </a:r>
+          </a:p>
+          <a:p>
+            <a:pPr lvl="0"/>
+            <a:r>
+              <a:rPr>
+                <a:latin typeface="Courier"/>
+              </a:rPr>
+              <a:t>case_when()</a:t>
+            </a:r>
+            <a:r>
+              <a:rPr/>
+              <a:t> builds a new categorical variable from multiple conditions</a:t>
+            </a:r>
+          </a:p>
+          <a:p>
+            <a:pPr lvl="0"/>
+            <a:r>
+              <a:rPr/>
+              <a:t>Splitting data by group (season) before modeling lets us compare </a:t>
+            </a:r>
+            <a:r>
+              <a:rPr b="1"/>
+              <a:t>rates of change</a:t>
+            </a:r>
+          </a:p>
+          <a:p>
+            <a:pPr lvl="0" indent="0" marL="0">
+              <a:buNone/>
+            </a:pPr>
+            <a:r>
+              <a:rPr b="1"/>
+              <a:t>R skills:</a:t>
+            </a:r>
+          </a:p>
+          <a:p>
+            <a:pPr lvl="0"/>
+            <a:r>
+              <a:rPr>
+                <a:latin typeface="Courier"/>
+              </a:rPr>
+              <a:t>get_GSOD()</a:t>
+            </a:r>
+            <a:r>
+              <a:rPr/>
+              <a:t> — download NOAA station data</a:t>
+            </a:r>
+          </a:p>
+          <a:p>
+            <a:pPr lvl="0"/>
+            <a:r>
+              <a:rPr>
+                <a:latin typeface="Courier"/>
+              </a:rPr>
+              <a:t>group_by(YEAR, MONTH)</a:t>
+            </a:r>
+            <a:r>
+              <a:rPr/>
+              <a:t> / </a:t>
+            </a:r>
+            <a:r>
+              <a:rPr>
+                <a:latin typeface="Courier"/>
+              </a:rPr>
+              <a:t>group_by(YEAR)</a:t>
+            </a:r>
+            <a:r>
+              <a:rPr/>
+              <a:t> — multi-level time summaries</a:t>
+            </a:r>
+          </a:p>
+          <a:p>
+            <a:pPr lvl="0"/>
+            <a:r>
+              <a:rPr>
+                <a:latin typeface="Courier"/>
+              </a:rPr>
+              <a:t>case_when()</a:t>
+            </a:r>
+            <a:r>
+              <a:rPr/>
+              <a:t> — multi-condition </a:t>
+            </a:r>
+            <a:r>
+              <a:rPr>
+                <a:latin typeface="Courier"/>
+              </a:rPr>
+              <a:t>mutate()</a:t>
+            </a:r>
+          </a:p>
+          <a:p>
+            <a:pPr lvl="0"/>
+            <a:r>
+              <a:rPr>
+                <a:latin typeface="Courier"/>
+              </a:rPr>
+              <a:t>filter(x %in% c(...))</a:t>
+            </a:r>
+            <a:r>
+              <a:rPr/>
+              <a:t> — keep only specific categories</a:t>
+            </a:r>
+          </a:p>
+          <a:p>
+            <a:pPr lvl="0"/>
+            <a:r>
+              <a:rPr/>
+              <a:t>Two-group regression comparison with separate </a:t>
+            </a:r>
+            <a:r>
+              <a:rPr>
+                <a:latin typeface="Courier"/>
+              </a:rPr>
+              <a:t>lm()</a:t>
+            </a:r>
+            <a:r>
+              <a:rPr/>
+              <a:t> calls</a:t>
+            </a:r>
+          </a:p>
+        </p:txBody>
+      </p:sp>
+      <p:sp>
+        <p:nvSpPr>
+          <p:cNvPr id="4" name="Content Placeholder 3"/>
+          <p:cNvSpPr>
+            <a:spLocks noGrp="1"/>
+          </p:cNvSpPr>
+          <p:nvPr>
+            <p:ph idx="2" sz="half"/>
+          </p:nvPr>
+        </p:nvSpPr>
+        <p:spPr/>
+        <p:txBody>
+          <a:bodyPr/>
+          <a:lstStyle/>
+          <a:p>
+            <a:pPr lvl="0" indent="0" marL="0">
+              <a:buNone/>
+            </a:pPr>
+            <a:r>
+              <a:rPr b="1"/>
+              <a:t>References:</a:t>
+            </a:r>
+          </a:p>
+          <a:p>
+            <a:pPr lvl="0"/>
+            <a:r>
+              <a:rPr/>
+              <a:t>📖 R4DS Ch. 3 — Data transformation</a:t>
+            </a:r>
+          </a:p>
+          <a:p>
+            <a:pPr lvl="0"/>
+            <a:r>
+              <a:rPr/>
+              <a:t>📖 R4DS Ch. 17 — Dates and times</a:t>
+            </a:r>
+          </a:p>
+          <a:p>
+            <a:pPr lvl="0"/>
+            <a:r>
+              <a:rPr/>
+              <a:t>📖 Data Carpentry — R for Ecologists</a:t>
+            </a:r>
+          </a:p>
+          <a:p>
+            <a:pPr lvl="0" indent="0" marL="0">
+              <a:buNone/>
+            </a:pPr>
+            <a:r>
+              <a:rPr b="1"/>
+              <a:t>Up next — Homework:</a:t>
+            </a:r>
+          </a:p>
+          <a:p>
+            <a:pPr lvl="0"/>
+            <a:r>
+              <a:rPr/>
+              <a:t>Pick </a:t>
+            </a:r>
+            <a:r>
+              <a:rPr b="1"/>
+              <a:t>your own city</a:t>
+            </a:r>
+            <a:r>
+              <a:rPr/>
+              <a:t> (anywhere with a long GSOD record)</a:t>
+            </a:r>
+          </a:p>
+          <a:p>
+            <a:pPr lvl="0"/>
+            <a:r>
+              <a:rPr/>
+              <a:t>Repeat this entire workflow: download → raw plot → summarize → model the trend</a:t>
+            </a:r>
+          </a:p>
+          <a:p>
+            <a:pPr lvl="0"/>
+            <a:r>
+              <a:rPr/>
+              <a:t>Build your own summer vs. winter </a:t>
+            </a:r>
+            <a:r>
+              <a:rPr>
+                <a:latin typeface="Courier"/>
+              </a:rPr>
+              <a:t>case_when()</a:t>
+            </a:r>
+            <a:r>
+              <a:rPr/>
+              <a:t> comparison</a:t>
+            </a:r>
+          </a:p>
+          <a:p>
+            <a:pPr lvl="0"/>
+            <a:r>
+              <a:rPr/>
+              <a:t>Write a short results paragraph comparing your city’s warming rate to Duluth’s</a:t>
+            </a:r>
+          </a:p>
+        </p:txBody>
+      </p:sp>
+    </p:spTree>
+  </p:cSld>
+</p:sld>
+</file>
+
+<file path=ppt/slides/slide3.xml><?xml version="1.0" encoding="utf-8"?>
+<p:sld xmlns:a="http://schemas.openxmlformats.org/drawingml/2006/main" xmlns:r="http://schemas.openxmlformats.org/officeDocument/2006/relationships" xmlns:p="http://schemas.openxmlformats.org/presentationml/2006/main">
+  <p:cSld>
+    <p:spTree>
+      <p:nvGrpSpPr>
+        <p:cNvPr id="1" name=""/>
+        <p:cNvGrpSpPr/>
+        <p:nvPr/>
+      </p:nvGrpSpPr>
+      <p:grpSpPr>
+        <a:xfrm>
+          <a:off x="0" y="0"/>
+          <a:ext cx="0" cy="0"/>
+          <a:chOff x="0" y="0"/>
+          <a:chExt cx="0" cy="0"/>
+        </a:xfrm>
+      </p:grpSpPr>
+      <p:sp>
+        <p:nvSpPr>
+          <p:cNvPr id="2" name="Title 1"/>
+          <p:cNvSpPr>
+            <a:spLocks noGrp="1"/>
+          </p:cNvSpPr>
+          <p:nvPr>
+            <p:ph type="title"/>
+          </p:nvPr>
+        </p:nvSpPr>
+        <p:spPr>
+          <a:xfrm>
+            <a:off x="0" y="0"/>
+            <a:ext cx="9144000" cy="602780"/>
+          </a:xfrm>
+          <a:solidFill>
+            <a:srgbClr val="1A1A2E"/>
+          </a:solidFill>
+        </p:spPr>
+        <p:txBody>
+          <a:bodyPr/>
+          <a:lstStyle/>
+          <a:p>
+            <a:pPr lvl="0" indent="0" marL="0">
+              <a:buNone/>
+            </a:pPr>
+            <a:r>
+              <a:rPr/>
+              <a:t>Goals for Today</a:t>
+            </a:r>
+          </a:p>
+        </p:txBody>
+      </p:sp>
+      <p:sp>
+        <p:nvSpPr>
+          <p:cNvPr id="3" name="Content Placeholder 2"/>
+          <p:cNvSpPr>
+            <a:spLocks noGrp="1"/>
+          </p:cNvSpPr>
+          <p:nvPr>
+            <p:ph idx="1" sz="half"/>
+          </p:nvPr>
+        </p:nvSpPr>
+        <p:spPr/>
+        <p:txBody>
+          <a:bodyPr/>
+          <a:lstStyle/>
+          <a:p>
+            <a:pPr lvl="0"/>
+            <a:r>
+              <a:rPr/>
+              <a:t>Download real weather station data </a:t>
+            </a:r>
+            <a:r>
+              <a:rPr b="1"/>
+              <a:t>from inside R</a:t>
+            </a:r>
+            <a:r>
+              <a:rPr/>
+              <a:t> (no Excel step!)</a:t>
+            </a:r>
+          </a:p>
+          <a:p>
+            <a:pPr lvl="0"/>
+            <a:r>
+              <a:rPr/>
+              <a:t>Explore raw daily data — and see why raw data alone is hard to read</a:t>
+            </a:r>
+          </a:p>
+          <a:p>
+            <a:pPr lvl="0"/>
+            <a:r>
+              <a:rPr b="1"/>
+              <a:t>Summarize</a:t>
+            </a:r>
+            <a:r>
+              <a:rPr/>
+              <a:t> the same data by day, week, month, and year — and watch the story get clearer</a:t>
+            </a:r>
+          </a:p>
+          <a:p>
+            <a:pPr lvl="0"/>
+            <a:r>
+              <a:rPr/>
+              <a:t>Reuse </a:t>
+            </a:r>
+            <a:r>
+              <a:rPr>
+                <a:latin typeface="Courier"/>
+              </a:rPr>
+              <a:t>lm()</a:t>
+            </a:r>
+            <a:r>
+              <a:rPr/>
+              <a:t> to estimate the </a:t>
+            </a:r>
+            <a:r>
+              <a:rPr b="1"/>
+              <a:t>rate of change</a:t>
+            </a:r>
+            <a:r>
+              <a:rPr/>
+              <a:t> (slope) in temperature over time</a:t>
+            </a:r>
+          </a:p>
+          <a:p>
+            <a:pPr lvl="0"/>
+            <a:r>
+              <a:rPr/>
+              <a:t>Use </a:t>
+            </a:r>
+            <a:r>
+              <a:rPr>
+                <a:latin typeface="Courier"/>
+              </a:rPr>
+              <a:t>case_when()</a:t>
+            </a:r>
+            <a:r>
+              <a:rPr/>
+              <a:t> to build a new categorical variable — </a:t>
+            </a:r>
+            <a:r>
+              <a:rPr b="1"/>
+              <a:t>summer vs. winter</a:t>
+            </a:r>
+          </a:p>
+          <a:p>
+            <a:pPr lvl="0"/>
+            <a:r>
+              <a:rPr/>
+              <a:t>Compare how fast each season is warming</a:t>
+            </a:r>
+          </a:p>
+          <a:p>
+            <a:pPr lvl="0" indent="0" marL="1270000">
+              <a:buNone/>
+            </a:pPr>
+            <a:r>
+              <a:rPr sz="2000" b="1"/>
+              <a:t>Tip</a:t>
+            </a:r>
+          </a:p>
+          <a:p>
+            <a:pPr lvl="0" indent="0" marL="1270000">
+              <a:buNone/>
+            </a:pPr>
+            <a:r>
+              <a:rPr sz="2000" b="1"/>
+              <a:t>🖐 Try it yourself</a:t>
+            </a:r>
+          </a:p>
+          <a:p>
+            <a:pPr lvl="0" indent="0" marL="1270000">
+              <a:buNone/>
+            </a:pPr>
+            <a:r>
+              <a:rPr sz="2000"/>
+              <a:t>By the end you’ll have downloaded a real NOAA climate record and estimated how many degrees per decade Duluth has warmed.</a:t>
+            </a:r>
+          </a:p>
+        </p:txBody>
+      </p:sp>
+      <p:sp>
+        <p:nvSpPr>
+          <p:cNvPr id="4" name="Content Placeholder 3"/>
+          <p:cNvSpPr>
+            <a:spLocks noGrp="1"/>
+          </p:cNvSpPr>
+          <p:nvPr>
+            <p:ph idx="2" sz="half"/>
+          </p:nvPr>
+        </p:nvSpPr>
+        <p:spPr/>
+        <p:txBody>
+          <a:bodyPr/>
+          <a:lstStyle/>
+          <a:p>
+            <a:pPr lvl="0" indent="0" marL="0">
+              <a:buNone/>
+            </a:pPr>
+            <a:r>
+              <a:rPr b="1"/>
+              <a:t>Tools today:</a:t>
+            </a:r>
+          </a:p>
+          <a:p>
+            <a:pPr lvl="0"/>
+            <a:r>
+              <a:rPr>
+                <a:latin typeface="Courier"/>
+              </a:rPr>
+              <a:t>GSODR</a:t>
+            </a:r>
+            <a:r>
+              <a:rPr/>
+              <a:t>, </a:t>
+            </a:r>
+            <a:r>
+              <a:rPr>
+                <a:latin typeface="Courier"/>
+              </a:rPr>
+              <a:t>tidyverse</a:t>
+            </a:r>
+            <a:r>
+              <a:rPr/>
+              <a:t>, </a:t>
+            </a:r>
+            <a:r>
+              <a:rPr>
+                <a:latin typeface="Courier"/>
+              </a:rPr>
+              <a:t>lubridate</a:t>
+            </a:r>
+          </a:p>
+          <a:p>
+            <a:pPr lvl="0" indent="0" marL="0">
+              <a:buNone/>
+            </a:pPr>
+            <a:r>
+              <a:rPr b="1"/>
+              <a:t>Textbook:</a:t>
+            </a:r>
+          </a:p>
+          <a:p>
+            <a:pPr lvl="0"/>
+            <a:r>
+              <a:rPr/>
+              <a:t>📖 R for Data Science 2e — Hadley Wickham</a:t>
+            </a:r>
+          </a:p>
+          <a:p>
+            <a:pPr lvl="1"/>
+            <a:r>
+              <a:rPr>
+                <a:hlinkClick r:id="rId2"/>
+              </a:rPr>
+              <a:t>Ch. 3 Data transformation</a:t>
+            </a:r>
+          </a:p>
+          <a:p>
+            <a:pPr lvl="1"/>
+            <a:r>
+              <a:rPr>
+                <a:hlinkClick r:id="rId3"/>
+              </a:rPr>
+              <a:t>Ch. 17 Dates and times</a:t>
+            </a:r>
+          </a:p>
+          <a:p>
+            <a:pPr lvl="0"/>
+            <a:r>
+              <a:rPr/>
+              <a:t>📖 Data Carpentry — </a:t>
+            </a:r>
+            <a:r>
+              <a:rPr>
+                <a:hlinkClick r:id="rId4"/>
+              </a:rPr>
+              <a:t>R for Ecologists</a:t>
+            </a:r>
+          </a:p>
+          <a:p>
+            <a:pPr lvl="0" indent="0" marL="0">
+              <a:buNone/>
+            </a:pPr>
+            <a:r>
+              <a:rPr b="1"/>
+              <a:t>Naming conventions:</a:t>
+            </a:r>
+          </a:p>
+          <a:p>
+            <a:pPr lvl="0"/>
+            <a:r>
+              <a:rPr/>
+              <a:t>data frames → </a:t>
+            </a:r>
+            <a:r>
+              <a:rPr>
+                <a:latin typeface="Courier"/>
+              </a:rPr>
+              <a:t>_df</a:t>
+            </a:r>
+          </a:p>
+          <a:p>
+            <a:pPr lvl="0"/>
+            <a:r>
+              <a:rPr/>
+              <a:t>plots → </a:t>
+            </a:r>
+            <a:r>
+              <a:rPr>
+                <a:latin typeface="Courier"/>
+              </a:rPr>
+              <a:t>_plot</a:t>
+            </a:r>
+          </a:p>
+          <a:p>
+            <a:pPr lvl="0"/>
+            <a:r>
+              <a:rPr/>
+              <a:t>models → </a:t>
+            </a:r>
+            <a:r>
+              <a:rPr>
+                <a:latin typeface="Courier"/>
+              </a:rPr>
+              <a:t>_model</a:t>
+            </a:r>
+          </a:p>
+        </p:txBody>
+      </p:sp>
+    </p:spTree>
+  </p:cSld>
+</p:sld>
+</file>
+
+<file path=ppt/slides/slide4.xml><?xml version="1.0" encoding="utf-8"?>
+<p:sld xmlns:a="http://schemas.openxmlformats.org/drawingml/2006/main" xmlns:r="http://schemas.openxmlformats.org/officeDocument/2006/relationships" xmlns:p="http://schemas.openxmlformats.org/presentationml/2006/main">
+  <p:cSld>
+    <p:spTree>
+      <p:nvGrpSpPr>
+        <p:cNvPr id="1" name=""/>
+        <p:cNvGrpSpPr/>
+        <p:nvPr/>
+      </p:nvGrpSpPr>
+      <p:grpSpPr>
+        <a:xfrm>
+          <a:off x="0" y="0"/>
+          <a:ext cx="0" cy="0"/>
+          <a:chOff x="0" y="0"/>
+          <a:chExt cx="0" cy="0"/>
+        </a:xfrm>
+      </p:grpSpPr>
+      <p:sp>
+        <p:nvSpPr>
+          <p:cNvPr id="2" name="Title 1"/>
+          <p:cNvSpPr>
+            <a:spLocks noGrp="1"/>
+          </p:cNvSpPr>
+          <p:nvPr>
+            <p:ph type="title"/>
+          </p:nvPr>
+        </p:nvSpPr>
+        <p:spPr>
+          <a:xfrm>
+            <a:off x="0" y="0"/>
+            <a:ext cx="9144000" cy="602780"/>
+          </a:xfrm>
+          <a:solidFill>
+            <a:srgbClr val="1A1A2E"/>
+          </a:solidFill>
+        </p:spPr>
+        <p:txBody>
+          <a:bodyPr/>
+          <a:lstStyle/>
+          <a:p>
+            <a:pPr lvl="0" indent="0" marL="0">
+              <a:buNone/>
+            </a:pPr>
+            <a:r>
+              <a:rPr/>
+              <a:t>Where Does This Data Come From?</a:t>
+            </a:r>
+          </a:p>
+        </p:txBody>
+      </p:sp>
+      <p:sp>
+        <p:nvSpPr>
+          <p:cNvPr id="3" name="Content Placeholder 2"/>
+          <p:cNvSpPr>
+            <a:spLocks noGrp="1"/>
+          </p:cNvSpPr>
+          <p:nvPr>
+            <p:ph idx="1" sz="half"/>
+          </p:nvPr>
+        </p:nvSpPr>
+        <p:spPr/>
+        <p:txBody>
+          <a:bodyPr/>
+          <a:lstStyle/>
+          <a:p>
+            <a:pPr lvl="0" indent="0" marL="0">
+              <a:buNone/>
+            </a:pPr>
+            <a:r>
+              <a:rPr b="1"/>
+              <a:t>GSOD</a:t>
+            </a:r>
+            <a:r>
+              <a:rPr/>
+              <a:t> = Global Surface Summary of the Day, maintained by NOAA. It contains daily weather observations from thousands of stations worldwide, some going back to the </a:t>
+            </a:r>
+            <a:r>
+              <a:rPr b="1"/>
+              <a:t>1940s</a:t>
+            </a:r>
+            <a:r>
+              <a:rPr/>
+              <a:t>.</a:t>
+            </a:r>
+          </a:p>
+          <a:p>
+            <a:pPr lvl="0" indent="0" marL="0">
+              <a:buNone/>
+            </a:pPr>
+            <a:r>
+              <a:rPr/>
+              <a:t>The </a:t>
+            </a:r>
+            <a:r>
+              <a:rPr>
+                <a:latin typeface="Courier"/>
+              </a:rPr>
+              <a:t>GSODR</a:t>
+            </a:r>
+            <a:r>
+              <a:rPr/>
+              <a:t> package lets us pull this data </a:t>
+            </a:r>
+            <a:r>
+              <a:rPr b="1"/>
+              <a:t>directly into R</a:t>
+            </a:r>
+            <a:r>
+              <a:rPr/>
+              <a:t> — no manual download, no Excel, no copy-paste.</a:t>
+            </a:r>
+          </a:p>
+          <a:p>
+            <a:pPr lvl="0" indent="0" marL="0">
+              <a:buNone/>
+            </a:pPr>
+            <a:r>
+              <a:rPr b="1"/>
+              <a:t>The station we’ll use:</a:t>
+            </a:r>
+          </a:p>
+          <a:p>
+            <a:pPr lvl="0"/>
+            <a:r>
+              <a:rPr/>
+              <a:t>Duluth International Airport</a:t>
+            </a:r>
+          </a:p>
+          <a:p>
+            <a:pPr lvl="0"/>
+            <a:r>
+              <a:rPr/>
+              <a:t>Station ID </a:t>
+            </a:r>
+            <a:r>
+              <a:rPr>
+                <a:latin typeface="Courier"/>
+              </a:rPr>
+              <a:t>727450-14913</a:t>
+            </a:r>
+          </a:p>
+          <a:p>
+            <a:pPr lvl="0"/>
+            <a:r>
+              <a:rPr/>
+              <a:t>Daily records back to </a:t>
+            </a:r>
+            <a:r>
+              <a:rPr b="1"/>
+              <a:t>1948</a:t>
+            </a:r>
+            <a:r>
+              <a:rPr/>
+              <a:t> — 78 years of data</a:t>
+            </a:r>
+          </a:p>
+        </p:txBody>
+      </p:sp>
+      <p:sp>
+        <p:nvSpPr>
+          <p:cNvPr id="4" name="Content Placeholder 3"/>
+          <p:cNvSpPr>
+            <a:spLocks noGrp="1"/>
+          </p:cNvSpPr>
+          <p:nvPr>
+            <p:ph idx="2" sz="half"/>
+          </p:nvPr>
+        </p:nvSpPr>
+        <p:spPr/>
+        <p:txBody>
+          <a:bodyPr/>
+          <a:lstStyle/>
+          <a:p>
+            <a:pPr lvl="0" indent="0" marL="0">
+              <a:buNone/>
+            </a:pPr>
+            <a:r>
+              <a:rPr b="1"/>
+              <a:t>Why this matters:</a:t>
+            </a:r>
+          </a:p>
+          <a:p>
+            <a:pPr lvl="0"/>
+            <a:r>
+              <a:rPr/>
+              <a:t>This is the </a:t>
+            </a:r>
+            <a:r>
+              <a:rPr i="1"/>
+              <a:t>same</a:t>
+            </a:r>
+            <a:r>
+              <a:rPr/>
+              <a:t> kind of messy, real-world data you’ll meet in your own research</a:t>
+            </a:r>
+          </a:p>
+          <a:p>
+            <a:pPr lvl="0"/>
+            <a:r>
+              <a:rPr/>
+              <a:t>Today’s workflow — download → explore → summarize → model — is the same workflow you’ll use for your final project</a:t>
+            </a:r>
+          </a:p>
+          <a:p>
+            <a:pPr lvl="0" indent="0" marL="0">
+              <a:buNone/>
+            </a:pPr>
+            <a:r>
+              <a:rPr/>
+              <a:t>📖 R4DS Ch. 3 — every analysis starts with getting data into R</a:t>
+            </a:r>
+          </a:p>
+        </p:txBody>
+      </p:sp>
+    </p:spTree>
+  </p:cSld>
+</p:sld>
+</file>
+
+<file path=ppt/slides/slide5.xml><?xml version="1.0" encoding="utf-8"?>
+<p:sld xmlns:a="http://schemas.openxmlformats.org/drawingml/2006/main" xmlns:r="http://schemas.openxmlformats.org/officeDocument/2006/relationships" xmlns:p="http://schemas.openxmlformats.org/presentationml/2006/main">
+  <p:cSld>
+    <p:spTree>
+      <p:nvGrpSpPr>
+        <p:cNvPr id="1" name=""/>
+        <p:cNvGrpSpPr/>
+        <p:nvPr/>
+      </p:nvGrpSpPr>
+      <p:grpSpPr>
+        <a:xfrm>
+          <a:off x="0" y="0"/>
+          <a:ext cx="0" cy="0"/>
+          <a:chOff x="0" y="0"/>
+          <a:chExt cx="0" cy="0"/>
+        </a:xfrm>
+      </p:grpSpPr>
+      <p:sp>
+        <p:nvSpPr>
+          <p:cNvPr id="2" name="Title 1"/>
+          <p:cNvSpPr>
+            <a:spLocks noGrp="1"/>
+          </p:cNvSpPr>
+          <p:nvPr>
+            <p:ph type="title"/>
+          </p:nvPr>
+        </p:nvSpPr>
+        <p:spPr>
+          <a:xfrm>
+            <a:off x="0" y="0"/>
+            <a:ext cx="9144000" cy="602780"/>
+          </a:xfrm>
+          <a:solidFill>
+            <a:srgbClr val="1A1A2E"/>
+          </a:solidFill>
+        </p:spPr>
+        <p:txBody>
+          <a:bodyPr/>
+          <a:lstStyle/>
+          <a:p>
+            <a:pPr lvl="0" indent="0" marL="0">
+              <a:buNone/>
+            </a:pPr>
+            <a:r>
+              <a:rPr/>
+              <a:t>Load Libraries and Download the Data</a:t>
+            </a:r>
+          </a:p>
+        </p:txBody>
+      </p:sp>
+      <p:sp>
+        <p:nvSpPr>
+          <p:cNvPr id="3" name="Content Placeholder 2"/>
+          <p:cNvSpPr>
+            <a:spLocks noGrp="1"/>
+          </p:cNvSpPr>
+          <p:nvPr>
+            <p:ph idx="1" sz="half"/>
+          </p:nvPr>
+        </p:nvSpPr>
+        <p:spPr/>
+        <p:txBody>
+          <a:bodyPr/>
+          <a:lstStyle/>
+          <a:p>
+            <a:pPr lvl="0" indent="0">
+              <a:buNone/>
+            </a:pPr>
+            <a:r>
+              <a:rPr>
+                <a:solidFill>
+                  <a:srgbClr val="5E5E5E"/>
+                </a:solidFill>
+                <a:latin typeface="Courier"/>
+              </a:rPr>
+              <a:t># Load packages at the top — always -------------------</a:t>
+            </a:r>
+            <a:br/>
+            <a:r>
+              <a:rPr>
+                <a:solidFill>
+                  <a:srgbClr val="4758AB"/>
+                </a:solidFill>
+                <a:latin typeface="Courier"/>
+              </a:rPr>
+              <a:t>library</a:t>
+            </a:r>
+            <a:r>
+              <a:rPr>
+                <a:solidFill>
+                  <a:srgbClr val="003B4F"/>
+                </a:solidFill>
+                <a:latin typeface="Courier"/>
+              </a:rPr>
+              <a:t>(tidyverse)   </a:t>
+            </a:r>
+            <a:r>
+              <a:rPr>
+                <a:solidFill>
+                  <a:srgbClr val="5E5E5E"/>
+                </a:solidFill>
+                <a:latin typeface="Courier"/>
+              </a:rPr>
+              <a:t># data manipulation + ggplot2</a:t>
+            </a:r>
+            <a:br/>
+            <a:r>
+              <a:rPr>
+                <a:solidFill>
+                  <a:srgbClr val="4758AB"/>
+                </a:solidFill>
+                <a:latin typeface="Courier"/>
+              </a:rPr>
+              <a:t>library</a:t>
+            </a:r>
+            <a:r>
+              <a:rPr>
+                <a:solidFill>
+                  <a:srgbClr val="003B4F"/>
+                </a:solidFill>
+                <a:latin typeface="Courier"/>
+              </a:rPr>
+              <a:t>(GSODR)        </a:t>
+            </a:r>
+            <a:r>
+              <a:rPr>
+                <a:solidFill>
+                  <a:srgbClr val="5E5E5E"/>
+                </a:solidFill>
+                <a:latin typeface="Courier"/>
+              </a:rPr>
+              <a:t># download NOAA weather station data</a:t>
+            </a:r>
+          </a:p>
+          <a:p>
+            <a:pPr lvl="0" indent="0">
+              <a:buNone/>
+            </a:pPr>
+            <a:r>
+              <a:rPr>
+                <a:solidFill>
+                  <a:srgbClr val="5E5E5E"/>
+                </a:solidFill>
+                <a:latin typeface="Courier"/>
+              </a:rPr>
+              <a:t># Download daily Duluth weather data, 1948-2025 --------</a:t>
+            </a:r>
+            <a:br/>
+            <a:r>
+              <a:rPr>
+                <a:solidFill>
+                  <a:srgbClr val="5E5E5E"/>
+                </a:solidFill>
+                <a:latin typeface="Courier"/>
+              </a:rPr>
+              <a:t># this is DAILY data - rows = days, so expect ~28,000 rows</a:t>
+            </a:r>
+            <a:br/>
+            <a:r>
+              <a:rPr>
+                <a:solidFill>
+                  <a:srgbClr val="003B4F"/>
+                </a:solidFill>
+                <a:latin typeface="Courier"/>
+              </a:rPr>
+              <a:t>duluth_df &lt;- </a:t>
+            </a:r>
+            <a:r>
+              <a:rPr>
+                <a:solidFill>
+                  <a:srgbClr val="4758AB"/>
+                </a:solidFill>
+                <a:latin typeface="Courier"/>
+              </a:rPr>
+              <a:t>get_GSOD</a:t>
+            </a:r>
+            <a:r>
+              <a:rPr>
+                <a:solidFill>
+                  <a:srgbClr val="003B4F"/>
+                </a:solidFill>
+                <a:latin typeface="Courier"/>
+              </a:rPr>
+              <a:t>(</a:t>
+            </a:r>
+            <a:r>
+              <a:rPr>
+                <a:solidFill>
+                  <a:srgbClr val="657422"/>
+                </a:solidFill>
+                <a:latin typeface="Courier"/>
+              </a:rPr>
+              <a:t>years =</a:t>
+            </a:r>
+            <a:r>
+              <a:rPr>
+                <a:solidFill>
+                  <a:srgbClr val="003B4F"/>
+                </a:solidFill>
+                <a:latin typeface="Courier"/>
+              </a:rPr>
+              <a:t> </a:t>
+            </a:r>
+            <a:r>
+              <a:rPr>
+                <a:solidFill>
+                  <a:srgbClr val="AD0000"/>
+                </a:solidFill>
+                <a:latin typeface="Courier"/>
+              </a:rPr>
+              <a:t>1948</a:t>
+            </a:r>
+            <a:r>
+              <a:rPr>
+                <a:solidFill>
+                  <a:srgbClr val="5E5E5E"/>
+                </a:solidFill>
+                <a:latin typeface="Courier"/>
+              </a:rPr>
+              <a:t>:</a:t>
+            </a:r>
+            <a:r>
+              <a:rPr>
+                <a:solidFill>
+                  <a:srgbClr val="AD0000"/>
+                </a:solidFill>
+                <a:latin typeface="Courier"/>
+              </a:rPr>
+              <a:t>2025</a:t>
+            </a:r>
+            <a:r>
+              <a:rPr>
+                <a:solidFill>
+                  <a:srgbClr val="003B4F"/>
+                </a:solidFill>
+                <a:latin typeface="Courier"/>
+              </a:rPr>
+              <a:t>,</a:t>
+            </a:r>
+            <a:br/>
+            <a:r>
+              <a:rPr>
+                <a:solidFill>
+                  <a:srgbClr val="003B4F"/>
+                </a:solidFill>
+                <a:latin typeface="Courier"/>
+              </a:rPr>
+              <a:t>                       </a:t>
+            </a:r>
+            <a:r>
+              <a:rPr>
+                <a:solidFill>
+                  <a:srgbClr val="657422"/>
+                </a:solidFill>
+                <a:latin typeface="Courier"/>
+              </a:rPr>
+              <a:t>station =</a:t>
+            </a:r>
+            <a:r>
+              <a:rPr>
+                <a:solidFill>
+                  <a:srgbClr val="003B4F"/>
+                </a:solidFill>
+                <a:latin typeface="Courier"/>
+              </a:rPr>
+              <a:t> </a:t>
+            </a:r>
+            <a:r>
+              <a:rPr>
+                <a:solidFill>
+                  <a:srgbClr val="20794D"/>
+                </a:solidFill>
+                <a:latin typeface="Courier"/>
+              </a:rPr>
+              <a:t>"727450-14913"</a:t>
+            </a:r>
+            <a:r>
+              <a:rPr>
+                <a:solidFill>
+                  <a:srgbClr val="003B4F"/>
+                </a:solidFill>
+                <a:latin typeface="Courier"/>
+              </a:rPr>
+              <a:t>)</a:t>
+            </a:r>
+          </a:p>
+          <a:p>
+            <a:pPr lvl="0" indent="0">
+              <a:buNone/>
+            </a:pPr>
+            <a:r>
+              <a:rPr>
+                <a:solidFill>
+                  <a:srgbClr val="5E5E5E"/>
+                </a:solidFill>
+                <a:latin typeface="Courier"/>
+              </a:rPr>
+              <a:t># Look at what we got -----------------------------------</a:t>
+            </a:r>
+            <a:br/>
+            <a:r>
+              <a:rPr>
+                <a:solidFill>
+                  <a:srgbClr val="4758AB"/>
+                </a:solidFill>
+                <a:latin typeface="Courier"/>
+              </a:rPr>
+              <a:t>glimpse</a:t>
+            </a:r>
+            <a:r>
+              <a:rPr>
+                <a:solidFill>
+                  <a:srgbClr val="003B4F"/>
+                </a:solidFill>
+                <a:latin typeface="Courier"/>
+              </a:rPr>
+              <a:t>(duluth_df)</a:t>
+            </a:r>
+          </a:p>
+          <a:p>
+            <a:pPr lvl="0" indent="0">
+              <a:buNone/>
+            </a:pPr>
+            <a:r>
+              <a:rPr>
+                <a:latin typeface="Courier"/>
+              </a:rPr>
+              <a:t>Rows: 25,441
+Columns: 47
+$ STNID            &lt;chr&gt; "727450-14913", "727450-14913", "727450-14913", "7274…
+$ NAME             &lt;chr&gt; "DULUTH INTERNATIONAL AIRPORT", "DULUTH INTERNATIONAL…
+$ CTRY             &lt;chr&gt; "US", "US", "US", "US", "US", "US", "US", "US", "US",…
+$ COUNTRY_NAME     &lt;chr&gt; "UNITED STATES", "UNITED STATES", "UNITED STATES", "U…
+$ ISO2C            &lt;chr&gt; "US", "US", "US", "US", "US", "US", "US", "US", "US",…
+$ ISO3C            &lt;chr&gt; "USA", "USA", "USA", "USA", "USA", "USA", "USA", "USA…
+$ STATE            &lt;chr&gt; "MN", "MN", "MN", "MN", "MN", "MN", "MN", "MN", "MN",…
+$ LATITUDE         &lt;dbl&gt; 46.844, 46.844, 46.844, 46.844, 46.844, 46.844, 46.84…
+$ LONGITUDE        &lt;dbl&gt; -92.187, -92.187, -92.187, -92.187, -92.187, -92.187,…
+$ ELEVATION        &lt;dbl&gt; 436.8, 436.8, 436.8, 436.8, 436.8, 436.8, 436.8, 436.…
+$ BEGIN            &lt;int&gt; 19480101, 19480101, 19480101, 19480101, 19480101, 194…
+$ END              &lt;int&gt; 20250827, 20250827, 20250827, 20250827, 20250827, 202…
+$ YEARMODA         &lt;date&gt; 1948-01-01, 1948-01-02, 1948-01-03, 1948-01-04, 1948…
+$ YEAR             &lt;int&gt; 1948, 1948, 1948, 1948, 1948, 1948, 1948, 1948, 1948,…
+$ MONTH            &lt;int&gt; 1, 1, 1, 1, 1, 1, 1, 1, 1, 1, 1, 1, 1, 1, 1, 1, 1, 1,…
+$ DAY              &lt;int&gt; 1, 2, 3, 4, 5, 6, 7, 8, 9, 10, 11, 12, 13, 14, 15, 16…
+$ YDAY             &lt;int&gt; 1, 2, 3, 4, 5, 6, 7, 8, 9, 10, 11, 12, 13, 14, 15, 16…
+$ TEMP             &lt;dbl&gt; -8.2, -4.1, -8.4, -6.5, -2.9, -7.8, -8.8, -4.0, -5.8,…
+$ TEMP_ATTRIBUTES  &lt;int&gt; 18, 24, 24, 24, 24, 24, 24, 24, 24, 24, 24, 24, 24, 2…
+$ DEWP             &lt;dbl&gt; -9.9, -6.5, -10.8, -8.8, -5.9, -12.2, -13.2, -5.8, -6…
+$ DEWP_ATTRIBUTES  &lt;int&gt; 18, 24, 24, 24, 24, 24, 24, 24, 24, 24, 24, 24, 24, 2…
+$ SLP              &lt;dbl&gt; 1019.8, 1011.1, 1010.0, 1016.8, 1016.3, 1019.3, 1015.…
+$ SLP_ATTRIBUTES   &lt;int&gt; 18, 24, 24, 24, 24, 24, 24, 24, 24, 24, 24, 24, 24, 2…
+$ STP              &lt;dbl&gt; 965.3, 958.0, 956.6, 963.1, 962.9, 965.6, 961.8, 957.…
+$ STP_ATTRIBUTES   &lt;int&gt; 18, 24, 24, 24, 24, 24, 24, 24, 24, 23, 24, 24, 24, 2…
+$ VISIB            &lt;dbl&gt; 22.0, 22.7, 18.0, 22.4, 23.2, 24.0, 23.7, 15.0, 16.6,…
+$ VISIB_ATTRIBUTES &lt;int&gt; 18, 24, 24, 24, 24, 24, 24, 24, 24, 24, 24, 24, 24, 2…
+$ WDSP             &lt;dbl&gt; 4.4, 4.3, 3.0, 4.9, 6.4, 8.3, 3.8, 2.8, 5.9, 2.7, 5.5…
+$ WDSP_ATTRIBUTES  &lt;int&gt; 18, 24, 24, 24, 24, 24, 24, 24, 24, 24, 24, 24, 24, 2…
+$ MXSPD            &lt;dbl&gt; 8.2, 8.8, 7.2, 8.2, 11.8, 11.8, 7.2, 6.2, 11.8, 5.2, …
+$ GUST             &lt;dbl&gt; NA, NA, NA, NA, NA, NA, NA, NA, NA, NA, NA, NA, NA, N…
+$ MAX              &lt;dbl&gt; -3.1, -2.0, -5.4, -1.5, 1.3, -1.7, -2.6, -2.0, -2.2, …
+$ MAX_ATTRIBUTES   &lt;chr&gt; NA, NA, NA, NA, NA, "*", NA, NA, "*", NA, NA, "*", "*…
+$ MIN              &lt;dbl&gt; -15.6, -8.7, -12.8, -9.8, -7.0, -15.4, -15.0, -6.5, -…
+$ MIN_ATTRIBUTES   &lt;chr&gt; "*", NA, "*", NA, NA, NA, "*", NA, NA, "*", "*", NA, …
+$ PRCP             &lt;dbl&gt; 0.00, 0.00, 0.00, 0.00, 0.00, 0.00, 0.00, 7.87, 0.00,…
+$ PRCP_ATTRIBUTES  &lt;chr&gt; "G", "G", "G", "G", "G", "G", "G", "G", "G", "G", "G"…
+$ SNDP             &lt;dbl&gt; 279.4, 279.4, 279.4, 279.4, 248.9, 248.9, 248.9, 248.…
+$ I_FOG            &lt;dbl&gt; 0, 1, 1, 1, 0, 0, 0, 0, 0, 0, 1, 0, 0, 0, 0, 0, 0, 0,…
+$ I_RAIN_DRIZZLE   &lt;dbl&gt; 0, 0, 0, 0, 0, 0, 0, 1, 1, 0, 0, 0, 0, 0, 0, 0, 0, 0,…
+$ I_SNOW_ICE       &lt;dbl&gt; 1, 1, 1, 1, 1, 0, 0, 1, 1, 0, 1, 1, 1, 0, 1, 0, 0, 1,…
+$ I_HAIL           &lt;dbl&gt; 0, 0, 0, 0, 0, 0, 0, 0, 0, 0, 0, 0, 0, 0, 0, 0, 0, 0,…
+$ I_THUNDER        &lt;dbl&gt; 0, 0, 0, 0, 0, 0, 0, 0, 0, 0, 0, 0, 0, 0, 0, 0, 0, 0,…
+$ I_TORNADO_FUNNEL &lt;dbl&gt; 0, 0, 0, 0, 0, 0, 0, 0, 0, 0, 0, 0, 0, 0, 0, 0, 0, 0,…
+$ EA               &lt;dbl&gt; 0.3, 0.4, 0.3, 0.3, 0.4, 0.2, 0.2, 0.4, 0.4, 0.1, 0.3…
+$ ES               &lt;dbl&gt; 0.3, 0.5, 0.3, 0.4, 0.5, 0.3, 0.3, 0.5, 0.4, 0.1, 0.3…
+$ RH               &lt;dbl&gt; 87.5, 83.4, 82.8, 83.7, 79.8, 70.7, 70.5, 87.3, 91.9,…</a:t>
+            </a:r>
+          </a:p>
+        </p:txBody>
+      </p:sp>
+      <p:sp>
+        <p:nvSpPr>
+          <p:cNvPr id="4" name="Content Placeholder 3"/>
+          <p:cNvSpPr>
+            <a:spLocks noGrp="1"/>
+          </p:cNvSpPr>
+          <p:nvPr>
+            <p:ph idx="2" sz="half"/>
+          </p:nvPr>
+        </p:nvSpPr>
+        <p:spPr/>
+        <p:txBody>
+          <a:bodyPr/>
+          <a:lstStyle/>
+          <a:p>
+            <a:pPr lvl="0" indent="0" marL="0">
+              <a:buNone/>
+            </a:pPr>
+            <a:r>
+              <a:rPr b="1"/>
+              <a:t>What just happened:</a:t>
+            </a:r>
+          </a:p>
+          <a:p>
+            <a:pPr lvl="0"/>
+            <a:r>
+              <a:rPr>
+                <a:latin typeface="Courier"/>
+              </a:rPr>
+              <a:t>get_GSOD()</a:t>
+            </a:r>
+            <a:r>
+              <a:rPr/>
+              <a:t> reached out to NOAA’s servers and pulled every daily record for this station</a:t>
+            </a:r>
+          </a:p>
+          <a:p>
+            <a:pPr lvl="0"/>
+            <a:r>
+              <a:rPr>
+                <a:latin typeface="Courier"/>
+              </a:rPr>
+              <a:t>years = 1948:2025</a:t>
+            </a:r>
+            <a:r>
+              <a:rPr/>
+              <a:t> is a vector — shorthand for “every year in this range”</a:t>
+            </a:r>
+          </a:p>
+          <a:p>
+            <a:pPr lvl="0"/>
+            <a:r>
+              <a:rPr/>
+              <a:t>This download can take a minute — daily data for 78 years is a lot of rows!</a:t>
+            </a:r>
+          </a:p>
+          <a:p>
+            <a:pPr lvl="0" indent="0" marL="1270000">
+              <a:buNone/>
+            </a:pPr>
+            <a:r>
+              <a:rPr sz="2000" b="1"/>
+              <a:t>Important</a:t>
+            </a:r>
+          </a:p>
+          <a:p>
+            <a:pPr lvl="0" indent="0" marL="1270000">
+              <a:buNone/>
+            </a:pPr>
+            <a:r>
+              <a:rPr sz="2000"/>
+              <a:t>Don’t panic at the row count. </a:t>
+            </a:r>
+            <a:r>
+              <a:rPr sz="2000" b="1"/>
+              <a:t>Daily</a:t>
+            </a:r>
+            <a:r>
+              <a:rPr sz="2000"/>
+              <a:t> data for 78 years ≈ 28,000 rows. We will fix that with summarizing.</a:t>
+            </a:r>
+          </a:p>
+        </p:txBody>
+      </p:sp>
+    </p:spTree>
+  </p:cSld>
+</p:sld>
+</file>
+
+<file path=ppt/slides/slide6.xml><?xml version="1.0" encoding="utf-8"?>
+<p:sld xmlns:a="http://schemas.openxmlformats.org/drawingml/2006/main" xmlns:r="http://schemas.openxmlformats.org/officeDocument/2006/relationships" xmlns:p="http://schemas.openxmlformats.org/presentationml/2006/main">
+  <p:cSld>
+    <p:spTree>
+      <p:nvGrpSpPr>
+        <p:cNvPr id="1" name=""/>
+        <p:cNvGrpSpPr/>
+        <p:nvPr/>
+      </p:nvGrpSpPr>
+      <p:grpSpPr>
+        <a:xfrm>
+          <a:off x="0" y="0"/>
+          <a:ext cx="0" cy="0"/>
+          <a:chOff x="0" y="0"/>
+          <a:chExt cx="0" cy="0"/>
+        </a:xfrm>
+      </p:grpSpPr>
+      <p:sp>
+        <p:nvSpPr>
+          <p:cNvPr id="2" name="Title 1"/>
+          <p:cNvSpPr>
+            <a:spLocks noGrp="1"/>
+          </p:cNvSpPr>
+          <p:nvPr>
+            <p:ph type="title"/>
+          </p:nvPr>
+        </p:nvSpPr>
+        <p:spPr>
+          <a:xfrm>
+            <a:off x="0" y="0"/>
+            <a:ext cx="9144000" cy="602780"/>
+          </a:xfrm>
+          <a:solidFill>
+            <a:srgbClr val="1A1A2E"/>
+          </a:solidFill>
+        </p:spPr>
+        <p:txBody>
+          <a:bodyPr/>
+          <a:lstStyle/>
+          <a:p>
+            <a:pPr lvl="0" indent="0" marL="0">
+              <a:buNone/>
+            </a:pPr>
+            <a:r>
+              <a:rPr/>
+              <a:t>Trim to What We Need</a:t>
+            </a:r>
+          </a:p>
+        </p:txBody>
+      </p:sp>
+      <p:sp>
+        <p:nvSpPr>
+          <p:cNvPr id="3" name="Content Placeholder 2"/>
+          <p:cNvSpPr>
+            <a:spLocks noGrp="1"/>
+          </p:cNvSpPr>
+          <p:nvPr>
+            <p:ph idx="1" sz="half"/>
+          </p:nvPr>
+        </p:nvSpPr>
+        <p:spPr/>
+        <p:txBody>
+          <a:bodyPr/>
+          <a:lstStyle/>
+          <a:p>
+            <a:pPr lvl="0" indent="0">
+              <a:buNone/>
+            </a:pPr>
+            <a:r>
+              <a:rPr>
+                <a:solidFill>
+                  <a:srgbClr val="5E5E5E"/>
+                </a:solidFill>
+                <a:latin typeface="Courier"/>
+              </a:rPr>
+              <a:t># Keep only the columns we actually need -----------------</a:t>
+            </a:r>
+            <a:br/>
+            <a:r>
+              <a:rPr>
+                <a:solidFill>
+                  <a:srgbClr val="003B4F"/>
+                </a:solidFill>
+                <a:latin typeface="Courier"/>
+              </a:rPr>
+              <a:t>dlh_temp_df &lt;- duluth_df </a:t>
+            </a:r>
+            <a:r>
+              <a:rPr>
+                <a:solidFill>
+                  <a:srgbClr val="5E5E5E"/>
+                </a:solidFill>
+                <a:latin typeface="Courier"/>
+              </a:rPr>
+              <a:t>%&gt;%</a:t>
+            </a:r>
+            <a:br/>
+            <a:r>
+              <a:rPr>
+                <a:solidFill>
+                  <a:srgbClr val="003B4F"/>
+                </a:solidFill>
+                <a:latin typeface="Courier"/>
+              </a:rPr>
+              <a:t>  </a:t>
+            </a:r>
+            <a:r>
+              <a:rPr>
+                <a:solidFill>
+                  <a:srgbClr val="4758AB"/>
+                </a:solidFill>
+                <a:latin typeface="Courier"/>
+              </a:rPr>
+              <a:t>select</a:t>
+            </a:r>
+            <a:r>
+              <a:rPr>
+                <a:solidFill>
+                  <a:srgbClr val="003B4F"/>
+                </a:solidFill>
+                <a:latin typeface="Courier"/>
+              </a:rPr>
+              <a:t>(</a:t>
+            </a:r>
+            <a:br/>
+            <a:r>
+              <a:rPr>
+                <a:solidFill>
+                  <a:srgbClr val="003B4F"/>
+                </a:solidFill>
+                <a:latin typeface="Courier"/>
+              </a:rPr>
+              <a:t>    STNID, NAME, YEARMODA,</a:t>
+            </a:r>
+            <a:br/>
+            <a:r>
+              <a:rPr>
+                <a:solidFill>
+                  <a:srgbClr val="003B4F"/>
+                </a:solidFill>
+                <a:latin typeface="Courier"/>
+              </a:rPr>
+              <a:t>    YEAR, MONTH, DAY,</a:t>
+            </a:r>
+            <a:br/>
+            <a:r>
+              <a:rPr>
+                <a:solidFill>
+                  <a:srgbClr val="003B4F"/>
+                </a:solidFill>
+                <a:latin typeface="Courier"/>
+              </a:rPr>
+              <a:t>    TEMP, MXSPD, PRCP, I_SNOW_ICE</a:t>
+            </a:r>
+            <a:br/>
+            <a:r>
+              <a:rPr>
+                <a:solidFill>
+                  <a:srgbClr val="003B4F"/>
+                </a:solidFill>
+                <a:latin typeface="Courier"/>
+              </a:rPr>
+              <a:t>  )</a:t>
+            </a:r>
+            <a:br/>
+            <a:br/>
+            <a:r>
+              <a:rPr>
+                <a:solidFill>
+                  <a:srgbClr val="4758AB"/>
+                </a:solidFill>
+                <a:latin typeface="Courier"/>
+              </a:rPr>
+              <a:t>head</a:t>
+            </a:r>
+            <a:r>
+              <a:rPr>
+                <a:solidFill>
+                  <a:srgbClr val="003B4F"/>
+                </a:solidFill>
+                <a:latin typeface="Courier"/>
+              </a:rPr>
+              <a:t>(dlh_temp_df)</a:t>
+            </a:r>
+          </a:p>
+          <a:p>
+            <a:pPr lvl="0" indent="0">
+              <a:buNone/>
+            </a:pPr>
+            <a:r>
+              <a:rPr>
+                <a:latin typeface="Courier"/>
+              </a:rPr>
+              <a:t>          STNID                         NAME   YEARMODA  YEAR MONTH   DAY  TEMP
+         &lt;char&gt;                       &lt;char&gt;     &lt;Date&gt; &lt;int&gt; &lt;int&gt; &lt;int&gt; &lt;num&gt;
+1: 727450-14913 DULUTH INTERNATIONAL AIRPORT 1948-01-01  1948     1     1  -8.2
+2: 727450-14913 DULUTH INTERNATIONAL AIRPORT 1948-01-02  1948     1     2  -4.1
+3: 727450-14913 DULUTH INTERNATIONAL AIRPORT 1948-01-03  1948     1     3  -8.4
+4: 727450-14913 DULUTH INTERNATIONAL AIRPORT 1948-01-04  1948     1     4  -6.5
+5: 727450-14913 DULUTH INTERNATIONAL AIRPORT 1948-01-05  1948     1     5  -2.9
+6: 727450-14913 DULUTH INTERNATIONAL AIRPORT 1948-01-06  1948     1     6  -7.8
+   MXSPD  PRCP I_SNOW_ICE
+   &lt;num&gt; &lt;num&gt;      &lt;num&gt;
+1:   8.2     0          1
+2:   8.8     0          1
+3:   7.2     0          1
+4:   8.2     0          1
+5:  11.8     0          1
+6:  11.8     0          0</a:t>
+            </a:r>
+          </a:p>
+        </p:txBody>
+      </p:sp>
+      <p:sp>
+        <p:nvSpPr>
+          <p:cNvPr id="4" name="Content Placeholder 3"/>
+          <p:cNvSpPr>
+            <a:spLocks noGrp="1"/>
+          </p:cNvSpPr>
+          <p:nvPr>
+            <p:ph idx="2" sz="half"/>
+          </p:nvPr>
+        </p:nvSpPr>
+        <p:spPr/>
+        <p:txBody>
+          <a:bodyPr/>
+          <a:lstStyle/>
+          <a:p>
+            <a:pPr lvl="0" indent="0" marL="0">
+              <a:buNone/>
+            </a:pPr>
+            <a:r>
+              <a:rPr b="1"/>
+              <a:t>Why </a:t>
+            </a:r>
+            <a:r>
+              <a:rPr b="1">
+                <a:latin typeface="Courier"/>
+              </a:rPr>
+              <a:t>select()</a:t>
+            </a:r>
+            <a:r>
+              <a:rPr b="1"/>
+              <a:t> here:</a:t>
+            </a:r>
+          </a:p>
+          <a:p>
+            <a:pPr lvl="0"/>
+            <a:r>
+              <a:rPr>
+                <a:latin typeface="Courier"/>
+              </a:rPr>
+              <a:t>get_GSOD()</a:t>
+            </a:r>
+            <a:r>
+              <a:rPr/>
+              <a:t> returns 40+ columns — station metadata, multiple temperature scales, attribute flags</a:t>
+            </a:r>
+          </a:p>
+          <a:p>
+            <a:pPr lvl="0"/>
+            <a:r>
+              <a:rPr/>
+              <a:t>We only need a handful for this question</a:t>
+            </a:r>
+          </a:p>
+          <a:p>
+            <a:pPr lvl="0"/>
+            <a:r>
+              <a:rPr/>
+              <a:t>This is the same </a:t>
+            </a:r>
+            <a:r>
+              <a:rPr>
+                <a:latin typeface="Courier"/>
+              </a:rPr>
+              <a:t>select()</a:t>
+            </a:r>
+            <a:r>
+              <a:rPr/>
+              <a:t> skill from Lecture 02 — applied to a much wider real-world file</a:t>
+            </a:r>
+          </a:p>
+          <a:p>
+            <a:pPr lvl="0" indent="0" marL="0">
+              <a:buNone/>
+            </a:pPr>
+            <a:r>
+              <a:rPr/>
+              <a:t>📖 R4DS Ch. 3.2 — </a:t>
+            </a:r>
+            <a:r>
+              <a:rPr>
+                <a:latin typeface="Courier"/>
+              </a:rPr>
+              <a:t>select()</a:t>
+            </a:r>
+            <a:r>
+              <a:rPr/>
+              <a:t> for picking columns</a:t>
+            </a:r>
+          </a:p>
+        </p:txBody>
+      </p:sp>
+    </p:spTree>
+  </p:cSld>
+</p:sld>
+</file>
+
+<file path=ppt/slides/slide7.xml><?xml version="1.0" encoding="utf-8"?>
+<p:sld xmlns:a="http://schemas.openxmlformats.org/drawingml/2006/main" xmlns:r="http://schemas.openxmlformats.org/officeDocument/2006/relationships" xmlns:p="http://schemas.openxmlformats.org/presentationml/2006/main">
+  <p:cSld>
+    <p:spTree>
+      <p:nvGrpSpPr>
+        <p:cNvPr id="1" name=""/>
+        <p:cNvGrpSpPr/>
+        <p:nvPr/>
+      </p:nvGrpSpPr>
+      <p:grpSpPr>
+        <a:xfrm>
+          <a:off x="0" y="0"/>
+          <a:ext cx="0" cy="0"/>
+          <a:chOff x="0" y="0"/>
+          <a:chExt cx="0" cy="0"/>
+        </a:xfrm>
+      </p:grpSpPr>
+      <p:sp>
+        <p:nvSpPr>
+          <p:cNvPr id="2" name="Title 1"/>
+          <p:cNvSpPr>
+            <a:spLocks noGrp="1"/>
+          </p:cNvSpPr>
+          <p:nvPr>
+            <p:ph type="title"/>
+          </p:nvPr>
+        </p:nvSpPr>
+        <p:spPr>
+          <a:xfrm>
+            <a:off x="139485" y="78119"/>
+            <a:ext cx="8229600" cy="607682"/>
+          </a:xfrm>
+        </p:spPr>
+        <p:txBody>
+          <a:bodyPr/>
+          <a:lstStyle/>
+          <a:p>
+            <a:pPr lvl="0" indent="0" marL="0">
+              <a:buNone/>
+            </a:pPr>
+            <a:r>
+              <a:rPr/>
+              <a:t>First Look — Plot the Raw Daily Data</a:t>
+            </a:r>
+          </a:p>
+        </p:txBody>
+      </p:sp>
+      <p:sp>
+        <p:nvSpPr>
+          <p:cNvPr id="3" name="Text Placeholder 2"/>
+          <p:cNvSpPr>
+            <a:spLocks noGrp="1"/>
+          </p:cNvSpPr>
+          <p:nvPr>
+            <p:ph idx="1" type="body"/>
+          </p:nvPr>
+        </p:nvSpPr>
+        <p:spPr/>
+        <p:txBody>
+          <a:bodyPr/>
+          <a:lstStyle/>
+          <a:p>
+            <a:pPr lvl="0" indent="0">
+              <a:buNone/>
+            </a:pPr>
+            <a:r>
+              <a:rPr>
+                <a:solidFill>
+                  <a:srgbClr val="5E5E5E"/>
+                </a:solidFill>
+                <a:latin typeface="Courier"/>
+              </a:rPr>
+              <a:t># Plot every single daily temperature ---------------------</a:t>
+            </a:r>
+            <a:br/>
+            <a:r>
+              <a:rPr>
+                <a:solidFill>
+                  <a:srgbClr val="003B4F"/>
+                </a:solidFill>
+                <a:latin typeface="Courier"/>
+              </a:rPr>
+              <a:t>raw_temp_plot &lt;- dlh_temp_df </a:t>
+            </a:r>
+            <a:r>
+              <a:rPr>
+                <a:solidFill>
+                  <a:srgbClr val="5E5E5E"/>
+                </a:solidFill>
+                <a:latin typeface="Courier"/>
+              </a:rPr>
+              <a:t>%&gt;%</a:t>
+            </a:r>
+            <a:br/>
+            <a:r>
+              <a:rPr>
+                <a:solidFill>
+                  <a:srgbClr val="003B4F"/>
+                </a:solidFill>
+                <a:latin typeface="Courier"/>
+              </a:rPr>
+              <a:t>  </a:t>
+            </a:r>
+            <a:r>
+              <a:rPr>
+                <a:solidFill>
+                  <a:srgbClr val="4758AB"/>
+                </a:solidFill>
+                <a:latin typeface="Courier"/>
+              </a:rPr>
+              <a:t>ggplot</a:t>
+            </a:r>
+            <a:r>
+              <a:rPr>
+                <a:solidFill>
+                  <a:srgbClr val="003B4F"/>
+                </a:solidFill>
+                <a:latin typeface="Courier"/>
+              </a:rPr>
+              <a:t>(</a:t>
+            </a:r>
+            <a:r>
+              <a:rPr>
+                <a:solidFill>
+                  <a:srgbClr val="4758AB"/>
+                </a:solidFill>
+                <a:latin typeface="Courier"/>
+              </a:rPr>
+              <a:t>aes</a:t>
+            </a:r>
+            <a:r>
+              <a:rPr>
+                <a:solidFill>
+                  <a:srgbClr val="003B4F"/>
+                </a:solidFill>
+                <a:latin typeface="Courier"/>
+              </a:rPr>
+              <a:t>(</a:t>
+            </a:r>
+            <a:r>
+              <a:rPr>
+                <a:solidFill>
+                  <a:srgbClr val="657422"/>
+                </a:solidFill>
+                <a:latin typeface="Courier"/>
+              </a:rPr>
+              <a:t>x =</a:t>
+            </a:r>
+            <a:r>
+              <a:rPr>
+                <a:solidFill>
+                  <a:srgbClr val="003B4F"/>
+                </a:solidFill>
+                <a:latin typeface="Courier"/>
+              </a:rPr>
+              <a:t> YEARMODA, </a:t>
+            </a:r>
+            <a:r>
+              <a:rPr>
+                <a:solidFill>
+                  <a:srgbClr val="657422"/>
+                </a:solidFill>
+                <a:latin typeface="Courier"/>
+              </a:rPr>
+              <a:t>y =</a:t>
+            </a:r>
+            <a:r>
+              <a:rPr>
+                <a:solidFill>
+                  <a:srgbClr val="003B4F"/>
+                </a:solidFill>
+                <a:latin typeface="Courier"/>
+              </a:rPr>
+              <a:t> TEMP)) </a:t>
+            </a:r>
+            <a:r>
+              <a:rPr>
+                <a:solidFill>
+                  <a:srgbClr val="5E5E5E"/>
+                </a:solidFill>
+                <a:latin typeface="Courier"/>
+              </a:rPr>
+              <a:t>+</a:t>
+            </a:r>
+            <a:br/>
+            <a:r>
+              <a:rPr>
+                <a:solidFill>
+                  <a:srgbClr val="003B4F"/>
+                </a:solidFill>
+                <a:latin typeface="Courier"/>
+              </a:rPr>
+              <a:t>  </a:t>
+            </a:r>
+            <a:r>
+              <a:rPr>
+                <a:solidFill>
+                  <a:srgbClr val="4758AB"/>
+                </a:solidFill>
+                <a:latin typeface="Courier"/>
+              </a:rPr>
+              <a:t>geom_point</a:t>
+            </a:r>
+            <a:r>
+              <a:rPr>
+                <a:solidFill>
+                  <a:srgbClr val="003B4F"/>
+                </a:solidFill>
+                <a:latin typeface="Courier"/>
+              </a:rPr>
+              <a:t>(</a:t>
+            </a:r>
+            <a:r>
+              <a:rPr>
+                <a:solidFill>
+                  <a:srgbClr val="657422"/>
+                </a:solidFill>
+                <a:latin typeface="Courier"/>
+              </a:rPr>
+              <a:t>alpha =</a:t>
+            </a:r>
+            <a:r>
+              <a:rPr>
+                <a:solidFill>
+                  <a:srgbClr val="003B4F"/>
+                </a:solidFill>
+                <a:latin typeface="Courier"/>
+              </a:rPr>
+              <a:t> </a:t>
+            </a:r>
+            <a:r>
+              <a:rPr>
+                <a:solidFill>
+                  <a:srgbClr val="AD0000"/>
+                </a:solidFill>
+                <a:latin typeface="Courier"/>
+              </a:rPr>
+              <a:t>0.2</a:t>
+            </a:r>
+            <a:r>
+              <a:rPr>
+                <a:solidFill>
+                  <a:srgbClr val="003B4F"/>
+                </a:solidFill>
+                <a:latin typeface="Courier"/>
+              </a:rPr>
+              <a:t>, </a:t>
+            </a:r>
+            <a:r>
+              <a:rPr>
+                <a:solidFill>
+                  <a:srgbClr val="657422"/>
+                </a:solidFill>
+                <a:latin typeface="Courier"/>
+              </a:rPr>
+              <a:t>size =</a:t>
+            </a:r>
+            <a:r>
+              <a:rPr>
+                <a:solidFill>
+                  <a:srgbClr val="003B4F"/>
+                </a:solidFill>
+                <a:latin typeface="Courier"/>
+              </a:rPr>
+              <a:t> </a:t>
+            </a:r>
+            <a:r>
+              <a:rPr>
+                <a:solidFill>
+                  <a:srgbClr val="AD0000"/>
+                </a:solidFill>
+                <a:latin typeface="Courier"/>
+              </a:rPr>
+              <a:t>0.5</a:t>
+            </a:r>
+            <a:r>
+              <a:rPr>
+                <a:solidFill>
+                  <a:srgbClr val="003B4F"/>
+                </a:solidFill>
+                <a:latin typeface="Courier"/>
+              </a:rPr>
+              <a:t>) </a:t>
+            </a:r>
+            <a:r>
+              <a:rPr>
+                <a:solidFill>
+                  <a:srgbClr val="5E5E5E"/>
+                </a:solidFill>
+                <a:latin typeface="Courier"/>
+              </a:rPr>
+              <a:t>+</a:t>
+            </a:r>
+            <a:br/>
+            <a:r>
+              <a:rPr>
+                <a:solidFill>
+                  <a:srgbClr val="003B4F"/>
+                </a:solidFill>
+                <a:latin typeface="Courier"/>
+              </a:rPr>
+              <a:t>  </a:t>
+            </a:r>
+            <a:r>
+              <a:rPr>
+                <a:solidFill>
+                  <a:srgbClr val="4758AB"/>
+                </a:solidFill>
+                <a:latin typeface="Courier"/>
+              </a:rPr>
+              <a:t>geom_line</a:t>
+            </a:r>
+            <a:r>
+              <a:rPr>
+                <a:solidFill>
+                  <a:srgbClr val="003B4F"/>
+                </a:solidFill>
+                <a:latin typeface="Courier"/>
+              </a:rPr>
+              <a:t>(</a:t>
+            </a:r>
+            <a:r>
+              <a:rPr>
+                <a:solidFill>
+                  <a:srgbClr val="657422"/>
+                </a:solidFill>
+                <a:latin typeface="Courier"/>
+              </a:rPr>
+              <a:t>alpha =</a:t>
+            </a:r>
+            <a:r>
+              <a:rPr>
+                <a:solidFill>
+                  <a:srgbClr val="003B4F"/>
+                </a:solidFill>
+                <a:latin typeface="Courier"/>
+              </a:rPr>
+              <a:t> </a:t>
+            </a:r>
+            <a:r>
+              <a:rPr>
+                <a:solidFill>
+                  <a:srgbClr val="AD0000"/>
+                </a:solidFill>
+                <a:latin typeface="Courier"/>
+              </a:rPr>
+              <a:t>0.3</a:t>
+            </a:r>
+            <a:r>
+              <a:rPr>
+                <a:solidFill>
+                  <a:srgbClr val="003B4F"/>
+                </a:solidFill>
+                <a:latin typeface="Courier"/>
+              </a:rPr>
+              <a:t>) </a:t>
+            </a:r>
+            <a:r>
+              <a:rPr>
+                <a:solidFill>
+                  <a:srgbClr val="5E5E5E"/>
+                </a:solidFill>
+                <a:latin typeface="Courier"/>
+              </a:rPr>
+              <a:t>+</a:t>
+            </a:r>
+            <a:br/>
+            <a:r>
+              <a:rPr>
+                <a:solidFill>
+                  <a:srgbClr val="003B4F"/>
+                </a:solidFill>
+                <a:latin typeface="Courier"/>
+              </a:rPr>
+              <a:t>  </a:t>
+            </a:r>
+            <a:r>
+              <a:rPr>
+                <a:solidFill>
+                  <a:srgbClr val="4758AB"/>
+                </a:solidFill>
+                <a:latin typeface="Courier"/>
+              </a:rPr>
+              <a:t>labs</a:t>
+            </a:r>
+            <a:r>
+              <a:rPr>
+                <a:solidFill>
+                  <a:srgbClr val="003B4F"/>
+                </a:solidFill>
+                <a:latin typeface="Courier"/>
+              </a:rPr>
+              <a:t>(</a:t>
+            </a:r>
+            <a:br/>
+            <a:r>
+              <a:rPr>
+                <a:solidFill>
+                  <a:srgbClr val="003B4F"/>
+                </a:solidFill>
+                <a:latin typeface="Courier"/>
+              </a:rPr>
+              <a:t>    </a:t>
+            </a:r>
+            <a:r>
+              <a:rPr>
+                <a:solidFill>
+                  <a:srgbClr val="657422"/>
+                </a:solidFill>
+                <a:latin typeface="Courier"/>
+              </a:rPr>
+              <a:t>title =</a:t>
+            </a:r>
+            <a:r>
+              <a:rPr>
+                <a:solidFill>
+                  <a:srgbClr val="003B4F"/>
+                </a:solidFill>
+                <a:latin typeface="Courier"/>
+              </a:rPr>
+              <a:t> </a:t>
+            </a:r>
+            <a:r>
+              <a:rPr>
+                <a:solidFill>
+                  <a:srgbClr val="20794D"/>
+                </a:solidFill>
+                <a:latin typeface="Courier"/>
+              </a:rPr>
+              <a:t>"Duluth Daily Mean Temperature, 1948–2025"</a:t>
+            </a:r>
+            <a:r>
+              <a:rPr>
+                <a:solidFill>
+                  <a:srgbClr val="003B4F"/>
+                </a:solidFill>
+                <a:latin typeface="Courier"/>
+              </a:rPr>
+              <a:t>,</a:t>
+            </a:r>
+            <a:br/>
+            <a:r>
+              <a:rPr>
+                <a:solidFill>
+                  <a:srgbClr val="003B4F"/>
+                </a:solidFill>
+                <a:latin typeface="Courier"/>
+              </a:rPr>
+              <a:t>    </a:t>
+            </a:r>
+            <a:r>
+              <a:rPr>
+                <a:solidFill>
+                  <a:srgbClr val="657422"/>
+                </a:solidFill>
+                <a:latin typeface="Courier"/>
+              </a:rPr>
+              <a:t>x     =</a:t>
+            </a:r>
+            <a:r>
+              <a:rPr>
+                <a:solidFill>
+                  <a:srgbClr val="003B4F"/>
+                </a:solidFill>
+                <a:latin typeface="Courier"/>
+              </a:rPr>
+              <a:t> </a:t>
+            </a:r>
+            <a:r>
+              <a:rPr>
+                <a:solidFill>
+                  <a:srgbClr val="20794D"/>
+                </a:solidFill>
+                <a:latin typeface="Courier"/>
+              </a:rPr>
+              <a:t>"Date"</a:t>
+            </a:r>
+            <a:r>
+              <a:rPr>
+                <a:solidFill>
+                  <a:srgbClr val="003B4F"/>
+                </a:solidFill>
+                <a:latin typeface="Courier"/>
+              </a:rPr>
+              <a:t>,</a:t>
+            </a:r>
+            <a:br/>
+            <a:r>
+              <a:rPr>
+                <a:solidFill>
+                  <a:srgbClr val="003B4F"/>
+                </a:solidFill>
+                <a:latin typeface="Courier"/>
+              </a:rPr>
+              <a:t>    </a:t>
+            </a:r>
+            <a:r>
+              <a:rPr>
+                <a:solidFill>
+                  <a:srgbClr val="657422"/>
+                </a:solidFill>
+                <a:latin typeface="Courier"/>
+              </a:rPr>
+              <a:t>y     =</a:t>
+            </a:r>
+            <a:r>
+              <a:rPr>
+                <a:solidFill>
+                  <a:srgbClr val="003B4F"/>
+                </a:solidFill>
+                <a:latin typeface="Courier"/>
+              </a:rPr>
+              <a:t> </a:t>
+            </a:r>
+            <a:r>
+              <a:rPr>
+                <a:solidFill>
+                  <a:srgbClr val="20794D"/>
+                </a:solidFill>
+                <a:latin typeface="Courier"/>
+              </a:rPr>
+              <a:t>"Temperature (°C)"</a:t>
+            </a:r>
+            <a:br/>
+            <a:r>
+              <a:rPr>
+                <a:solidFill>
+                  <a:srgbClr val="003B4F"/>
+                </a:solidFill>
+                <a:latin typeface="Courier"/>
+              </a:rPr>
+              <a:t>  ) </a:t>
+            </a:r>
+            <a:r>
+              <a:rPr>
+                <a:solidFill>
+                  <a:srgbClr val="5E5E5E"/>
+                </a:solidFill>
+                <a:latin typeface="Courier"/>
+              </a:rPr>
+              <a:t>+</a:t>
+            </a:r>
+            <a:br/>
+            <a:r>
+              <a:rPr>
+                <a:solidFill>
+                  <a:srgbClr val="003B4F"/>
+                </a:solidFill>
+                <a:latin typeface="Courier"/>
+              </a:rPr>
+              <a:t>  </a:t>
+            </a:r>
+            <a:r>
+              <a:rPr>
+                <a:solidFill>
+                  <a:srgbClr val="4758AB"/>
+                </a:solidFill>
+                <a:latin typeface="Courier"/>
+              </a:rPr>
+              <a:t>theme_minimal</a:t>
+            </a:r>
+            <a:r>
+              <a:rPr>
+                <a:solidFill>
+                  <a:srgbClr val="003B4F"/>
+                </a:solidFill>
+                <a:latin typeface="Courier"/>
+              </a:rPr>
+              <a:t>()</a:t>
+            </a:r>
+            <a:br/>
+            <a:br/>
+            <a:r>
+              <a:rPr>
+                <a:solidFill>
+                  <a:srgbClr val="003B4F"/>
+                </a:solidFill>
+                <a:latin typeface="Courier"/>
+              </a:rPr>
+              <a:t>raw_temp_plot</a:t>
+            </a:r>
+          </a:p>
+        </p:txBody>
+      </p:sp>
+      <p:pic>
+        <p:nvPicPr>
+          <p:cNvPr descr="06_lecture_powerpoint_files/figure-pptx/raw-plot-06-1.png" id="0" name="Picture 1"/>
+          <p:cNvPicPr>
+            <a:picLocks noGrp="1" noChangeAspect="1"/>
+          </p:cNvPicPr>
+          <p:nvPr/>
+        </p:nvPicPr>
+        <p:blipFill>
+          <a:blip r:embed="rId2"/>
+          <a:stretch>
+            <a:fillRect/>
+          </a:stretch>
+        </p:blipFill>
+        <p:spPr bwMode="auto">
+          <a:xfrm>
+            <a:off x="127000" y="1562100"/>
+            <a:ext cx="4432300" cy="2730500"/>
+          </a:xfrm>
+          <a:prstGeom prst="rect">
+            <a:avLst/>
+          </a:prstGeom>
+          <a:noFill/>
+          <a:ln w="9525">
+            <a:noFill/>
+            <a:headEnd/>
+            <a:tailEnd/>
+          </a:ln>
+        </p:spPr>
+      </p:pic>
+      <p:sp>
+        <p:nvSpPr>
+          <p:cNvPr id="5" name="Text Placeholder 4"/>
+          <p:cNvSpPr>
+            <a:spLocks noGrp="1"/>
+          </p:cNvSpPr>
+          <p:nvPr>
+            <p:ph idx="3" sz="quarter" type="body"/>
+          </p:nvPr>
+        </p:nvSpPr>
+        <p:spPr/>
+        <p:txBody>
+          <a:bodyPr/>
+          <a:lstStyle/>
+          <a:p>
+            <a:pPr lvl="0" indent="0" marL="0">
+              <a:buNone/>
+            </a:pPr>
+            <a:r>
+              <a:rPr b="1"/>
+              <a:t>What do you see?</a:t>
+            </a:r>
+          </a:p>
+          <a:p>
+            <a:pPr lvl="0"/>
+            <a:r>
+              <a:rPr/>
+              <a:t>A dense, fuzzy band — the seasonal cycle (winter ↔ summer) dominates the plot</a:t>
+            </a:r>
+          </a:p>
+          <a:p>
+            <a:pPr lvl="0"/>
+            <a:r>
+              <a:rPr/>
+              <a:t>~28,000 points overlapping each other</a:t>
+            </a:r>
+          </a:p>
+          <a:p>
+            <a:pPr lvl="0"/>
+            <a:r>
+              <a:rPr/>
+              <a:t>Any long-term </a:t>
+            </a:r>
+            <a:r>
+              <a:rPr i="1"/>
+              <a:t>trend</a:t>
+            </a:r>
+            <a:r>
+              <a:rPr/>
+              <a:t> is completely hidden inside the seasonal noise</a:t>
+            </a:r>
+          </a:p>
+          <a:p>
+            <a:pPr lvl="0" indent="0" marL="0">
+              <a:buNone/>
+            </a:pPr>
+            <a:r>
+              <a:rPr b="1"/>
+              <a:t>The problem:</a:t>
+            </a:r>
+            <a:r>
+              <a:rPr/>
+              <a:t> raw daily data shows you </a:t>
+            </a:r>
+            <a:r>
+              <a:rPr i="1"/>
+              <a:t>everything</a:t>
+            </a:r>
+            <a:r>
+              <a:rPr/>
+              <a:t> — which means it can hide the </a:t>
+            </a:r>
+            <a:r>
+              <a:rPr i="1"/>
+              <a:t>one thing</a:t>
+            </a:r>
+            <a:r>
+              <a:rPr/>
+              <a:t> you’re looking for.</a:t>
+            </a:r>
+          </a:p>
+        </p:txBody>
+      </p:sp>
+    </p:spTree>
+  </p:cSld>
+</p:sld>
+</file>
+
+<file path=ppt/slides/slide8.xml><?xml version="1.0" encoding="utf-8"?>
+<p:sld xmlns:a="http://schemas.openxmlformats.org/drawingml/2006/main" xmlns:r="http://schemas.openxmlformats.org/officeDocument/2006/relationships" xmlns:p="http://schemas.openxmlformats.org/presentationml/2006/main">
+  <p:cSld>
+    <p:spTree>
+      <p:nvGrpSpPr>
+        <p:cNvPr id="1" name=""/>
+        <p:cNvGrpSpPr/>
+        <p:nvPr/>
+      </p:nvGrpSpPr>
+      <p:grpSpPr>
+        <a:xfrm>
+          <a:off x="0" y="0"/>
+          <a:ext cx="0" cy="0"/>
+          <a:chOff x="0" y="0"/>
+          <a:chExt cx="0" cy="0"/>
+        </a:xfrm>
+      </p:grpSpPr>
+      <p:sp>
+        <p:nvSpPr>
+          <p:cNvPr id="2" name="Title 1"/>
+          <p:cNvSpPr>
+            <a:spLocks noGrp="1"/>
+          </p:cNvSpPr>
+          <p:nvPr>
+            <p:ph type="title"/>
+          </p:nvPr>
+        </p:nvSpPr>
+        <p:spPr>
+          <a:xfrm>
+            <a:off x="139485" y="78119"/>
+            <a:ext cx="8229600" cy="607682"/>
+          </a:xfrm>
+        </p:spPr>
+        <p:txBody>
+          <a:bodyPr/>
+          <a:lstStyle/>
+          <a:p>
+            <a:pPr lvl="0" indent="0" marL="0">
+              <a:buNone/>
+            </a:pPr>
+            <a:r>
+              <a:rPr/>
+              <a:t>The Fix — Summarize the Story Out of the Noise</a:t>
+            </a:r>
+          </a:p>
+        </p:txBody>
+      </p:sp>
+      <p:sp>
+        <p:nvSpPr>
+          <p:cNvPr id="3" name="Text Placeholder 2"/>
+          <p:cNvSpPr>
+            <a:spLocks noGrp="1"/>
+          </p:cNvSpPr>
+          <p:nvPr>
+            <p:ph idx="1" type="body"/>
+          </p:nvPr>
+        </p:nvSpPr>
+        <p:spPr/>
+        <p:txBody>
+          <a:bodyPr/>
+          <a:lstStyle/>
+          <a:p>
+            <a:pPr lvl="0" indent="0" marL="0">
+              <a:buNone/>
+            </a:pPr>
+            <a:r>
+              <a:rPr b="1"/>
+              <a:t>The idea:</a:t>
+            </a:r>
+            <a:r>
+              <a:rPr/>
+              <a:t> group the data into bigger time chunks, then take the </a:t>
+            </a:r>
+            <a:r>
+              <a:rPr b="1"/>
+              <a:t>mean</a:t>
+            </a:r>
+            <a:r>
+              <a:rPr/>
+              <a:t> within each chunk.</a:t>
+            </a:r>
+          </a:p>
+        </p:txBody>
+      </p:sp>
+      <p:graphicFrame>
+        <p:nvGraphicFramePr>
+          <p:cNvPr id="6" name="Content Placeholder 5"/>
+          <p:cNvGraphicFramePr>
+            <a:graphicFrameLocks noGrp="1"/>
+          </p:cNvGraphicFramePr>
+          <p:nvPr>
+            <p:ph idx="1"/>
+          </p:nvPr>
+        </p:nvGraphicFramePr>
+        <p:xfrm>
+          <a:off x="127000" y="1270000"/>
+          <a:ext cx="4432300" cy="3302000"/>
+        </p:xfrm>
+        <a:graphic>
+          <a:graphicData uri="http://schemas.openxmlformats.org/drawingml/2006/table">
+            <a:tbl>
+              <a:tblPr firstRow="1" bandRow="1">
+                <a:tableStyleId>{5C22544A-7EE6-4342-B048-85BDC9FD1C3A}</a:tableStyleId>
+              </a:tblPr>
+              <a:tblGrid>
+                <a:gridCol w="1473200"/>
+                <a:gridCol w="1473200"/>
+                <a:gridCol w="1473200"/>
+              </a:tblGrid>
+              <a:tr h="0">
+                <a:tc>
+                  <a:txBody>
+                    <a:bodyPr/>
+                    <a:lstStyle/>
+                    <a:p>
+                      <a:pPr lvl="0" indent="0" marL="0">
+                        <a:buNone/>
+                      </a:pPr>
+                      <a:r>
+                        <a:rPr/>
+                        <a:t>Summary level</a:t>
+                      </a:r>
+                    </a:p>
+                  </a:txBody>
+                  <a:tcPr/>
+                </a:tc>
+                <a:tc>
+                  <a:txBody>
+                    <a:bodyPr/>
+                    <a:lstStyle/>
+                    <a:p>
+                      <a:pPr lvl="0" indent="0" marL="0">
+                        <a:buNone/>
+                      </a:pPr>
+                      <a:r>
+                        <a:rPr>
+                          <a:latin typeface="Courier"/>
+                        </a:rPr>
+                        <a:t>group_by()</a:t>
+                      </a:r>
+                    </a:p>
+                  </a:txBody>
+                  <a:tcPr/>
+                </a:tc>
+                <a:tc>
+                  <a:txBody>
+                    <a:bodyPr/>
+                    <a:lstStyle/>
+                    <a:p>
+                      <a:pPr lvl="0" indent="0" marL="0">
+                        <a:buNone/>
+                      </a:pPr>
+                      <a:r>
+                        <a:rPr/>
+                        <a:t>Rows after summary</a:t>
+                      </a:r>
+                    </a:p>
+                  </a:txBody>
+                  <a:tcPr/>
+                </a:tc>
+              </a:tr>
+              <a:tr h="0">
+                <a:tc>
+                  <a:txBody>
+                    <a:bodyPr/>
+                    <a:lstStyle/>
+                    <a:p>
+                      <a:pPr lvl="0" indent="0" marL="0">
+                        <a:buNone/>
+                      </a:pPr>
+                      <a:r>
+                        <a:rPr/>
+                        <a:t>Daily (raw)</a:t>
+                      </a:r>
+                    </a:p>
+                  </a:txBody>
+                </a:tc>
+                <a:tc>
+                  <a:txBody>
+                    <a:bodyPr/>
+                    <a:lstStyle/>
+                    <a:p>
+                      <a:pPr lvl="0" indent="0" marL="0">
+                        <a:buNone/>
+                      </a:pPr>
+                      <a:r>
+                        <a:rPr/>
+                        <a:t>none</a:t>
+                      </a:r>
+                    </a:p>
+                  </a:txBody>
+                </a:tc>
+                <a:tc>
+                  <a:txBody>
+                    <a:bodyPr/>
+                    <a:lstStyle/>
+                    <a:p>
+                      <a:pPr lvl="0" indent="0" marL="0">
+                        <a:buNone/>
+                      </a:pPr>
+                      <a:r>
+                        <a:rPr/>
+                        <a:t>~28,000</a:t>
+                      </a:r>
+                    </a:p>
+                  </a:txBody>
+                </a:tc>
+              </a:tr>
+              <a:tr h="0">
+                <a:tc>
+                  <a:txBody>
+                    <a:bodyPr/>
+                    <a:lstStyle/>
+                    <a:p>
+                      <a:pPr lvl="0" indent="0" marL="0">
+                        <a:buNone/>
+                      </a:pPr>
+                      <a:r>
+                        <a:rPr/>
+                        <a:t>Monthly</a:t>
+                      </a:r>
+                    </a:p>
+                  </a:txBody>
+                </a:tc>
+                <a:tc>
+                  <a:txBody>
+                    <a:bodyPr/>
+                    <a:lstStyle/>
+                    <a:p>
+                      <a:pPr lvl="0" indent="0" marL="0">
+                        <a:buNone/>
+                      </a:pPr>
+                      <a:r>
+                        <a:rPr>
+                          <a:latin typeface="Courier"/>
+                        </a:rPr>
+                        <a:t>YEAR, MONTH</a:t>
+                      </a:r>
+                    </a:p>
+                  </a:txBody>
+                </a:tc>
+                <a:tc>
+                  <a:txBody>
+                    <a:bodyPr/>
+                    <a:lstStyle/>
+                    <a:p>
+                      <a:pPr lvl="0" indent="0" marL="0">
+                        <a:buNone/>
+                      </a:pPr>
+                      <a:r>
+                        <a:rPr/>
+                        <a:t>~936</a:t>
+                      </a:r>
+                    </a:p>
+                  </a:txBody>
+                </a:tc>
+              </a:tr>
+              <a:tr h="0">
+                <a:tc>
+                  <a:txBody>
+                    <a:bodyPr/>
+                    <a:lstStyle/>
+                    <a:p>
+                      <a:pPr lvl="0" indent="0" marL="0">
+                        <a:buNone/>
+                      </a:pPr>
+                      <a:r>
+                        <a:rPr/>
+                        <a:t>Yearly</a:t>
+                      </a:r>
+                    </a:p>
+                  </a:txBody>
+                </a:tc>
+                <a:tc>
+                  <a:txBody>
+                    <a:bodyPr/>
+                    <a:lstStyle/>
+                    <a:p>
+                      <a:pPr lvl="0" indent="0" marL="0">
+                        <a:buNone/>
+                      </a:pPr>
+                      <a:r>
+                        <a:rPr>
+                          <a:latin typeface="Courier"/>
+                        </a:rPr>
+                        <a:t>YEAR</a:t>
+                      </a:r>
+                    </a:p>
+                  </a:txBody>
+                </a:tc>
+                <a:tc>
+                  <a:txBody>
+                    <a:bodyPr/>
+                    <a:lstStyle/>
+                    <a:p>
+                      <a:pPr lvl="0" indent="0" marL="0">
+                        <a:buNone/>
+                      </a:pPr>
+                      <a:r>
+                        <a:rPr/>
+                        <a:t>78</a:t>
+                      </a:r>
+                    </a:p>
+                  </a:txBody>
+                </a:tc>
+              </a:tr>
+            </a:tbl>
+          </a:graphicData>
+        </a:graphic>
+      </p:graphicFrame>
+      <p:sp>
+        <p:nvSpPr>
+          <p:cNvPr id="4" name="Content Placeholder 3"/>
+          <p:cNvSpPr>
+            <a:spLocks noGrp="1"/>
+          </p:cNvSpPr>
+          <p:nvPr>
+            <p:ph idx="2" sz="half"/>
+          </p:nvPr>
+        </p:nvSpPr>
+        <p:spPr/>
+        <p:txBody>
+          <a:bodyPr/>
+          <a:lstStyle/>
+          <a:p>
+            <a:pPr lvl="0" indent="0" marL="0">
+              <a:buNone/>
+            </a:pPr>
+            <a:r>
+              <a:rPr/>
+              <a:t>Each step </a:t>
+            </a:r>
+            <a:r>
+              <a:rPr b="1"/>
+              <a:t>trades detail for clarity</a:t>
+            </a:r>
+            <a:r>
+              <a:rPr/>
+              <a:t>. We lose day-to-day weather noise, but the climate signal becomes visible.</a:t>
+            </a:r>
+          </a:p>
+        </p:txBody>
+      </p:sp>
+      <p:sp>
+        <p:nvSpPr>
+          <p:cNvPr id="5" name="Text Placeholder 4"/>
+          <p:cNvSpPr>
+            <a:spLocks noGrp="1"/>
+          </p:cNvSpPr>
+          <p:nvPr>
+            <p:ph idx="3" sz="quarter" type="body"/>
+          </p:nvPr>
+        </p:nvSpPr>
+        <p:spPr/>
+        <p:txBody>
+          <a:bodyPr/>
+          <a:lstStyle/>
+          <a:p>
+            <a:pPr lvl="0" indent="0" marL="0">
+              <a:buNone/>
+            </a:pPr>
+            <a:r>
+              <a:rPr b="1"/>
+              <a:t>This is the same logic as Lecture 03’s </a:t>
+            </a:r>
+            <a:r>
+              <a:rPr b="1">
+                <a:latin typeface="Courier"/>
+              </a:rPr>
+              <a:t>group_by()</a:t>
+            </a:r>
+            <a:r>
+              <a:rPr b="1"/>
+              <a:t> + </a:t>
+            </a:r>
+            <a:r>
+              <a:rPr b="1">
+                <a:latin typeface="Courier"/>
+              </a:rPr>
+              <a:t>summarize()</a:t>
+            </a:r>
+            <a:r>
+              <a:rPr/>
+              <a:t> — just applied to time instead of to </a:t>
+            </a:r>
+            <a:r>
+              <a:rPr>
+                <a:latin typeface="Courier"/>
+              </a:rPr>
+              <a:t>side</a:t>
+            </a:r>
+            <a:r>
+              <a:rPr/>
+              <a:t> (sunny/shady).</a:t>
+            </a:r>
+          </a:p>
+          <a:p>
+            <a:pPr lvl="0" indent="0" marL="1270000">
+              <a:buNone/>
+            </a:pPr>
+            <a:r>
+              <a:rPr sz="2000" b="1"/>
+              <a:t>Tip</a:t>
+            </a:r>
+          </a:p>
+          <a:p>
+            <a:pPr lvl="0" indent="0" marL="1270000">
+              <a:buNone/>
+            </a:pPr>
+            <a:r>
+              <a:rPr sz="2000" b="1"/>
+              <a:t>🖐 Try it yourself</a:t>
+            </a:r>
+          </a:p>
+          <a:p>
+            <a:pPr lvl="0" indent="0" marL="1270000">
+              <a:buNone/>
+            </a:pPr>
+            <a:r>
+              <a:rPr sz="2000"/>
+              <a:t>Watch the </a:t>
+            </a:r>
+            <a:r>
+              <a:rPr sz="2000" i="1"/>
+              <a:t>same</a:t>
+            </a:r>
+            <a:r>
+              <a:rPr sz="2000"/>
+              <a:t> underlying data tell three different stories as we change the summary level.</a:t>
+            </a:r>
+          </a:p>
+        </p:txBody>
+      </p:sp>
+    </p:spTree>
+  </p:cSld>
+</p:sld>
+</file>
+
+<file path=ppt/slides/slide9.xml><?xml version="1.0" encoding="utf-8"?>
+<p:sld xmlns:a="http://schemas.openxmlformats.org/drawingml/2006/main" xmlns:r="http://schemas.openxmlformats.org/officeDocument/2006/relationships" xmlns:p="http://schemas.openxmlformats.org/presentationml/2006/main">
+  <p:cSld>
+    <p:spTree>
+      <p:nvGrpSpPr>
+        <p:cNvPr id="1" name=""/>
+        <p:cNvGrpSpPr/>
+        <p:nvPr/>
+      </p:nvGrpSpPr>
+      <p:grpSpPr>
+        <a:xfrm>
+          <a:off x="0" y="0"/>
+          <a:ext cx="0" cy="0"/>
+          <a:chOff x="0" y="0"/>
+          <a:chExt cx="0" cy="0"/>
+        </a:xfrm>
+      </p:grpSpPr>
+      <p:sp>
+        <p:nvSpPr>
+          <p:cNvPr id="2" name="Title 1"/>
+          <p:cNvSpPr>
+            <a:spLocks noGrp="1"/>
+          </p:cNvSpPr>
+          <p:nvPr>
+            <p:ph type="title"/>
+          </p:nvPr>
+        </p:nvSpPr>
+        <p:spPr>
+          <a:xfrm>
+            <a:off x="139485" y="78119"/>
+            <a:ext cx="8229600" cy="607682"/>
+          </a:xfrm>
+        </p:spPr>
+        <p:txBody>
+          <a:bodyPr/>
+          <a:lstStyle/>
+          <a:p>
+            <a:pPr lvl="0" indent="0" marL="0">
+              <a:buNone/>
+            </a:pPr>
+            <a:r>
+              <a:rPr/>
+              <a:t>Summarize by Month</a:t>
+            </a:r>
+          </a:p>
+        </p:txBody>
+      </p:sp>
+      <p:sp>
+        <p:nvSpPr>
+          <p:cNvPr id="3" name="Text Placeholder 2"/>
+          <p:cNvSpPr>
+            <a:spLocks noGrp="1"/>
+          </p:cNvSpPr>
+          <p:nvPr>
+            <p:ph idx="1" type="body"/>
+          </p:nvPr>
+        </p:nvSpPr>
+        <p:spPr/>
+        <p:txBody>
+          <a:bodyPr/>
+          <a:lstStyle/>
+          <a:p>
+            <a:pPr lvl="0" indent="0">
+              <a:buNone/>
+            </a:pPr>
+            <a:r>
+              <a:rPr>
+                <a:solidFill>
+                  <a:srgbClr val="5E5E5E"/>
+                </a:solidFill>
+                <a:latin typeface="Courier"/>
+              </a:rPr>
+              <a:t># Mean temperature per year-month -----------------------</a:t>
+            </a:r>
+            <a:br/>
+            <a:r>
+              <a:rPr>
+                <a:solidFill>
+                  <a:srgbClr val="003B4F"/>
+                </a:solidFill>
+                <a:latin typeface="Courier"/>
+              </a:rPr>
+              <a:t>dlh_month_df &lt;- dlh_temp_df </a:t>
+            </a:r>
+            <a:r>
+              <a:rPr>
+                <a:solidFill>
+                  <a:srgbClr val="5E5E5E"/>
+                </a:solidFill>
+                <a:latin typeface="Courier"/>
+              </a:rPr>
+              <a:t>%&gt;%</a:t>
+            </a:r>
+            <a:br/>
+            <a:r>
+              <a:rPr>
+                <a:solidFill>
+                  <a:srgbClr val="003B4F"/>
+                </a:solidFill>
+                <a:latin typeface="Courier"/>
+              </a:rPr>
+              <a:t>  </a:t>
+            </a:r>
+            <a:r>
+              <a:rPr>
+                <a:solidFill>
+                  <a:srgbClr val="4758AB"/>
+                </a:solidFill>
+                <a:latin typeface="Courier"/>
+              </a:rPr>
+              <a:t>group_by</a:t>
+            </a:r>
+            <a:r>
+              <a:rPr>
+                <a:solidFill>
+                  <a:srgbClr val="003B4F"/>
+                </a:solidFill>
+                <a:latin typeface="Courier"/>
+              </a:rPr>
+              <a:t>(YEAR, MONTH) </a:t>
+            </a:r>
+            <a:r>
+              <a:rPr>
+                <a:solidFill>
+                  <a:srgbClr val="5E5E5E"/>
+                </a:solidFill>
+                <a:latin typeface="Courier"/>
+              </a:rPr>
+              <a:t>%&gt;%</a:t>
+            </a:r>
+            <a:br/>
+            <a:r>
+              <a:rPr>
+                <a:solidFill>
+                  <a:srgbClr val="003B4F"/>
+                </a:solidFill>
+                <a:latin typeface="Courier"/>
+              </a:rPr>
+              <a:t>  </a:t>
+            </a:r>
+            <a:r>
+              <a:rPr>
+                <a:solidFill>
+                  <a:srgbClr val="4758AB"/>
+                </a:solidFill>
+                <a:latin typeface="Courier"/>
+              </a:rPr>
+              <a:t>summarize</a:t>
+            </a:r>
+            <a:r>
+              <a:rPr>
+                <a:solidFill>
+                  <a:srgbClr val="003B4F"/>
+                </a:solidFill>
+                <a:latin typeface="Courier"/>
+              </a:rPr>
+              <a:t>(</a:t>
+            </a:r>
+            <a:br/>
+            <a:r>
+              <a:rPr>
+                <a:solidFill>
+                  <a:srgbClr val="003B4F"/>
+                </a:solidFill>
+                <a:latin typeface="Courier"/>
+              </a:rPr>
+              <a:t>    </a:t>
+            </a:r>
+            <a:r>
+              <a:rPr>
+                <a:solidFill>
+                  <a:srgbClr val="657422"/>
+                </a:solidFill>
+                <a:latin typeface="Courier"/>
+              </a:rPr>
+              <a:t>YEARMODA =</a:t>
+            </a:r>
+            <a:r>
+              <a:rPr>
+                <a:solidFill>
+                  <a:srgbClr val="003B4F"/>
+                </a:solidFill>
+                <a:latin typeface="Courier"/>
+              </a:rPr>
+              <a:t> </a:t>
+            </a:r>
+            <a:r>
+              <a:rPr>
+                <a:solidFill>
+                  <a:srgbClr val="4758AB"/>
+                </a:solidFill>
+                <a:latin typeface="Courier"/>
+              </a:rPr>
+              <a:t>first</a:t>
+            </a:r>
+            <a:r>
+              <a:rPr>
+                <a:solidFill>
+                  <a:srgbClr val="003B4F"/>
+                </a:solidFill>
+                <a:latin typeface="Courier"/>
+              </a:rPr>
+              <a:t>(YEARMODA),</a:t>
+            </a:r>
+            <a:br/>
+            <a:r>
+              <a:rPr>
+                <a:solidFill>
+                  <a:srgbClr val="003B4F"/>
+                </a:solidFill>
+                <a:latin typeface="Courier"/>
+              </a:rPr>
+              <a:t>    </a:t>
+            </a:r>
+            <a:r>
+              <a:rPr>
+                <a:solidFill>
+                  <a:srgbClr val="657422"/>
+                </a:solidFill>
+                <a:latin typeface="Courier"/>
+              </a:rPr>
+              <a:t>TEMP     =</a:t>
+            </a:r>
+            <a:r>
+              <a:rPr>
+                <a:solidFill>
+                  <a:srgbClr val="003B4F"/>
+                </a:solidFill>
+                <a:latin typeface="Courier"/>
+              </a:rPr>
+              <a:t> </a:t>
+            </a:r>
+            <a:r>
+              <a:rPr>
+                <a:solidFill>
+                  <a:srgbClr val="4758AB"/>
+                </a:solidFill>
+                <a:latin typeface="Courier"/>
+              </a:rPr>
+              <a:t>mean</a:t>
+            </a:r>
+            <a:r>
+              <a:rPr>
+                <a:solidFill>
+                  <a:srgbClr val="003B4F"/>
+                </a:solidFill>
+                <a:latin typeface="Courier"/>
+              </a:rPr>
+              <a:t>(TEMP, </a:t>
+            </a:r>
+            <a:r>
+              <a:rPr>
+                <a:solidFill>
+                  <a:srgbClr val="657422"/>
+                </a:solidFill>
+                <a:latin typeface="Courier"/>
+              </a:rPr>
+              <a:t>na.rm =</a:t>
+            </a:r>
+            <a:r>
+              <a:rPr>
+                <a:solidFill>
+                  <a:srgbClr val="003B4F"/>
+                </a:solidFill>
+                <a:latin typeface="Courier"/>
+              </a:rPr>
+              <a:t> </a:t>
+            </a:r>
+            <a:r>
+              <a:rPr>
+                <a:solidFill>
+                  <a:srgbClr val="8F5902"/>
+                </a:solidFill>
+                <a:latin typeface="Courier"/>
+              </a:rPr>
+              <a:t>TRUE</a:t>
+            </a:r>
+            <a:r>
+              <a:rPr>
+                <a:solidFill>
+                  <a:srgbClr val="003B4F"/>
+                </a:solidFill>
+                <a:latin typeface="Courier"/>
+              </a:rPr>
+              <a:t>)</a:t>
+            </a:r>
+            <a:br/>
+            <a:r>
+              <a:rPr>
+                <a:solidFill>
+                  <a:srgbClr val="003B4F"/>
+                </a:solidFill>
+                <a:latin typeface="Courier"/>
+              </a:rPr>
+              <a:t>  )</a:t>
+            </a:r>
+          </a:p>
+          <a:p>
+            <a:pPr lvl="0" indent="0">
+              <a:buNone/>
+            </a:pPr>
+            <a:r>
+              <a:rPr>
+                <a:solidFill>
+                  <a:srgbClr val="5E5E5E"/>
+                </a:solidFill>
+                <a:latin typeface="Courier"/>
+              </a:rPr>
+              <a:t># Plot the monthly means ----------------------------------</a:t>
+            </a:r>
+            <a:br/>
+            <a:r>
+              <a:rPr>
+                <a:solidFill>
+                  <a:srgbClr val="003B4F"/>
+                </a:solidFill>
+                <a:latin typeface="Courier"/>
+              </a:rPr>
+              <a:t>month_temp_plot &lt;- dlh_month_df </a:t>
+            </a:r>
+            <a:r>
+              <a:rPr>
+                <a:solidFill>
+                  <a:srgbClr val="5E5E5E"/>
+                </a:solidFill>
+                <a:latin typeface="Courier"/>
+              </a:rPr>
+              <a:t>%&gt;%</a:t>
+            </a:r>
+            <a:br/>
+            <a:r>
+              <a:rPr>
+                <a:solidFill>
+                  <a:srgbClr val="003B4F"/>
+                </a:solidFill>
+                <a:latin typeface="Courier"/>
+              </a:rPr>
+              <a:t>  </a:t>
+            </a:r>
+            <a:r>
+              <a:rPr>
+                <a:solidFill>
+                  <a:srgbClr val="4758AB"/>
+                </a:solidFill>
+                <a:latin typeface="Courier"/>
+              </a:rPr>
+              <a:t>ggplot</a:t>
+            </a:r>
+            <a:r>
+              <a:rPr>
+                <a:solidFill>
+                  <a:srgbClr val="003B4F"/>
+                </a:solidFill>
+                <a:latin typeface="Courier"/>
+              </a:rPr>
+              <a:t>(</a:t>
+            </a:r>
+            <a:r>
+              <a:rPr>
+                <a:solidFill>
+                  <a:srgbClr val="4758AB"/>
+                </a:solidFill>
+                <a:latin typeface="Courier"/>
+              </a:rPr>
+              <a:t>aes</a:t>
+            </a:r>
+            <a:r>
+              <a:rPr>
+                <a:solidFill>
+                  <a:srgbClr val="003B4F"/>
+                </a:solidFill>
+                <a:latin typeface="Courier"/>
+              </a:rPr>
+              <a:t>(</a:t>
+            </a:r>
+            <a:r>
+              <a:rPr>
+                <a:solidFill>
+                  <a:srgbClr val="657422"/>
+                </a:solidFill>
+                <a:latin typeface="Courier"/>
+              </a:rPr>
+              <a:t>x =</a:t>
+            </a:r>
+            <a:r>
+              <a:rPr>
+                <a:solidFill>
+                  <a:srgbClr val="003B4F"/>
+                </a:solidFill>
+                <a:latin typeface="Courier"/>
+              </a:rPr>
+              <a:t> YEARMODA, </a:t>
+            </a:r>
+            <a:r>
+              <a:rPr>
+                <a:solidFill>
+                  <a:srgbClr val="657422"/>
+                </a:solidFill>
+                <a:latin typeface="Courier"/>
+              </a:rPr>
+              <a:t>y =</a:t>
+            </a:r>
+            <a:r>
+              <a:rPr>
+                <a:solidFill>
+                  <a:srgbClr val="003B4F"/>
+                </a:solidFill>
+                <a:latin typeface="Courier"/>
+              </a:rPr>
+              <a:t> TEMP)) </a:t>
+            </a:r>
+            <a:r>
+              <a:rPr>
+                <a:solidFill>
+                  <a:srgbClr val="5E5E5E"/>
+                </a:solidFill>
+                <a:latin typeface="Courier"/>
+              </a:rPr>
+              <a:t>+</a:t>
+            </a:r>
+            <a:br/>
+            <a:r>
+              <a:rPr>
+                <a:solidFill>
+                  <a:srgbClr val="003B4F"/>
+                </a:solidFill>
+                <a:latin typeface="Courier"/>
+              </a:rPr>
+              <a:t>  </a:t>
+            </a:r>
+            <a:r>
+              <a:rPr>
+                <a:solidFill>
+                  <a:srgbClr val="4758AB"/>
+                </a:solidFill>
+                <a:latin typeface="Courier"/>
+              </a:rPr>
+              <a:t>geom_point</a:t>
+            </a:r>
+            <a:r>
+              <a:rPr>
+                <a:solidFill>
+                  <a:srgbClr val="003B4F"/>
+                </a:solidFill>
+                <a:latin typeface="Courier"/>
+              </a:rPr>
+              <a:t>(</a:t>
+            </a:r>
+            <a:r>
+              <a:rPr>
+                <a:solidFill>
+                  <a:srgbClr val="657422"/>
+                </a:solidFill>
+                <a:latin typeface="Courier"/>
+              </a:rPr>
+              <a:t>alpha =</a:t>
+            </a:r>
+            <a:r>
+              <a:rPr>
+                <a:solidFill>
+                  <a:srgbClr val="003B4F"/>
+                </a:solidFill>
+                <a:latin typeface="Courier"/>
+              </a:rPr>
+              <a:t> </a:t>
+            </a:r>
+            <a:r>
+              <a:rPr>
+                <a:solidFill>
+                  <a:srgbClr val="AD0000"/>
+                </a:solidFill>
+                <a:latin typeface="Courier"/>
+              </a:rPr>
+              <a:t>0.4</a:t>
+            </a:r>
+            <a:r>
+              <a:rPr>
+                <a:solidFill>
+                  <a:srgbClr val="003B4F"/>
+                </a:solidFill>
+                <a:latin typeface="Courier"/>
+              </a:rPr>
+              <a:t>, </a:t>
+            </a:r>
+            <a:r>
+              <a:rPr>
+                <a:solidFill>
+                  <a:srgbClr val="657422"/>
+                </a:solidFill>
+                <a:latin typeface="Courier"/>
+              </a:rPr>
+              <a:t>size =</a:t>
+            </a:r>
+            <a:r>
+              <a:rPr>
+                <a:solidFill>
+                  <a:srgbClr val="003B4F"/>
+                </a:solidFill>
+                <a:latin typeface="Courier"/>
+              </a:rPr>
+              <a:t> </a:t>
+            </a:r>
+            <a:r>
+              <a:rPr>
+                <a:solidFill>
+                  <a:srgbClr val="AD0000"/>
+                </a:solidFill>
+                <a:latin typeface="Courier"/>
+              </a:rPr>
+              <a:t>0.8</a:t>
+            </a:r>
+            <a:r>
+              <a:rPr>
+                <a:solidFill>
+                  <a:srgbClr val="003B4F"/>
+                </a:solidFill>
+                <a:latin typeface="Courier"/>
+              </a:rPr>
+              <a:t>) </a:t>
+            </a:r>
+            <a:r>
+              <a:rPr>
+                <a:solidFill>
+                  <a:srgbClr val="5E5E5E"/>
+                </a:solidFill>
+                <a:latin typeface="Courier"/>
+              </a:rPr>
+              <a:t>+</a:t>
+            </a:r>
+            <a:br/>
+            <a:r>
+              <a:rPr>
+                <a:solidFill>
+                  <a:srgbClr val="003B4F"/>
+                </a:solidFill>
+                <a:latin typeface="Courier"/>
+              </a:rPr>
+              <a:t>  </a:t>
+            </a:r>
+            <a:r>
+              <a:rPr>
+                <a:solidFill>
+                  <a:srgbClr val="4758AB"/>
+                </a:solidFill>
+                <a:latin typeface="Courier"/>
+              </a:rPr>
+              <a:t>geom_line</a:t>
+            </a:r>
+            <a:r>
+              <a:rPr>
+                <a:solidFill>
+                  <a:srgbClr val="003B4F"/>
+                </a:solidFill>
+                <a:latin typeface="Courier"/>
+              </a:rPr>
+              <a:t>(</a:t>
+            </a:r>
+            <a:r>
+              <a:rPr>
+                <a:solidFill>
+                  <a:srgbClr val="657422"/>
+                </a:solidFill>
+                <a:latin typeface="Courier"/>
+              </a:rPr>
+              <a:t>alpha =</a:t>
+            </a:r>
+            <a:r>
+              <a:rPr>
+                <a:solidFill>
+                  <a:srgbClr val="003B4F"/>
+                </a:solidFill>
+                <a:latin typeface="Courier"/>
+              </a:rPr>
+              <a:t> </a:t>
+            </a:r>
+            <a:r>
+              <a:rPr>
+                <a:solidFill>
+                  <a:srgbClr val="AD0000"/>
+                </a:solidFill>
+                <a:latin typeface="Courier"/>
+              </a:rPr>
+              <a:t>0.4</a:t>
+            </a:r>
+            <a:r>
+              <a:rPr>
+                <a:solidFill>
+                  <a:srgbClr val="003B4F"/>
+                </a:solidFill>
+                <a:latin typeface="Courier"/>
+              </a:rPr>
+              <a:t>) </a:t>
+            </a:r>
+            <a:r>
+              <a:rPr>
+                <a:solidFill>
+                  <a:srgbClr val="5E5E5E"/>
+                </a:solidFill>
+                <a:latin typeface="Courier"/>
+              </a:rPr>
+              <a:t>+</a:t>
+            </a:r>
+            <a:br/>
+            <a:r>
+              <a:rPr>
+                <a:solidFill>
+                  <a:srgbClr val="003B4F"/>
+                </a:solidFill>
+                <a:latin typeface="Courier"/>
+              </a:rPr>
+              <a:t>  </a:t>
+            </a:r>
+            <a:r>
+              <a:rPr>
+                <a:solidFill>
+                  <a:srgbClr val="4758AB"/>
+                </a:solidFill>
+                <a:latin typeface="Courier"/>
+              </a:rPr>
+              <a:t>geom_smooth</a:t>
+            </a:r>
+            <a:r>
+              <a:rPr>
+                <a:solidFill>
+                  <a:srgbClr val="003B4F"/>
+                </a:solidFill>
+                <a:latin typeface="Courier"/>
+              </a:rPr>
+              <a:t>(</a:t>
+            </a:r>
+            <a:r>
+              <a:rPr>
+                <a:solidFill>
+                  <a:srgbClr val="657422"/>
+                </a:solidFill>
+                <a:latin typeface="Courier"/>
+              </a:rPr>
+              <a:t>method =</a:t>
+            </a:r>
+            <a:r>
+              <a:rPr>
+                <a:solidFill>
+                  <a:srgbClr val="003B4F"/>
+                </a:solidFill>
+                <a:latin typeface="Courier"/>
+              </a:rPr>
+              <a:t> </a:t>
+            </a:r>
+            <a:r>
+              <a:rPr>
+                <a:solidFill>
+                  <a:srgbClr val="20794D"/>
+                </a:solidFill>
+                <a:latin typeface="Courier"/>
+              </a:rPr>
+              <a:t>"lm"</a:t>
+            </a:r>
+            <a:r>
+              <a:rPr>
+                <a:solidFill>
+                  <a:srgbClr val="003B4F"/>
+                </a:solidFill>
+                <a:latin typeface="Courier"/>
+              </a:rPr>
+              <a:t>, </a:t>
+            </a:r>
+            <a:r>
+              <a:rPr>
+                <a:solidFill>
+                  <a:srgbClr val="657422"/>
+                </a:solidFill>
+                <a:latin typeface="Courier"/>
+              </a:rPr>
+              <a:t>color =</a:t>
+            </a:r>
+            <a:r>
+              <a:rPr>
+                <a:solidFill>
+                  <a:srgbClr val="003B4F"/>
+                </a:solidFill>
+                <a:latin typeface="Courier"/>
+              </a:rPr>
+              <a:t> </a:t>
+            </a:r>
+            <a:r>
+              <a:rPr>
+                <a:solidFill>
+                  <a:srgbClr val="20794D"/>
+                </a:solidFill>
+                <a:latin typeface="Courier"/>
+              </a:rPr>
+              <a:t>"steelblue"</a:t>
+            </a:r>
+            <a:r>
+              <a:rPr>
+                <a:solidFill>
+                  <a:srgbClr val="003B4F"/>
+                </a:solidFill>
+                <a:latin typeface="Courier"/>
+              </a:rPr>
+              <a:t>) </a:t>
+            </a:r>
+            <a:r>
+              <a:rPr>
+                <a:solidFill>
+                  <a:srgbClr val="5E5E5E"/>
+                </a:solidFill>
+                <a:latin typeface="Courier"/>
+              </a:rPr>
+              <a:t>+</a:t>
+            </a:r>
+            <a:br/>
+            <a:r>
+              <a:rPr>
+                <a:solidFill>
+                  <a:srgbClr val="003B4F"/>
+                </a:solidFill>
+                <a:latin typeface="Courier"/>
+              </a:rPr>
+              <a:t>  </a:t>
+            </a:r>
+            <a:r>
+              <a:rPr>
+                <a:solidFill>
+                  <a:srgbClr val="4758AB"/>
+                </a:solidFill>
+                <a:latin typeface="Courier"/>
+              </a:rPr>
+              <a:t>labs</a:t>
+            </a:r>
+            <a:r>
+              <a:rPr>
+                <a:solidFill>
+                  <a:srgbClr val="003B4F"/>
+                </a:solidFill>
+                <a:latin typeface="Courier"/>
+              </a:rPr>
+              <a:t>(</a:t>
+            </a:r>
+            <a:br/>
+            <a:r>
+              <a:rPr>
+                <a:solidFill>
+                  <a:srgbClr val="003B4F"/>
+                </a:solidFill>
+                <a:latin typeface="Courier"/>
+              </a:rPr>
+              <a:t>    </a:t>
+            </a:r>
+            <a:r>
+              <a:rPr>
+                <a:solidFill>
+                  <a:srgbClr val="657422"/>
+                </a:solidFill>
+                <a:latin typeface="Courier"/>
+              </a:rPr>
+              <a:t>title =</a:t>
+            </a:r>
+            <a:r>
+              <a:rPr>
+                <a:solidFill>
+                  <a:srgbClr val="003B4F"/>
+                </a:solidFill>
+                <a:latin typeface="Courier"/>
+              </a:rPr>
+              <a:t> </a:t>
+            </a:r>
+            <a:r>
+              <a:rPr>
+                <a:solidFill>
+                  <a:srgbClr val="20794D"/>
+                </a:solidFill>
+                <a:latin typeface="Courier"/>
+              </a:rPr>
+              <a:t>"Duluth Monthly Mean Temperature"</a:t>
+            </a:r>
+            <a:r>
+              <a:rPr>
+                <a:solidFill>
+                  <a:srgbClr val="003B4F"/>
+                </a:solidFill>
+                <a:latin typeface="Courier"/>
+              </a:rPr>
+              <a:t>,</a:t>
+            </a:r>
+            <a:br/>
+            <a:r>
+              <a:rPr>
+                <a:solidFill>
+                  <a:srgbClr val="003B4F"/>
+                </a:solidFill>
+                <a:latin typeface="Courier"/>
+              </a:rPr>
+              <a:t>    </a:t>
+            </a:r>
+            <a:r>
+              <a:rPr>
+                <a:solidFill>
+                  <a:srgbClr val="657422"/>
+                </a:solidFill>
+                <a:latin typeface="Courier"/>
+              </a:rPr>
+              <a:t>x     =</a:t>
+            </a:r>
+            <a:r>
+              <a:rPr>
+                <a:solidFill>
+                  <a:srgbClr val="003B4F"/>
+                </a:solidFill>
+                <a:latin typeface="Courier"/>
+              </a:rPr>
+              <a:t> </a:t>
+            </a:r>
+            <a:r>
+              <a:rPr>
+                <a:solidFill>
+                  <a:srgbClr val="20794D"/>
+                </a:solidFill>
+                <a:latin typeface="Courier"/>
+              </a:rPr>
+              <a:t>"Date"</a:t>
+            </a:r>
+            <a:r>
+              <a:rPr>
+                <a:solidFill>
+                  <a:srgbClr val="003B4F"/>
+                </a:solidFill>
+                <a:latin typeface="Courier"/>
+              </a:rPr>
+              <a:t>, </a:t>
+            </a:r>
+            <a:r>
+              <a:rPr>
+                <a:solidFill>
+                  <a:srgbClr val="657422"/>
+                </a:solidFill>
+                <a:latin typeface="Courier"/>
+              </a:rPr>
+              <a:t>y =</a:t>
+            </a:r>
+            <a:r>
+              <a:rPr>
+                <a:solidFill>
+                  <a:srgbClr val="003B4F"/>
+                </a:solidFill>
+                <a:latin typeface="Courier"/>
+              </a:rPr>
+              <a:t> </a:t>
+            </a:r>
+            <a:r>
+              <a:rPr>
+                <a:solidFill>
+                  <a:srgbClr val="20794D"/>
+                </a:solidFill>
+                <a:latin typeface="Courier"/>
+              </a:rPr>
+              <a:t>"Temperature (°C)"</a:t>
+            </a:r>
+            <a:br/>
+            <a:r>
+              <a:rPr>
+                <a:solidFill>
+                  <a:srgbClr val="003B4F"/>
+                </a:solidFill>
+                <a:latin typeface="Courier"/>
+              </a:rPr>
+              <a:t>  ) </a:t>
+            </a:r>
+            <a:r>
+              <a:rPr>
+                <a:solidFill>
+                  <a:srgbClr val="5E5E5E"/>
+                </a:solidFill>
+                <a:latin typeface="Courier"/>
+              </a:rPr>
+              <a:t>+</a:t>
+            </a:r>
+            <a:br/>
+            <a:r>
+              <a:rPr>
+                <a:solidFill>
+                  <a:srgbClr val="003B4F"/>
+                </a:solidFill>
+                <a:latin typeface="Courier"/>
+              </a:rPr>
+              <a:t>  </a:t>
+            </a:r>
+            <a:r>
+              <a:rPr>
+                <a:solidFill>
+                  <a:srgbClr val="4758AB"/>
+                </a:solidFill>
+                <a:latin typeface="Courier"/>
+              </a:rPr>
+              <a:t>theme_minimal</a:t>
+            </a:r>
+            <a:r>
+              <a:rPr>
+                <a:solidFill>
+                  <a:srgbClr val="003B4F"/>
+                </a:solidFill>
+                <a:latin typeface="Courier"/>
+              </a:rPr>
+              <a:t>()</a:t>
+            </a:r>
+            <a:br/>
+            <a:br/>
+            <a:r>
+              <a:rPr>
+                <a:solidFill>
+                  <a:srgbClr val="003B4F"/>
+                </a:solidFill>
+                <a:latin typeface="Courier"/>
+              </a:rPr>
+              <a:t>month_temp_plot</a:t>
+            </a:r>
+          </a:p>
+        </p:txBody>
+      </p:sp>
+      <p:pic>
+        <p:nvPicPr>
+          <p:cNvPr descr="06_lecture_powerpoint_files/figure-pptx/monthly-plot-06-1.png" id="0" name="Picture 1"/>
+          <p:cNvPicPr>
+            <a:picLocks noGrp="1" noChangeAspect="1"/>
+          </p:cNvPicPr>
+          <p:nvPr/>
+        </p:nvPicPr>
+        <p:blipFill>
+          <a:blip r:embed="rId2"/>
+          <a:stretch>
+            <a:fillRect/>
+          </a:stretch>
+        </p:blipFill>
+        <p:spPr bwMode="auto">
+          <a:xfrm>
+            <a:off x="127000" y="1562100"/>
+            <a:ext cx="4432300" cy="2730500"/>
+          </a:xfrm>
+          <a:prstGeom prst="rect">
+            <a:avLst/>
+          </a:prstGeom>
+          <a:noFill/>
+          <a:ln w="9525">
+            <a:noFill/>
+            <a:headEnd/>
+            <a:tailEnd/>
+          </a:ln>
+        </p:spPr>
+      </p:pic>
+      <p:sp>
+        <p:nvSpPr>
+          <p:cNvPr id="5" name="Text Placeholder 4"/>
+          <p:cNvSpPr>
+            <a:spLocks noGrp="1"/>
+          </p:cNvSpPr>
+          <p:nvPr>
+            <p:ph idx="3" sz="quarter" type="body"/>
+          </p:nvPr>
+        </p:nvSpPr>
+        <p:spPr/>
+        <p:txBody>
+          <a:bodyPr/>
+          <a:lstStyle/>
+          <a:p>
+            <a:pPr lvl="0" indent="0" marL="0">
+              <a:buNone/>
+            </a:pPr>
+            <a:r>
+              <a:rPr b="1"/>
+              <a:t>Better — but still busy.</a:t>
+            </a:r>
+          </a:p>
+          <a:p>
+            <a:pPr lvl="0"/>
+            <a:r>
+              <a:rPr/>
+              <a:t>The seasonal cycle (summer peaks, winter dips) is now a clean, regular wave</a:t>
+            </a:r>
+          </a:p>
+          <a:p>
+            <a:pPr lvl="0"/>
+            <a:r>
+              <a:rPr/>
+              <a:t>A faint regression line is visible, but the seasonal swing still dominates the y-axis range</a:t>
+            </a:r>
+          </a:p>
+          <a:p>
+            <a:pPr lvl="0" indent="0" marL="0">
+              <a:buNone/>
+            </a:pPr>
+            <a:r>
+              <a:rPr>
+                <a:latin typeface="Courier"/>
+              </a:rPr>
+              <a:t>first(YEARMODA)</a:t>
+            </a:r>
+            <a:r>
+              <a:rPr/>
+              <a:t> keeps one representative date per month so we can still plot on a time axis.</a:t>
             </a:r>
           </a:p>
         </p:txBody>
